--- a/Lectures/12-features-and-imputation.pptx
+++ b/Lectures/12-features-and-imputation.pptx
@@ -5,48 +5,46 @@
     <p:sldMasterId id="2147483648" r:id="rId1"/>
   </p:sldMasterIdLst>
   <p:notesMasterIdLst>
-    <p:notesMasterId r:id="rId41"/>
+    <p:notesMasterId r:id="rId39"/>
   </p:notesMasterIdLst>
   <p:sldIdLst>
     <p:sldId id="256" r:id="rId2"/>
-    <p:sldId id="471" r:id="rId3"/>
-    <p:sldId id="318" r:id="rId4"/>
-    <p:sldId id="428" r:id="rId5"/>
-    <p:sldId id="475" r:id="rId6"/>
-    <p:sldId id="476" r:id="rId7"/>
-    <p:sldId id="499" r:id="rId8"/>
-    <p:sldId id="323" r:id="rId9"/>
-    <p:sldId id="282" r:id="rId10"/>
-    <p:sldId id="274" r:id="rId11"/>
-    <p:sldId id="309" r:id="rId12"/>
-    <p:sldId id="301" r:id="rId13"/>
-    <p:sldId id="303" r:id="rId14"/>
-    <p:sldId id="320" r:id="rId15"/>
-    <p:sldId id="295" r:id="rId16"/>
-    <p:sldId id="505" r:id="rId17"/>
-    <p:sldId id="503" r:id="rId18"/>
-    <p:sldId id="478" r:id="rId19"/>
-    <p:sldId id="502" r:id="rId20"/>
-    <p:sldId id="500" r:id="rId21"/>
-    <p:sldId id="501" r:id="rId22"/>
-    <p:sldId id="300" r:id="rId23"/>
-    <p:sldId id="302" r:id="rId24"/>
-    <p:sldId id="304" r:id="rId25"/>
-    <p:sldId id="277" r:id="rId26"/>
-    <p:sldId id="278" r:id="rId27"/>
-    <p:sldId id="280" r:id="rId28"/>
-    <p:sldId id="279" r:id="rId29"/>
-    <p:sldId id="306" r:id="rId30"/>
-    <p:sldId id="310" r:id="rId31"/>
-    <p:sldId id="312" r:id="rId32"/>
-    <p:sldId id="313" r:id="rId33"/>
-    <p:sldId id="317" r:id="rId34"/>
-    <p:sldId id="314" r:id="rId35"/>
-    <p:sldId id="316" r:id="rId36"/>
-    <p:sldId id="315" r:id="rId37"/>
-    <p:sldId id="322" r:id="rId38"/>
-    <p:sldId id="473" r:id="rId39"/>
-    <p:sldId id="504" r:id="rId40"/>
+    <p:sldId id="506" r:id="rId3"/>
+    <p:sldId id="471" r:id="rId4"/>
+    <p:sldId id="318" r:id="rId5"/>
+    <p:sldId id="499" r:id="rId6"/>
+    <p:sldId id="497" r:id="rId7"/>
+    <p:sldId id="282" r:id="rId8"/>
+    <p:sldId id="274" r:id="rId9"/>
+    <p:sldId id="309" r:id="rId10"/>
+    <p:sldId id="301" r:id="rId11"/>
+    <p:sldId id="303" r:id="rId12"/>
+    <p:sldId id="320" r:id="rId13"/>
+    <p:sldId id="295" r:id="rId14"/>
+    <p:sldId id="505" r:id="rId15"/>
+    <p:sldId id="503" r:id="rId16"/>
+    <p:sldId id="478" r:id="rId17"/>
+    <p:sldId id="502" r:id="rId18"/>
+    <p:sldId id="500" r:id="rId19"/>
+    <p:sldId id="501" r:id="rId20"/>
+    <p:sldId id="300" r:id="rId21"/>
+    <p:sldId id="302" r:id="rId22"/>
+    <p:sldId id="304" r:id="rId23"/>
+    <p:sldId id="277" r:id="rId24"/>
+    <p:sldId id="278" r:id="rId25"/>
+    <p:sldId id="280" r:id="rId26"/>
+    <p:sldId id="279" r:id="rId27"/>
+    <p:sldId id="306" r:id="rId28"/>
+    <p:sldId id="310" r:id="rId29"/>
+    <p:sldId id="312" r:id="rId30"/>
+    <p:sldId id="313" r:id="rId31"/>
+    <p:sldId id="317" r:id="rId32"/>
+    <p:sldId id="314" r:id="rId33"/>
+    <p:sldId id="316" r:id="rId34"/>
+    <p:sldId id="315" r:id="rId35"/>
+    <p:sldId id="322" r:id="rId36"/>
+    <p:sldId id="473" r:id="rId37"/>
+    <p:sldId id="504" r:id="rId38"/>
   </p:sldIdLst>
   <p:sldSz cx="12192000" cy="6858000"/>
   <p:notesSz cx="6858000" cy="9144000"/>
@@ -284,7 +282,7 @@
       <p15:sldGuideLst xmlns:p15="http://schemas.microsoft.com/office/powerpoint/2012/main"/>
     </p:ext>
     <p:ext uri="http://customooxmlschemas.google.com/">
-      <go:slidesCustomData xmlns="" xmlns:mc="http://schemas.openxmlformats.org/markup-compatibility/2006" xmlns:mv="urn:schemas-microsoft-com:mac:vml" xmlns:c="http://schemas.openxmlformats.org/drawingml/2006/chart" xmlns:dgm="http://schemas.openxmlformats.org/drawingml/2006/diagram" xmlns:o="urn:schemas-microsoft-com:office:office" xmlns:v="urn:schemas-microsoft-com:vml" xmlns:pvml="urn:schemas-microsoft-com:office:powerpoint" xmlns:com="http://schemas.openxmlformats.org/drawingml/2006/compatibility" xmlns:p14="http://schemas.microsoft.com/office/powerpoint/2010/main" xmlns:p15="http://schemas.microsoft.com/office/powerpoint/2012/main" xmlns:go="http://customooxmlschemas.google.com/" r:id="rId42" roundtripDataSignature="AMtx7mjFyVUGRZWio+dc9dxzYsimUxNJbg=="/>
+      <go:slidesCustomData xmlns:go="http://customooxmlschemas.google.com/" xmlns:p15="http://schemas.microsoft.com/office/powerpoint/2012/main" xmlns:p14="http://schemas.microsoft.com/office/powerpoint/2010/main" xmlns:com="http://schemas.openxmlformats.org/drawingml/2006/compatibility" xmlns:pvml="urn:schemas-microsoft-com:office:powerpoint" xmlns:v="urn:schemas-microsoft-com:vml" xmlns:o="urn:schemas-microsoft-com:office:office" xmlns:dgm="http://schemas.openxmlformats.org/drawingml/2006/diagram" xmlns:c="http://schemas.openxmlformats.org/drawingml/2006/chart" xmlns:mv="urn:schemas-microsoft-com:mac:vml" xmlns:mc="http://schemas.openxmlformats.org/markup-compatibility/2006" xmlns="" r:id="rId42" roundtripDataSignature="AMtx7mjFyVUGRZWio+dc9dxzYsimUxNJbg=="/>
     </p:ext>
   </p:extLst>
 </p:presentation>
@@ -3194,7 +3192,7 @@
   <dgm:whole/>
   <dgm:extLst>
     <a:ext uri="http://schemas.microsoft.com/office/drawing/2008/diagram">
-      <dsp:dataModelExt xmlns:dsp="http://schemas.microsoft.com/office/drawing/2008/diagram" relId="rId6" minVer="http://schemas.openxmlformats.org/drawingml/2006/diagram"/>
+      <dsp:dataModelExt xmlns:dsp="http://schemas.microsoft.com/office/drawing/2008/diagram" relId="rId7" minVer="http://schemas.openxmlformats.org/drawingml/2006/diagram"/>
     </a:ext>
     <a:ext uri="{C62137D5-CB1D-491B-B009-E17868A290BF}">
       <dgm14:recolorImg xmlns:dgm14="http://schemas.microsoft.com/office/drawing/2010/diagram" val="1"/>
@@ -9560,7 +9558,7 @@
             <a:spLocks noGrp="1"/>
           </p:cNvSpPr>
           <p:nvPr>
-            <p:ph type="sldNum" sz="quarter" idx="10"/>
+            <p:ph type="sldNum" idx="12"/>
           </p:nvPr>
         </p:nvSpPr>
         <p:spPr/>
@@ -9568,18 +9566,43 @@
           <a:bodyPr/>
           <a:lstStyle/>
           <a:p>
-            <a:fld id="{87916DAE-669F-3546-9A68-DB1260F5EB98}" type="slidenum">
-              <a:rPr lang="en-US" smtClean="0"/>
-              <a:t>10</a:t>
+            <a:pPr marL="0" marR="0" lvl="0" indent="0" algn="r" rtl="0">
+              <a:spcBef>
+                <a:spcPts val="0"/>
+              </a:spcBef>
+              <a:spcAft>
+                <a:spcPts val="0"/>
+              </a:spcAft>
+              <a:buNone/>
+            </a:pPr>
+            <a:fld id="{00000000-1234-1234-1234-123412341234}" type="slidenum">
+              <a:rPr lang="en-US" sz="1200" b="0" i="0" u="none" strike="noStrike" cap="none" smtClean="0">
+                <a:solidFill>
+                  <a:schemeClr val="dk1"/>
+                </a:solidFill>
+                <a:latin typeface="Calibri"/>
+                <a:ea typeface="Calibri"/>
+                <a:cs typeface="Calibri"/>
+                <a:sym typeface="Calibri"/>
+              </a:rPr>
+              <a:t>2</a:t>
             </a:fld>
-            <a:endParaRPr lang="en-US"/>
+            <a:endParaRPr lang="en-US" sz="1200" b="0" i="0" u="none" strike="noStrike" cap="none">
+              <a:solidFill>
+                <a:schemeClr val="dk1"/>
+              </a:solidFill>
+              <a:latin typeface="Calibri"/>
+              <a:ea typeface="Calibri"/>
+              <a:cs typeface="Calibri"/>
+              <a:sym typeface="Calibri"/>
+            </a:endParaRPr>
           </a:p>
         </p:txBody>
       </p:sp>
     </p:spTree>
     <p:extLst>
       <p:ext uri="{BB962C8B-B14F-4D97-AF65-F5344CB8AC3E}">
-        <p14:creationId xmlns:p14="http://schemas.microsoft.com/office/powerpoint/2010/main" val="4228602113"/>
+        <p14:creationId xmlns:p14="http://schemas.microsoft.com/office/powerpoint/2010/main" val="1998834923"/>
       </p:ext>
     </p:extLst>
   </p:cSld>
@@ -9654,7 +9677,7 @@
           <a:p>
             <a:fld id="{87916DAE-669F-3546-9A68-DB1260F5EB98}" type="slidenum">
               <a:rPr lang="en-US" smtClean="0"/>
-              <a:t>11</a:t>
+              <a:t>8</a:t>
             </a:fld>
             <a:endParaRPr lang="en-US"/>
           </a:p>
@@ -9663,7 +9686,7 @@
     </p:spTree>
     <p:extLst>
       <p:ext uri="{BB962C8B-B14F-4D97-AF65-F5344CB8AC3E}">
-        <p14:creationId xmlns:p14="http://schemas.microsoft.com/office/powerpoint/2010/main" val="2596384143"/>
+        <p14:creationId xmlns:p14="http://schemas.microsoft.com/office/powerpoint/2010/main" val="4228602113"/>
       </p:ext>
     </p:extLst>
   </p:cSld>
@@ -9717,6 +9740,90 @@
           <a:bodyPr/>
           <a:lstStyle/>
           <a:p>
+            <a:endParaRPr lang="en-US" dirty="0"/>
+          </a:p>
+        </p:txBody>
+      </p:sp>
+      <p:sp>
+        <p:nvSpPr>
+          <p:cNvPr id="4" name="Slide Number Placeholder 3"/>
+          <p:cNvSpPr>
+            <a:spLocks noGrp="1"/>
+          </p:cNvSpPr>
+          <p:nvPr>
+            <p:ph type="sldNum" sz="quarter" idx="10"/>
+          </p:nvPr>
+        </p:nvSpPr>
+        <p:spPr/>
+        <p:txBody>
+          <a:bodyPr/>
+          <a:lstStyle/>
+          <a:p>
+            <a:fld id="{87916DAE-669F-3546-9A68-DB1260F5EB98}" type="slidenum">
+              <a:rPr lang="en-US" smtClean="0"/>
+              <a:t>9</a:t>
+            </a:fld>
+            <a:endParaRPr lang="en-US"/>
+          </a:p>
+        </p:txBody>
+      </p:sp>
+    </p:spTree>
+    <p:extLst>
+      <p:ext uri="{BB962C8B-B14F-4D97-AF65-F5344CB8AC3E}">
+        <p14:creationId xmlns:p14="http://schemas.microsoft.com/office/powerpoint/2010/main" val="2596384143"/>
+      </p:ext>
+    </p:extLst>
+  </p:cSld>
+  <p:clrMapOvr>
+    <a:masterClrMapping/>
+  </p:clrMapOvr>
+</p:notes>
+</file>
+
+<file path=ppt/notesSlides/notesSlide5.xml><?xml version="1.0" encoding="utf-8"?>
+<p:notes xmlns:a="http://schemas.openxmlformats.org/drawingml/2006/main" xmlns:r="http://schemas.openxmlformats.org/officeDocument/2006/relationships" xmlns:p="http://schemas.openxmlformats.org/presentationml/2006/main">
+  <p:cSld>
+    <p:spTree>
+      <p:nvGrpSpPr>
+        <p:cNvPr id="1" name=""/>
+        <p:cNvGrpSpPr/>
+        <p:nvPr/>
+      </p:nvGrpSpPr>
+      <p:grpSpPr>
+        <a:xfrm>
+          <a:off x="0" y="0"/>
+          <a:ext cx="0" cy="0"/>
+          <a:chOff x="0" y="0"/>
+          <a:chExt cx="0" cy="0"/>
+        </a:xfrm>
+      </p:grpSpPr>
+      <p:sp>
+        <p:nvSpPr>
+          <p:cNvPr id="2" name="Slide Image Placeholder 1"/>
+          <p:cNvSpPr>
+            <a:spLocks noGrp="1" noRot="1" noChangeAspect="1"/>
+          </p:cNvSpPr>
+          <p:nvPr>
+            <p:ph type="sldImg"/>
+          </p:nvPr>
+        </p:nvSpPr>
+        <p:spPr/>
+      </p:sp>
+      <p:sp>
+        <p:nvSpPr>
+          <p:cNvPr id="3" name="Notes Placeholder 2"/>
+          <p:cNvSpPr>
+            <a:spLocks noGrp="1"/>
+          </p:cNvSpPr>
+          <p:nvPr>
+            <p:ph type="body" idx="1"/>
+          </p:nvPr>
+        </p:nvSpPr>
+        <p:spPr/>
+        <p:txBody>
+          <a:bodyPr/>
+          <a:lstStyle/>
+          <a:p>
             <a:r>
               <a:rPr lang="en-US" dirty="0"/>
               <a:t>Only reviewed briefly in class – should pick back up here + </a:t>
@@ -9770,7 +9877,7 @@
                 <a:cs typeface="Calibri"/>
                 <a:sym typeface="Calibri"/>
               </a:rPr>
-              <a:t>17</a:t>
+              <a:t>15</a:t>
             </a:fld>
             <a:endParaRPr lang="en-US" sz="1200" b="0" i="0" u="none" strike="noStrike" cap="none">
               <a:solidFill>
@@ -10187,110 +10294,6 @@
 </file>
 
 <file path=ppt/slideLayouts/slideLayout10.xml><?xml version="1.0" encoding="utf-8"?>
-<p:sldLayout xmlns:a="http://schemas.openxmlformats.org/drawingml/2006/main" xmlns:r="http://schemas.openxmlformats.org/officeDocument/2006/relationships" xmlns:p="http://schemas.openxmlformats.org/presentationml/2006/main" matchingName="Blank" type="blank">
-  <p:cSld name="BLANK">
-    <p:spTree>
-      <p:nvGrpSpPr>
-        <p:cNvPr id="1" name="Shape 55"/>
-        <p:cNvGrpSpPr/>
-        <p:nvPr/>
-      </p:nvGrpSpPr>
-      <p:grpSpPr>
-        <a:xfrm>
-          <a:off x="0" y="0"/>
-          <a:ext cx="0" cy="0"/>
-          <a:chOff x="0" y="0"/>
-          <a:chExt cx="0" cy="0"/>
-        </a:xfrm>
-      </p:grpSpPr>
-      <p:sp>
-        <p:nvSpPr>
-          <p:cNvPr id="56" name="Google Shape;56;g6dad9273e7_0_46"/>
-          <p:cNvSpPr txBox="1">
-            <a:spLocks noGrp="1"/>
-          </p:cNvSpPr>
-          <p:nvPr>
-            <p:ph type="sldNum" idx="12"/>
-          </p:nvPr>
-        </p:nvSpPr>
-        <p:spPr>
-          <a:xfrm>
-            <a:off x="11296610" y="6217622"/>
-            <a:ext cx="731700" cy="524700"/>
-          </a:xfrm>
-          <a:prstGeom prst="rect">
-            <a:avLst/>
-          </a:prstGeom>
-        </p:spPr>
-        <p:txBody>
-          <a:bodyPr spcFirstLastPara="1" wrap="square" lIns="121900" tIns="121900" rIns="121900" bIns="121900" anchor="ctr" anchorCtr="0">
-            <a:noAutofit/>
-          </a:bodyPr>
-          <a:lstStyle>
-            <a:lvl1pPr lvl="0">
-              <a:buNone/>
-              <a:defRPr/>
-            </a:lvl1pPr>
-            <a:lvl2pPr lvl="1">
-              <a:buNone/>
-              <a:defRPr/>
-            </a:lvl2pPr>
-            <a:lvl3pPr lvl="2">
-              <a:buNone/>
-              <a:defRPr/>
-            </a:lvl3pPr>
-            <a:lvl4pPr lvl="3">
-              <a:buNone/>
-              <a:defRPr/>
-            </a:lvl4pPr>
-            <a:lvl5pPr lvl="4">
-              <a:buNone/>
-              <a:defRPr/>
-            </a:lvl5pPr>
-            <a:lvl6pPr lvl="5">
-              <a:buNone/>
-              <a:defRPr/>
-            </a:lvl6pPr>
-            <a:lvl7pPr lvl="6">
-              <a:buNone/>
-              <a:defRPr/>
-            </a:lvl7pPr>
-            <a:lvl8pPr lvl="7">
-              <a:buNone/>
-              <a:defRPr/>
-            </a:lvl8pPr>
-            <a:lvl9pPr lvl="8">
-              <a:buNone/>
-              <a:defRPr/>
-            </a:lvl9pPr>
-          </a:lstStyle>
-          <a:p>
-            <a:pPr marL="0" lvl="0" indent="0" algn="r" rtl="0">
-              <a:spcBef>
-                <a:spcPts val="0"/>
-              </a:spcBef>
-              <a:spcAft>
-                <a:spcPts val="0"/>
-              </a:spcAft>
-              <a:buNone/>
-            </a:pPr>
-            <a:fld id="{00000000-1234-1234-1234-123412341234}" type="slidenum">
-              <a:rPr lang="en-US"/>
-              <a:t>‹#›</a:t>
-            </a:fld>
-            <a:endParaRPr/>
-          </a:p>
-        </p:txBody>
-      </p:sp>
-    </p:spTree>
-  </p:cSld>
-  <p:clrMapOvr>
-    <a:masterClrMapping/>
-  </p:clrMapOvr>
-</p:sldLayout>
-</file>
-
-<file path=ppt/slideLayouts/slideLayout11.xml><?xml version="1.0" encoding="utf-8"?>
 <p:sldLayout xmlns:a="http://schemas.openxmlformats.org/drawingml/2006/main" xmlns:r="http://schemas.openxmlformats.org/officeDocument/2006/relationships" xmlns:p="http://schemas.openxmlformats.org/presentationml/2006/main" matchingName="Title and Content" type="obj">
   <p:cSld name="OBJECT">
     <p:spTree>
@@ -10746,7 +10749,7 @@
 </p:sldLayout>
 </file>
 
-<file path=ppt/slideLayouts/slideLayout12.xml><?xml version="1.0" encoding="utf-8"?>
+<file path=ppt/slideLayouts/slideLayout11.xml><?xml version="1.0" encoding="utf-8"?>
 <p:sldLayout xmlns:a="http://schemas.openxmlformats.org/drawingml/2006/main" xmlns:r="http://schemas.openxmlformats.org/officeDocument/2006/relationships" xmlns:p="http://schemas.openxmlformats.org/presentationml/2006/main" matchingName="1_Title and Content">
   <p:cSld name="1_Title and Content">
     <p:spTree>
@@ -10972,6 +10975,115 @@
         </p:txBody>
       </p:sp>
     </p:spTree>
+  </p:cSld>
+  <p:clrMapOvr>
+    <a:masterClrMapping/>
+  </p:clrMapOvr>
+</p:sldLayout>
+</file>
+
+<file path=ppt/slideLayouts/slideLayout12.xml><?xml version="1.0" encoding="utf-8"?>
+<p:sldLayout xmlns:a="http://schemas.openxmlformats.org/drawingml/2006/main" xmlns:r="http://schemas.openxmlformats.org/officeDocument/2006/relationships" xmlns:p="http://schemas.openxmlformats.org/presentationml/2006/main" matchingName="Blank" type="blank">
+  <p:cSld name="Blank">
+    <p:spTree>
+      <p:nvGrpSpPr>
+        <p:cNvPr id="1" name="Shape 55"/>
+        <p:cNvGrpSpPr/>
+        <p:nvPr/>
+      </p:nvGrpSpPr>
+      <p:grpSpPr>
+        <a:xfrm>
+          <a:off x="0" y="0"/>
+          <a:ext cx="0" cy="0"/>
+          <a:chOff x="0" y="0"/>
+          <a:chExt cx="0" cy="0"/>
+        </a:xfrm>
+      </p:grpSpPr>
+      <p:sp>
+        <p:nvSpPr>
+          <p:cNvPr id="56" name="Google Shape;56;g6dad9273e7_0_46"/>
+          <p:cNvSpPr txBox="1">
+            <a:spLocks noGrp="1"/>
+          </p:cNvSpPr>
+          <p:nvPr>
+            <p:ph type="sldNum" idx="12"/>
+          </p:nvPr>
+        </p:nvSpPr>
+        <p:spPr>
+          <a:xfrm>
+            <a:off x="11296610" y="6217622"/>
+            <a:ext cx="731700" cy="524700"/>
+          </a:xfrm>
+          <a:prstGeom prst="rect">
+            <a:avLst/>
+          </a:prstGeom>
+        </p:spPr>
+        <p:txBody>
+          <a:bodyPr spcFirstLastPara="1" wrap="square" lIns="121900" tIns="121900" rIns="121900" bIns="121900" anchor="ctr" anchorCtr="0">
+            <a:noAutofit/>
+          </a:bodyPr>
+          <a:lstStyle>
+            <a:lvl1pPr lvl="0">
+              <a:buNone/>
+              <a:defRPr/>
+            </a:lvl1pPr>
+            <a:lvl2pPr lvl="1">
+              <a:buNone/>
+              <a:defRPr/>
+            </a:lvl2pPr>
+            <a:lvl3pPr lvl="2">
+              <a:buNone/>
+              <a:defRPr/>
+            </a:lvl3pPr>
+            <a:lvl4pPr lvl="3">
+              <a:buNone/>
+              <a:defRPr/>
+            </a:lvl4pPr>
+            <a:lvl5pPr lvl="4">
+              <a:buNone/>
+              <a:defRPr/>
+            </a:lvl5pPr>
+            <a:lvl6pPr lvl="5">
+              <a:buNone/>
+              <a:defRPr/>
+            </a:lvl6pPr>
+            <a:lvl7pPr lvl="6">
+              <a:buNone/>
+              <a:defRPr/>
+            </a:lvl7pPr>
+            <a:lvl8pPr lvl="7">
+              <a:buNone/>
+              <a:defRPr/>
+            </a:lvl8pPr>
+            <a:lvl9pPr lvl="8">
+              <a:buNone/>
+              <a:defRPr/>
+            </a:lvl9pPr>
+          </a:lstStyle>
+          <a:p>
+            <a:pPr marL="0" lvl="0" indent="0" algn="r" rtl="0">
+              <a:spcBef>
+                <a:spcPts val="0"/>
+              </a:spcBef>
+              <a:spcAft>
+                <a:spcPts val="0"/>
+              </a:spcAft>
+              <a:buNone/>
+            </a:pPr>
+            <a:fld id="{00000000-1234-1234-1234-123412341234}" type="slidenum">
+              <a:rPr lang="en-US"/>
+              <a:t>‹#›</a:t>
+            </a:fld>
+            <a:endParaRPr/>
+          </a:p>
+        </p:txBody>
+      </p:sp>
+    </p:spTree>
+    <p:extLst>
+      <p:ext uri="{BB962C8B-B14F-4D97-AF65-F5344CB8AC3E}">
+        <p14:creationId xmlns:p14="http://schemas.microsoft.com/office/powerpoint/2010/main" val="2974203306"/>
+      </p:ext>
+    </p:extLst>
   </p:cSld>
   <p:clrMapOvr>
     <a:masterClrMapping/>
@@ -14456,9 +14568,9 @@
     <p:sldLayoutId id="2147483656" r:id="rId7"/>
     <p:sldLayoutId id="2147483657" r:id="rId8"/>
     <p:sldLayoutId id="2147483658" r:id="rId9"/>
-    <p:sldLayoutId id="2147483659" r:id="rId10"/>
-    <p:sldLayoutId id="2147483660" r:id="rId11"/>
-    <p:sldLayoutId id="2147483661" r:id="rId12"/>
+    <p:sldLayoutId id="2147483660" r:id="rId10"/>
+    <p:sldLayoutId id="2147483661" r:id="rId11"/>
+    <p:sldLayoutId id="2147483662" r:id="rId12"/>
   </p:sldLayoutIdLst>
   <p:hf sldNum="0" hdr="0" ftr="0" dt="0"/>
   <p:txStyles>
@@ -15394,229 +15506,6 @@
             <p:ph type="title"/>
           </p:nvPr>
         </p:nvSpPr>
-        <p:spPr/>
-        <p:txBody>
-          <a:bodyPr/>
-          <a:lstStyle/>
-          <a:p>
-            <a:r>
-              <a:rPr lang="en-US" dirty="0"/>
-              <a:t>Why do we care?</a:t>
-            </a:r>
-          </a:p>
-        </p:txBody>
-      </p:sp>
-      <p:sp>
-        <p:nvSpPr>
-          <p:cNvPr id="2" name="Content Placeholder 1"/>
-          <p:cNvSpPr>
-            <a:spLocks noGrp="1"/>
-          </p:cNvSpPr>
-          <p:nvPr>
-            <p:ph type="body" idx="1"/>
-          </p:nvPr>
-        </p:nvSpPr>
-        <p:spPr/>
-        <p:txBody>
-          <a:bodyPr>
-            <a:normAutofit/>
-          </a:bodyPr>
-          <a:lstStyle/>
-          <a:p>
-            <a:r>
-              <a:rPr lang="en-US" dirty="0"/>
-              <a:t>Features are hints/rules of thumb you give your model</a:t>
-            </a:r>
-          </a:p>
-          <a:p>
-            <a:pPr lvl="1"/>
-            <a:r>
-              <a:rPr lang="en-US" sz="2000" dirty="0"/>
-              <a:t>Encoding domain knowledge and context for the model to use</a:t>
-            </a:r>
-          </a:p>
-          <a:p>
-            <a:endParaRPr lang="en-US" dirty="0"/>
-          </a:p>
-          <a:p>
-            <a:r>
-              <a:rPr lang="en-US" dirty="0"/>
-              <a:t>Feature generation is a critical part of the machine learning modeling process, especially with structured data.</a:t>
-            </a:r>
-          </a:p>
-          <a:p>
-            <a:endParaRPr lang="en-US" dirty="0"/>
-          </a:p>
-          <a:p>
-            <a:r>
-              <a:rPr lang="en-US" dirty="0"/>
-              <a:t>Complexity in features may allow us to use less complex models that are faster to run, easier to understand and easier to maintain.</a:t>
-            </a:r>
-          </a:p>
-          <a:p>
-            <a:endParaRPr lang="en-US" dirty="0"/>
-          </a:p>
-          <a:p>
-            <a:endParaRPr lang="en-US" dirty="0"/>
-          </a:p>
-        </p:txBody>
-      </p:sp>
-    </p:spTree>
-    <p:extLst>
-      <p:ext uri="{BB962C8B-B14F-4D97-AF65-F5344CB8AC3E}">
-        <p14:creationId xmlns:p14="http://schemas.microsoft.com/office/powerpoint/2010/main" val="837826461"/>
-      </p:ext>
-    </p:extLst>
-  </p:cSld>
-  <p:clrMapOvr>
-    <a:masterClrMapping/>
-  </p:clrMapOvr>
-</p:sld>
-</file>
-
-<file path=ppt/slides/slide11.xml><?xml version="1.0" encoding="utf-8"?>
-<p:sld xmlns:a="http://schemas.openxmlformats.org/drawingml/2006/main" xmlns:r="http://schemas.openxmlformats.org/officeDocument/2006/relationships" xmlns:p="http://schemas.openxmlformats.org/presentationml/2006/main">
-  <p:cSld>
-    <p:spTree>
-      <p:nvGrpSpPr>
-        <p:cNvPr id="1" name=""/>
-        <p:cNvGrpSpPr/>
-        <p:nvPr/>
-      </p:nvGrpSpPr>
-      <p:grpSpPr>
-        <a:xfrm>
-          <a:off x="0" y="0"/>
-          <a:ext cx="0" cy="0"/>
-          <a:chOff x="0" y="0"/>
-          <a:chExt cx="0" cy="0"/>
-        </a:xfrm>
-      </p:grpSpPr>
-      <p:sp>
-        <p:nvSpPr>
-          <p:cNvPr id="3" name="Title 2"/>
-          <p:cNvSpPr>
-            <a:spLocks noGrp="1"/>
-          </p:cNvSpPr>
-          <p:nvPr>
-            <p:ph type="title"/>
-          </p:nvPr>
-        </p:nvSpPr>
-        <p:spPr/>
-        <p:txBody>
-          <a:bodyPr/>
-          <a:lstStyle/>
-          <a:p>
-            <a:r>
-              <a:rPr lang="en-US" dirty="0"/>
-              <a:t>Practical Pointers</a:t>
-            </a:r>
-          </a:p>
-        </p:txBody>
-      </p:sp>
-      <p:sp>
-        <p:nvSpPr>
-          <p:cNvPr id="2" name="Content Placeholder 1"/>
-          <p:cNvSpPr>
-            <a:spLocks noGrp="1"/>
-          </p:cNvSpPr>
-          <p:nvPr>
-            <p:ph type="body" idx="1"/>
-          </p:nvPr>
-        </p:nvSpPr>
-        <p:spPr/>
-        <p:txBody>
-          <a:bodyPr>
-            <a:normAutofit/>
-          </a:bodyPr>
-          <a:lstStyle/>
-          <a:p>
-            <a:r>
-              <a:rPr lang="en-US" dirty="0"/>
-              <a:t>When generating a feature, what did you know and </a:t>
-            </a:r>
-            <a:r>
-              <a:rPr lang="en-US" b="1" u="sng" dirty="0"/>
-              <a:t>when</a:t>
-            </a:r>
-            <a:r>
-              <a:rPr lang="en-US" dirty="0"/>
-              <a:t> did you know it?</a:t>
-            </a:r>
-          </a:p>
-          <a:p>
-            <a:pPr lvl="1"/>
-            <a:r>
-              <a:rPr lang="en-US" dirty="0"/>
-              <a:t>You can only create features from information available </a:t>
-            </a:r>
-            <a:r>
-              <a:rPr lang="en-US" sz="3200" b="1" dirty="0">
-                <a:solidFill>
-                  <a:srgbClr val="FF0000"/>
-                </a:solidFill>
-              </a:rPr>
-              <a:t>before</a:t>
-            </a:r>
-            <a:r>
-              <a:rPr lang="en-US" dirty="0"/>
-              <a:t> the “training” date for a given row</a:t>
-            </a:r>
-            <a:br>
-              <a:rPr lang="en-US" dirty="0"/>
-            </a:br>
-            <a:endParaRPr lang="en-US" dirty="0"/>
-          </a:p>
-          <a:p>
-            <a:r>
-              <a:rPr lang="en-US" dirty="0"/>
-              <a:t>Domain/expert knowledge and prior research in the field can help a lot!</a:t>
-            </a:r>
-          </a:p>
-          <a:p>
-            <a:endParaRPr lang="en-US" dirty="0"/>
-          </a:p>
-        </p:txBody>
-      </p:sp>
-    </p:spTree>
-    <p:extLst>
-      <p:ext uri="{BB962C8B-B14F-4D97-AF65-F5344CB8AC3E}">
-        <p14:creationId xmlns:p14="http://schemas.microsoft.com/office/powerpoint/2010/main" val="4045032903"/>
-      </p:ext>
-    </p:extLst>
-  </p:cSld>
-  <p:clrMapOvr>
-    <a:masterClrMapping/>
-  </p:clrMapOvr>
-</p:sld>
-</file>
-
-<file path=ppt/slides/slide12.xml><?xml version="1.0" encoding="utf-8"?>
-<p:sld xmlns:a="http://schemas.openxmlformats.org/drawingml/2006/main" xmlns:r="http://schemas.openxmlformats.org/officeDocument/2006/relationships" xmlns:p="http://schemas.openxmlformats.org/presentationml/2006/main">
-  <p:cSld>
-    <p:spTree>
-      <p:nvGrpSpPr>
-        <p:cNvPr id="1" name=""/>
-        <p:cNvGrpSpPr/>
-        <p:nvPr/>
-      </p:nvGrpSpPr>
-      <p:grpSpPr>
-        <a:xfrm>
-          <a:off x="0" y="0"/>
-          <a:ext cx="0" cy="0"/>
-          <a:chOff x="0" y="0"/>
-          <a:chExt cx="0" cy="0"/>
-        </a:xfrm>
-      </p:grpSpPr>
-      <p:sp>
-        <p:nvSpPr>
-          <p:cNvPr id="3" name="Title 2"/>
-          <p:cNvSpPr>
-            <a:spLocks noGrp="1"/>
-          </p:cNvSpPr>
-          <p:nvPr>
-            <p:ph type="title"/>
-          </p:nvPr>
-        </p:nvSpPr>
         <p:spPr>
           <a:xfrm>
             <a:off x="415600" y="86585"/>
@@ -15719,7 +15608,7 @@
 </p:sld>
 </file>
 
-<file path=ppt/slides/slide13.xml><?xml version="1.0" encoding="utf-8"?>
+<file path=ppt/slides/slide11.xml><?xml version="1.0" encoding="utf-8"?>
 <p:sld xmlns:a="http://schemas.openxmlformats.org/drawingml/2006/main" xmlns:r="http://schemas.openxmlformats.org/officeDocument/2006/relationships" xmlns:p="http://schemas.openxmlformats.org/presentationml/2006/main">
   <p:cSld>
     <p:spTree>
@@ -15822,7 +15711,7 @@
 </p:sld>
 </file>
 
-<file path=ppt/slides/slide14.xml><?xml version="1.0" encoding="utf-8"?>
+<file path=ppt/slides/slide12.xml><?xml version="1.0" encoding="utf-8"?>
 <p:sld xmlns:a="http://schemas.openxmlformats.org/drawingml/2006/main" xmlns:r="http://schemas.openxmlformats.org/officeDocument/2006/relationships" xmlns:p="http://schemas.openxmlformats.org/presentationml/2006/main">
   <p:cSld>
     <p:spTree>
@@ -16004,7 +15893,7 @@
 </p:sld>
 </file>
 
-<file path=ppt/slides/slide15.xml><?xml version="1.0" encoding="utf-8"?>
+<file path=ppt/slides/slide13.xml><?xml version="1.0" encoding="utf-8"?>
 <p:sld xmlns:a="http://schemas.openxmlformats.org/drawingml/2006/main" xmlns:r="http://schemas.openxmlformats.org/officeDocument/2006/relationships" xmlns:p="http://schemas.openxmlformats.org/presentationml/2006/main">
   <p:cSld>
     <p:spTree>
@@ -16114,7 +16003,7 @@
 </p:sld>
 </file>
 
-<file path=ppt/slides/slide16.xml><?xml version="1.0" encoding="utf-8"?>
+<file path=ppt/slides/slide14.xml><?xml version="1.0" encoding="utf-8"?>
 <p:sld xmlns:a="http://schemas.openxmlformats.org/drawingml/2006/main" xmlns:r="http://schemas.openxmlformats.org/officeDocument/2006/relationships" xmlns:p="http://schemas.openxmlformats.org/presentationml/2006/main">
   <p:cSld>
     <p:spTree>
@@ -16238,7 +16127,7 @@
 </p:sld>
 </file>
 
-<file path=ppt/slides/slide17.xml><?xml version="1.0" encoding="utf-8"?>
+<file path=ppt/slides/slide15.xml><?xml version="1.0" encoding="utf-8"?>
 <p:sld xmlns:a="http://schemas.openxmlformats.org/drawingml/2006/main" xmlns:r="http://schemas.openxmlformats.org/officeDocument/2006/relationships" xmlns:p="http://schemas.openxmlformats.org/presentationml/2006/main">
   <p:cSld>
     <p:spTree>
@@ -16646,7 +16535,7 @@
 </p:sld>
 </file>
 
-<file path=ppt/slides/slide18.xml><?xml version="1.0" encoding="utf-8"?>
+<file path=ppt/slides/slide16.xml><?xml version="1.0" encoding="utf-8"?>
 <p:sld xmlns:a="http://schemas.openxmlformats.org/drawingml/2006/main" xmlns:r="http://schemas.openxmlformats.org/officeDocument/2006/relationships" xmlns:p="http://schemas.openxmlformats.org/presentationml/2006/main">
   <p:cSld>
     <p:spTree>
@@ -17093,7 +16982,7 @@
 </p:sld>
 </file>
 
-<file path=ppt/slides/slide19.xml><?xml version="1.0" encoding="utf-8"?>
+<file path=ppt/slides/slide17.xml><?xml version="1.0" encoding="utf-8"?>
 <p:sld xmlns:a="http://schemas.openxmlformats.org/drawingml/2006/main" xmlns:r="http://schemas.openxmlformats.org/officeDocument/2006/relationships" xmlns:p="http://schemas.openxmlformats.org/presentationml/2006/main">
   <p:cSld>
     <p:spTree>
@@ -17209,210 +17098,7 @@
 </p:sld>
 </file>
 
-<file path=ppt/slides/slide2.xml><?xml version="1.0" encoding="utf-8"?>
-<p:sld xmlns:a="http://schemas.openxmlformats.org/drawingml/2006/main" xmlns:r="http://schemas.openxmlformats.org/officeDocument/2006/relationships" xmlns:p="http://schemas.openxmlformats.org/presentationml/2006/main">
-  <p:cSld>
-    <p:spTree>
-      <p:nvGrpSpPr>
-        <p:cNvPr id="1" name=""/>
-        <p:cNvGrpSpPr/>
-        <p:nvPr/>
-      </p:nvGrpSpPr>
-      <p:grpSpPr>
-        <a:xfrm>
-          <a:off x="0" y="0"/>
-          <a:ext cx="0" cy="0"/>
-          <a:chOff x="0" y="0"/>
-          <a:chExt cx="0" cy="0"/>
-        </a:xfrm>
-      </p:grpSpPr>
-      <p:sp>
-        <p:nvSpPr>
-          <p:cNvPr id="3" name="Title 2">
-            <a:extLst>
-              <a:ext uri="{FF2B5EF4-FFF2-40B4-BE49-F238E27FC236}">
-                <a16:creationId xmlns:a16="http://schemas.microsoft.com/office/drawing/2014/main" id="{9323871C-7CA8-1448-8FFC-1AE6E1838941}"/>
-              </a:ext>
-            </a:extLst>
-          </p:cNvPr>
-          <p:cNvSpPr>
-            <a:spLocks noGrp="1"/>
-          </p:cNvSpPr>
-          <p:nvPr>
-            <p:ph type="title"/>
-          </p:nvPr>
-        </p:nvSpPr>
-        <p:spPr/>
-        <p:txBody>
-          <a:bodyPr/>
-          <a:lstStyle/>
-          <a:p>
-            <a:r>
-              <a:rPr lang="en-US" dirty="0"/>
-              <a:t>Reminders</a:t>
-            </a:r>
-          </a:p>
-        </p:txBody>
-      </p:sp>
-      <p:sp>
-        <p:nvSpPr>
-          <p:cNvPr id="5" name="Text Placeholder 4">
-            <a:extLst>
-              <a:ext uri="{FF2B5EF4-FFF2-40B4-BE49-F238E27FC236}">
-                <a16:creationId xmlns:a16="http://schemas.microsoft.com/office/drawing/2014/main" id="{F4E0A5F0-1D89-954D-91FB-596CD9E690F2}"/>
-              </a:ext>
-            </a:extLst>
-          </p:cNvPr>
-          <p:cNvSpPr>
-            <a:spLocks noGrp="1"/>
-          </p:cNvSpPr>
-          <p:nvPr>
-            <p:ph type="body" idx="1"/>
-          </p:nvPr>
-        </p:nvSpPr>
-        <p:spPr/>
-        <p:txBody>
-          <a:bodyPr/>
-          <a:lstStyle/>
-          <a:p>
-            <a:pPr marL="76200" indent="0">
-              <a:buNone/>
-            </a:pPr>
-            <a:r>
-              <a:rPr lang="en-US" b="1" dirty="0">
-                <a:solidFill>
-                  <a:schemeClr val="tx1">
-                    <a:lumMod val="75000"/>
-                    <a:lumOff val="25000"/>
-                  </a:schemeClr>
-                </a:solidFill>
-              </a:rPr>
-              <a:t>This week:</a:t>
-            </a:r>
-          </a:p>
-          <a:p>
-            <a:r>
-              <a:rPr lang="en-US" dirty="0">
-                <a:solidFill>
-                  <a:schemeClr val="tx1">
-                    <a:lumMod val="75000"/>
-                    <a:lumOff val="25000"/>
-                  </a:schemeClr>
-                </a:solidFill>
-              </a:rPr>
-              <a:t>Tomorrow: Wednesday Group Check-Ins</a:t>
-            </a:r>
-          </a:p>
-          <a:p>
-            <a:r>
-              <a:rPr lang="en-US" dirty="0">
-                <a:solidFill>
-                  <a:schemeClr val="tx1">
-                    <a:lumMod val="75000"/>
-                    <a:lumOff val="25000"/>
-                  </a:schemeClr>
-                </a:solidFill>
-              </a:rPr>
-              <a:t>Thursday: Time for group work (no lecture)</a:t>
-            </a:r>
-          </a:p>
-          <a:p>
-            <a:pPr marL="76200" indent="0">
-              <a:buNone/>
-            </a:pPr>
-            <a:endParaRPr lang="en-US" b="1" dirty="0">
-              <a:solidFill>
-                <a:schemeClr val="tx1">
-                  <a:lumMod val="75000"/>
-                  <a:lumOff val="25000"/>
-                </a:schemeClr>
-              </a:solidFill>
-            </a:endParaRPr>
-          </a:p>
-          <a:p>
-            <a:pPr marL="76200" indent="0">
-              <a:buNone/>
-            </a:pPr>
-            <a:endParaRPr lang="en-US" b="1" dirty="0">
-              <a:solidFill>
-                <a:schemeClr val="tx1">
-                  <a:lumMod val="75000"/>
-                  <a:lumOff val="25000"/>
-                </a:schemeClr>
-              </a:solidFill>
-            </a:endParaRPr>
-          </a:p>
-          <a:p>
-            <a:pPr marL="76200" indent="0">
-              <a:buNone/>
-            </a:pPr>
-            <a:r>
-              <a:rPr lang="en-US" b="1" dirty="0">
-                <a:solidFill>
-                  <a:schemeClr val="tx1">
-                    <a:lumMod val="75000"/>
-                    <a:lumOff val="25000"/>
-                  </a:schemeClr>
-                </a:solidFill>
-              </a:rPr>
-              <a:t>Coming up after fall break:</a:t>
-            </a:r>
-          </a:p>
-          <a:p>
-            <a:r>
-              <a:rPr lang="en-US" dirty="0">
-                <a:solidFill>
-                  <a:schemeClr val="tx1">
-                    <a:lumMod val="75000"/>
-                    <a:lumOff val="25000"/>
-                  </a:schemeClr>
-                </a:solidFill>
-              </a:rPr>
-              <a:t>Monday: Project Update 3</a:t>
-            </a:r>
-          </a:p>
-          <a:p>
-            <a:r>
-              <a:rPr lang="en-US" dirty="0">
-                <a:solidFill>
-                  <a:schemeClr val="tx1">
-                    <a:lumMod val="75000"/>
-                    <a:lumOff val="25000"/>
-                  </a:schemeClr>
-                </a:solidFill>
-              </a:rPr>
-              <a:t>Tuesday: Weekly Feedback Form</a:t>
-            </a:r>
-          </a:p>
-          <a:p>
-            <a:r>
-              <a:rPr lang="en-US" dirty="0">
-                <a:solidFill>
-                  <a:schemeClr val="tx1">
-                    <a:lumMod val="75000"/>
-                    <a:lumOff val="25000"/>
-                  </a:schemeClr>
-                </a:solidFill>
-              </a:rPr>
-              <a:t>Tuesday: Readings on Practical ML</a:t>
-            </a:r>
-          </a:p>
-        </p:txBody>
-      </p:sp>
-    </p:spTree>
-    <p:extLst>
-      <p:ext uri="{BB962C8B-B14F-4D97-AF65-F5344CB8AC3E}">
-        <p14:creationId xmlns:p14="http://schemas.microsoft.com/office/powerpoint/2010/main" val="186046226"/>
-      </p:ext>
-    </p:extLst>
-  </p:cSld>
-  <p:clrMapOvr>
-    <a:masterClrMapping/>
-  </p:clrMapOvr>
-</p:sld>
-</file>
-
-<file path=ppt/slides/slide20.xml><?xml version="1.0" encoding="utf-8"?>
+<file path=ppt/slides/slide18.xml><?xml version="1.0" encoding="utf-8"?>
 <p:sld xmlns:a="http://schemas.openxmlformats.org/drawingml/2006/main" xmlns:r="http://schemas.openxmlformats.org/officeDocument/2006/relationships" xmlns:p="http://schemas.openxmlformats.org/presentationml/2006/main">
   <p:cSld>
     <p:spTree>
@@ -17897,7 +17583,7 @@
 </p:sld>
 </file>
 
-<file path=ppt/slides/slide21.xml><?xml version="1.0" encoding="utf-8"?>
+<file path=ppt/slides/slide19.xml><?xml version="1.0" encoding="utf-8"?>
 <p:sld xmlns:a="http://schemas.openxmlformats.org/drawingml/2006/main" xmlns:r="http://schemas.openxmlformats.org/officeDocument/2006/relationships" xmlns:p="http://schemas.openxmlformats.org/presentationml/2006/main">
   <p:cSld>
     <p:spTree>
@@ -18173,7 +17859,136 @@
 </p:sld>
 </file>
 
-<file path=ppt/slides/slide22.xml><?xml version="1.0" encoding="utf-8"?>
+<file path=ppt/slides/slide2.xml><?xml version="1.0" encoding="utf-8"?>
+<p:sld xmlns:a="http://schemas.openxmlformats.org/drawingml/2006/main" xmlns:r="http://schemas.openxmlformats.org/officeDocument/2006/relationships" xmlns:p="http://schemas.openxmlformats.org/presentationml/2006/main">
+  <p:cSld>
+    <p:spTree>
+      <p:nvGrpSpPr>
+        <p:cNvPr id="1" name=""/>
+        <p:cNvGrpSpPr/>
+        <p:nvPr/>
+      </p:nvGrpSpPr>
+      <p:grpSpPr>
+        <a:xfrm>
+          <a:off x="0" y="0"/>
+          <a:ext cx="0" cy="0"/>
+          <a:chOff x="0" y="0"/>
+          <a:chExt cx="0" cy="0"/>
+        </a:xfrm>
+      </p:grpSpPr>
+      <p:sp>
+        <p:nvSpPr>
+          <p:cNvPr id="2" name="Title 1">
+            <a:extLst>
+              <a:ext uri="{FF2B5EF4-FFF2-40B4-BE49-F238E27FC236}">
+                <a16:creationId xmlns:a16="http://schemas.microsoft.com/office/drawing/2014/main" id="{94CF2A94-A63F-6149-AA28-2E35B60E3D3E}"/>
+              </a:ext>
+            </a:extLst>
+          </p:cNvPr>
+          <p:cNvSpPr>
+            <a:spLocks noGrp="1"/>
+          </p:cNvSpPr>
+          <p:nvPr>
+            <p:ph type="title"/>
+          </p:nvPr>
+        </p:nvSpPr>
+        <p:spPr/>
+        <p:txBody>
+          <a:bodyPr/>
+          <a:lstStyle/>
+          <a:p>
+            <a:endParaRPr lang="en-US"/>
+          </a:p>
+        </p:txBody>
+      </p:sp>
+      <p:graphicFrame>
+        <p:nvGraphicFramePr>
+          <p:cNvPr id="3" name="Diagram 2">
+            <a:extLst>
+              <a:ext uri="{FF2B5EF4-FFF2-40B4-BE49-F238E27FC236}">
+                <a16:creationId xmlns:a16="http://schemas.microsoft.com/office/drawing/2014/main" id="{8E902576-68A9-6E48-B0FE-5B1889953DC8}"/>
+              </a:ext>
+            </a:extLst>
+          </p:cNvPr>
+          <p:cNvGraphicFramePr/>
+          <p:nvPr/>
+        </p:nvGraphicFramePr>
+        <p:xfrm>
+          <a:off x="180467" y="0"/>
+          <a:ext cx="11776400" cy="6858000"/>
+        </p:xfrm>
+        <a:graphic>
+          <a:graphicData uri="http://schemas.openxmlformats.org/drawingml/2006/diagram">
+            <dgm:relIds xmlns:dgm="http://schemas.openxmlformats.org/drawingml/2006/diagram" xmlns:r="http://schemas.openxmlformats.org/officeDocument/2006/relationships" r:dm="rId3" r:lo="rId4" r:qs="rId5" r:cs="rId6"/>
+          </a:graphicData>
+        </a:graphic>
+      </p:graphicFrame>
+      <p:sp>
+        <p:nvSpPr>
+          <p:cNvPr id="4" name="Rectangle 3">
+            <a:extLst>
+              <a:ext uri="{FF2B5EF4-FFF2-40B4-BE49-F238E27FC236}">
+                <a16:creationId xmlns:a16="http://schemas.microsoft.com/office/drawing/2014/main" id="{E2C99BF2-C81A-5246-89D3-E49BCDCAD699}"/>
+              </a:ext>
+            </a:extLst>
+          </p:cNvPr>
+          <p:cNvSpPr/>
+          <p:nvPr/>
+        </p:nvSpPr>
+        <p:spPr>
+          <a:xfrm>
+            <a:off x="9553197" y="115748"/>
+            <a:ext cx="2534195" cy="4208008"/>
+          </a:xfrm>
+          <a:prstGeom prst="rect">
+            <a:avLst/>
+          </a:prstGeom>
+          <a:noFill/>
+          <a:ln w="76200">
+            <a:solidFill>
+              <a:srgbClr val="C00000"/>
+            </a:solidFill>
+          </a:ln>
+        </p:spPr>
+        <p:style>
+          <a:lnRef idx="2">
+            <a:schemeClr val="accent1">
+              <a:shade val="50000"/>
+            </a:schemeClr>
+          </a:lnRef>
+          <a:fillRef idx="1">
+            <a:schemeClr val="accent1"/>
+          </a:fillRef>
+          <a:effectRef idx="0">
+            <a:schemeClr val="accent1"/>
+          </a:effectRef>
+          <a:fontRef idx="minor">
+            <a:schemeClr val="lt1"/>
+          </a:fontRef>
+        </p:style>
+        <p:txBody>
+          <a:bodyPr rtlCol="0" anchor="ctr"/>
+          <a:lstStyle/>
+          <a:p>
+            <a:pPr algn="ctr"/>
+            <a:endParaRPr lang="en-US"/>
+          </a:p>
+        </p:txBody>
+      </p:sp>
+    </p:spTree>
+    <p:extLst>
+      <p:ext uri="{BB962C8B-B14F-4D97-AF65-F5344CB8AC3E}">
+        <p14:creationId xmlns:p14="http://schemas.microsoft.com/office/powerpoint/2010/main" val="3141728949"/>
+      </p:ext>
+    </p:extLst>
+  </p:cSld>
+  <p:clrMapOvr>
+    <a:masterClrMapping/>
+  </p:clrMapOvr>
+</p:sld>
+</file>
+
+<file path=ppt/slides/slide20.xml><?xml version="1.0" encoding="utf-8"?>
 <p:sld xmlns:a="http://schemas.openxmlformats.org/drawingml/2006/main" xmlns:r="http://schemas.openxmlformats.org/officeDocument/2006/relationships" xmlns:p="http://schemas.openxmlformats.org/presentationml/2006/main">
   <p:cSld>
     <p:spTree>
@@ -18305,7 +18120,7 @@
 </p:sld>
 </file>
 
-<file path=ppt/slides/slide23.xml><?xml version="1.0" encoding="utf-8"?>
+<file path=ppt/slides/slide21.xml><?xml version="1.0" encoding="utf-8"?>
 <p:sld xmlns:a="http://schemas.openxmlformats.org/drawingml/2006/main" xmlns:r="http://schemas.openxmlformats.org/officeDocument/2006/relationships" xmlns:p="http://schemas.openxmlformats.org/presentationml/2006/main">
   <p:cSld>
     <p:spTree>
@@ -18402,7 +18217,7 @@
 </p:sld>
 </file>
 
-<file path=ppt/slides/slide24.xml><?xml version="1.0" encoding="utf-8"?>
+<file path=ppt/slides/slide22.xml><?xml version="1.0" encoding="utf-8"?>
 <p:sld xmlns:a="http://schemas.openxmlformats.org/drawingml/2006/main" xmlns:r="http://schemas.openxmlformats.org/officeDocument/2006/relationships" xmlns:p="http://schemas.openxmlformats.org/presentationml/2006/main">
   <p:cSld>
     <p:spTree>
@@ -18694,7 +18509,7 @@
 </p:sld>
 </file>
 
-<file path=ppt/slides/slide25.xml><?xml version="1.0" encoding="utf-8"?>
+<file path=ppt/slides/slide23.xml><?xml version="1.0" encoding="utf-8"?>
 <p:sld xmlns:a="http://schemas.openxmlformats.org/drawingml/2006/main" xmlns:r="http://schemas.openxmlformats.org/officeDocument/2006/relationships" xmlns:p="http://schemas.openxmlformats.org/presentationml/2006/main">
   <p:cSld>
     <p:spTree>
@@ -18830,7 +18645,7 @@
 </p:sld>
 </file>
 
-<file path=ppt/slides/slide26.xml><?xml version="1.0" encoding="utf-8"?>
+<file path=ppt/slides/slide24.xml><?xml version="1.0" encoding="utf-8"?>
 <p:sld xmlns:a="http://schemas.openxmlformats.org/drawingml/2006/main" xmlns:r="http://schemas.openxmlformats.org/officeDocument/2006/relationships" xmlns:p="http://schemas.openxmlformats.org/presentationml/2006/main">
   <p:cSld>
     <p:spTree>
@@ -19010,7 +18825,7 @@
 </p:sld>
 </file>
 
-<file path=ppt/slides/slide27.xml><?xml version="1.0" encoding="utf-8"?>
+<file path=ppt/slides/slide25.xml><?xml version="1.0" encoding="utf-8"?>
 <p:sld xmlns:a="http://schemas.openxmlformats.org/drawingml/2006/main" xmlns:r="http://schemas.openxmlformats.org/officeDocument/2006/relationships" xmlns:p="http://schemas.openxmlformats.org/presentationml/2006/main">
   <p:cSld>
     <p:spTree>
@@ -19154,6 +18969,207 @@
     <p:extLst>
       <p:ext uri="{BB962C8B-B14F-4D97-AF65-F5344CB8AC3E}">
         <p14:creationId xmlns:p14="http://schemas.microsoft.com/office/powerpoint/2010/main" val="3227679789"/>
+      </p:ext>
+    </p:extLst>
+  </p:cSld>
+  <p:clrMapOvr>
+    <a:masterClrMapping/>
+  </p:clrMapOvr>
+</p:sld>
+</file>
+
+<file path=ppt/slides/slide26.xml><?xml version="1.0" encoding="utf-8"?>
+<p:sld xmlns:a="http://schemas.openxmlformats.org/drawingml/2006/main" xmlns:r="http://schemas.openxmlformats.org/officeDocument/2006/relationships" xmlns:p="http://schemas.openxmlformats.org/presentationml/2006/main">
+  <p:cSld>
+    <p:spTree>
+      <p:nvGrpSpPr>
+        <p:cNvPr id="1" name=""/>
+        <p:cNvGrpSpPr/>
+        <p:nvPr/>
+      </p:nvGrpSpPr>
+      <p:grpSpPr>
+        <a:xfrm>
+          <a:off x="0" y="0"/>
+          <a:ext cx="0" cy="0"/>
+          <a:chOff x="0" y="0"/>
+          <a:chExt cx="0" cy="0"/>
+        </a:xfrm>
+      </p:grpSpPr>
+      <p:sp>
+        <p:nvSpPr>
+          <p:cNvPr id="3" name="Title 2"/>
+          <p:cNvSpPr>
+            <a:spLocks noGrp="1"/>
+          </p:cNvSpPr>
+          <p:nvPr>
+            <p:ph type="title"/>
+          </p:nvPr>
+        </p:nvSpPr>
+        <p:spPr/>
+        <p:txBody>
+          <a:bodyPr/>
+          <a:lstStyle/>
+          <a:p>
+            <a:r>
+              <a:rPr lang="en-US" dirty="0"/>
+              <a:t>Feature Interactions</a:t>
+            </a:r>
+          </a:p>
+        </p:txBody>
+      </p:sp>
+      <p:sp>
+        <p:nvSpPr>
+          <p:cNvPr id="2" name="Content Placeholder 1"/>
+          <p:cNvSpPr>
+            <a:spLocks noGrp="1"/>
+          </p:cNvSpPr>
+          <p:nvPr>
+            <p:ph type="body" idx="1"/>
+          </p:nvPr>
+        </p:nvSpPr>
+        <p:spPr/>
+        <p:txBody>
+          <a:bodyPr/>
+          <a:lstStyle/>
+          <a:p>
+            <a:r>
+              <a:rPr lang="en-US" dirty="0"/>
+              <a:t>Generate features for combination of features</a:t>
+            </a:r>
+          </a:p>
+          <a:p>
+            <a:pPr lvl="1"/>
+            <a:r>
+              <a:rPr lang="en-US" dirty="0"/>
+              <a:t>Age x gender</a:t>
+            </a:r>
+          </a:p>
+          <a:p>
+            <a:pPr lvl="1"/>
+            <a:endParaRPr lang="en-US" dirty="0"/>
+          </a:p>
+          <a:p>
+            <a:r>
+              <a:rPr lang="en-US" dirty="0"/>
+              <a:t>Allows you to use linear models but still model non linear relationships</a:t>
+            </a:r>
+          </a:p>
+          <a:p>
+            <a:endParaRPr lang="en-US" dirty="0"/>
+          </a:p>
+          <a:p>
+            <a:r>
+              <a:rPr lang="en-US" dirty="0"/>
+              <a:t>Random Forests are one way of discovering useful interactions</a:t>
+            </a:r>
+          </a:p>
+        </p:txBody>
+      </p:sp>
+    </p:spTree>
+    <p:extLst>
+      <p:ext uri="{BB962C8B-B14F-4D97-AF65-F5344CB8AC3E}">
+        <p14:creationId xmlns:p14="http://schemas.microsoft.com/office/powerpoint/2010/main" val="2835794600"/>
+      </p:ext>
+    </p:extLst>
+  </p:cSld>
+  <p:clrMapOvr>
+    <a:masterClrMapping/>
+  </p:clrMapOvr>
+</p:sld>
+</file>
+
+<file path=ppt/slides/slide27.xml><?xml version="1.0" encoding="utf-8"?>
+<p:sld xmlns:a="http://schemas.openxmlformats.org/drawingml/2006/main" xmlns:r="http://schemas.openxmlformats.org/officeDocument/2006/relationships" xmlns:p="http://schemas.openxmlformats.org/presentationml/2006/main">
+  <p:cSld>
+    <p:spTree>
+      <p:nvGrpSpPr>
+        <p:cNvPr id="1" name=""/>
+        <p:cNvGrpSpPr/>
+        <p:nvPr/>
+      </p:nvGrpSpPr>
+      <p:grpSpPr>
+        <a:xfrm>
+          <a:off x="0" y="0"/>
+          <a:ext cx="0" cy="0"/>
+          <a:chOff x="0" y="0"/>
+          <a:chExt cx="0" cy="0"/>
+        </a:xfrm>
+      </p:grpSpPr>
+      <p:sp>
+        <p:nvSpPr>
+          <p:cNvPr id="3" name="Title 2"/>
+          <p:cNvSpPr>
+            <a:spLocks noGrp="1"/>
+          </p:cNvSpPr>
+          <p:nvPr>
+            <p:ph type="title"/>
+          </p:nvPr>
+        </p:nvSpPr>
+        <p:spPr>
+          <a:xfrm>
+            <a:off x="180821" y="293023"/>
+            <a:ext cx="11360700" cy="763500"/>
+          </a:xfrm>
+        </p:spPr>
+        <p:txBody>
+          <a:bodyPr/>
+          <a:lstStyle/>
+          <a:p>
+            <a:r>
+              <a:rPr lang="en-US" dirty="0"/>
+              <a:t>Features are also model-dependent</a:t>
+            </a:r>
+          </a:p>
+        </p:txBody>
+      </p:sp>
+      <p:sp>
+        <p:nvSpPr>
+          <p:cNvPr id="2" name="Content Placeholder 1"/>
+          <p:cNvSpPr>
+            <a:spLocks noGrp="1"/>
+          </p:cNvSpPr>
+          <p:nvPr>
+            <p:ph type="body" idx="1"/>
+          </p:nvPr>
+        </p:nvSpPr>
+        <p:spPr/>
+        <p:txBody>
+          <a:bodyPr/>
+          <a:lstStyle/>
+          <a:p>
+            <a:endParaRPr lang="en-US" dirty="0"/>
+          </a:p>
+          <a:p>
+            <a:pPr marL="76200" indent="0">
+              <a:buNone/>
+            </a:pPr>
+            <a:endParaRPr lang="en-US" dirty="0"/>
+          </a:p>
+          <a:p>
+            <a:r>
+              <a:rPr lang="en-US" dirty="0"/>
+              <a:t>Linear models may need … ?</a:t>
+            </a:r>
+            <a:br>
+              <a:rPr lang="en-US" dirty="0"/>
+            </a:br>
+            <a:endParaRPr lang="en-US" dirty="0"/>
+          </a:p>
+          <a:p>
+            <a:r>
+              <a:rPr lang="en-US" dirty="0"/>
+              <a:t>Non-linear models may need …?</a:t>
+            </a:r>
+          </a:p>
+          <a:p>
+            <a:endParaRPr lang="en-US" dirty="0"/>
+          </a:p>
+        </p:txBody>
+      </p:sp>
+    </p:spTree>
+    <p:extLst>
+      <p:ext uri="{BB962C8B-B14F-4D97-AF65-F5344CB8AC3E}">
+        <p14:creationId xmlns:p14="http://schemas.microsoft.com/office/powerpoint/2010/main" val="466559840"/>
       </p:ext>
     </p:extLst>
   </p:cSld>
@@ -19197,7 +19213,7 @@
           <a:p>
             <a:r>
               <a:rPr lang="en-US" dirty="0"/>
-              <a:t>Feature Interactions</a:t>
+              <a:t>Missing Values</a:t>
             </a:r>
           </a:p>
         </p:txBody>
@@ -19219,14 +19235,28 @@
           <a:p>
             <a:r>
               <a:rPr lang="en-US" dirty="0"/>
-              <a:t>Generate features for combination of features</a:t>
+              <a:t>Impute (Fill in) missing values based on why you think they may be missing and what you want the model to do with those missing values</a:t>
             </a:r>
           </a:p>
           <a:p>
             <a:pPr lvl="1"/>
             <a:r>
               <a:rPr lang="en-US" dirty="0"/>
-              <a:t>Age x gender</a:t>
+              <a:t>Missing Completely at Random</a:t>
+            </a:r>
+          </a:p>
+          <a:p>
+            <a:pPr lvl="1"/>
+            <a:r>
+              <a:rPr lang="en-US" dirty="0"/>
+              <a:t>Missing at Random</a:t>
+            </a:r>
+          </a:p>
+          <a:p>
+            <a:pPr lvl="1"/>
+            <a:r>
+              <a:rPr lang="en-US" dirty="0"/>
+              <a:t>Missing Not at Random</a:t>
             </a:r>
           </a:p>
           <a:p>
@@ -19236,16 +19266,15 @@
           <a:p>
             <a:r>
               <a:rPr lang="en-US" dirty="0"/>
-              <a:t>Allows you to use linear models but still model non linear relationships</a:t>
+              <a:t>Typically, also add binary feature (dummy) for missing vs not missing in case “</a:t>
             </a:r>
-          </a:p>
-          <a:p>
-            <a:endParaRPr lang="en-US" dirty="0"/>
-          </a:p>
-          <a:p>
+            <a:r>
+              <a:rPr lang="en-US" dirty="0" err="1"/>
+              <a:t>missingness</a:t>
+            </a:r>
             <a:r>
               <a:rPr lang="en-US" dirty="0"/>
-              <a:t>Random Forests are one way of discovering useful interactions</a:t>
+              <a:t>” is predictive of the outcome</a:t>
             </a:r>
           </a:p>
         </p:txBody>
@@ -19253,7 +19282,7 @@
     </p:spTree>
     <p:extLst>
       <p:ext uri="{BB962C8B-B14F-4D97-AF65-F5344CB8AC3E}">
-        <p14:creationId xmlns:p14="http://schemas.microsoft.com/office/powerpoint/2010/main" val="2835794600"/>
+        <p14:creationId xmlns:p14="http://schemas.microsoft.com/office/powerpoint/2010/main" val="3357099955"/>
       </p:ext>
     </p:extLst>
   </p:cSld>
@@ -19290,19 +19319,14 @@
             <p:ph type="title"/>
           </p:nvPr>
         </p:nvSpPr>
-        <p:spPr>
-          <a:xfrm>
-            <a:off x="180821" y="293023"/>
-            <a:ext cx="11360700" cy="763500"/>
-          </a:xfrm>
-        </p:spPr>
+        <p:spPr/>
         <p:txBody>
           <a:bodyPr/>
           <a:lstStyle/>
           <a:p>
             <a:r>
               <a:rPr lang="en-US" dirty="0"/>
-              <a:t>Features are also model-dependent</a:t>
+              <a:t>Imputing Missing Values: Some Options</a:t>
             </a:r>
           </a:p>
         </p:txBody>
@@ -19317,23 +19341,28 @@
             <p:ph type="body" idx="1"/>
           </p:nvPr>
         </p:nvSpPr>
-        <p:spPr/>
+        <p:spPr>
+          <a:xfrm>
+            <a:off x="415600" y="1601179"/>
+            <a:ext cx="11360700" cy="4555200"/>
+          </a:xfrm>
+        </p:spPr>
         <p:txBody>
           <a:bodyPr/>
           <a:lstStyle/>
           <a:p>
-            <a:endParaRPr lang="en-US" dirty="0"/>
-          </a:p>
-          <a:p>
-            <a:pPr marL="76200" indent="0">
-              <a:buNone/>
-            </a:pPr>
-            <a:endParaRPr lang="en-US" dirty="0"/>
-          </a:p>
-          <a:p>
             <a:r>
               <a:rPr lang="en-US" dirty="0"/>
-              <a:t>Linear models may need … ?</a:t>
+              <a:t>Nothing?</a:t>
+            </a:r>
+          </a:p>
+          <a:p>
+            <a:endParaRPr lang="en-US" dirty="0"/>
+          </a:p>
+          <a:p>
+            <a:r>
+              <a:rPr lang="en-US" dirty="0"/>
+              <a:t>Central Tendency: Mean / Median / Mode</a:t>
             </a:r>
             <a:br>
               <a:rPr lang="en-US" dirty="0"/>
@@ -19343,10 +19372,49 @@
           <a:p>
             <a:r>
               <a:rPr lang="en-US" dirty="0"/>
-              <a:t>Non-linear models may need …?</a:t>
+              <a:t>ML methods that handle missing data (e.g., </a:t>
             </a:r>
-          </a:p>
-          <a:p>
+            <a:r>
+              <a:rPr lang="en-US" dirty="0" err="1"/>
+              <a:t>xgboost</a:t>
+            </a:r>
+            <a:r>
+              <a:rPr lang="en-US" dirty="0"/>
+              <a:t>)</a:t>
+            </a:r>
+          </a:p>
+          <a:p>
+            <a:endParaRPr lang="en-US" dirty="0"/>
+          </a:p>
+          <a:p>
+            <a:r>
+              <a:rPr lang="en-US" dirty="0"/>
+              <a:t>Others</a:t>
+            </a:r>
+          </a:p>
+          <a:p>
+            <a:pPr lvl="1"/>
+            <a:r>
+              <a:rPr lang="en-US" dirty="0"/>
+              <a:t>Regression</a:t>
+            </a:r>
+          </a:p>
+          <a:p>
+            <a:pPr lvl="1"/>
+            <a:r>
+              <a:rPr lang="en-US" dirty="0"/>
+              <a:t>k-Nearest Neighbor</a:t>
+            </a:r>
+          </a:p>
+          <a:p>
+            <a:pPr lvl="1"/>
+            <a:r>
+              <a:rPr lang="en-US" dirty="0"/>
+              <a:t>Multiple Imputation</a:t>
+            </a:r>
+            <a:br>
+              <a:rPr lang="en-US" dirty="0"/>
+            </a:br>
             <a:endParaRPr lang="en-US" dirty="0"/>
           </a:p>
         </p:txBody>
@@ -19354,7 +19422,7 @@
     </p:spTree>
     <p:extLst>
       <p:ext uri="{BB962C8B-B14F-4D97-AF65-F5344CB8AC3E}">
-        <p14:creationId xmlns:p14="http://schemas.microsoft.com/office/powerpoint/2010/main" val="466559840"/>
+        <p14:creationId xmlns:p14="http://schemas.microsoft.com/office/powerpoint/2010/main" val="1168414506"/>
       </p:ext>
     </p:extLst>
   </p:cSld>
@@ -19383,10 +19451,10 @@
       </p:grpSpPr>
       <p:sp>
         <p:nvSpPr>
-          <p:cNvPr id="2" name="Title 1">
+          <p:cNvPr id="3" name="Title 2">
             <a:extLst>
               <a:ext uri="{FF2B5EF4-FFF2-40B4-BE49-F238E27FC236}">
-                <a16:creationId xmlns:a16="http://schemas.microsoft.com/office/drawing/2014/main" id="{A073B702-ED77-884E-88F7-92D73313F38D}"/>
+                <a16:creationId xmlns:a16="http://schemas.microsoft.com/office/drawing/2014/main" id="{9323871C-7CA8-1448-8FFC-1AE6E1838941}"/>
               </a:ext>
             </a:extLst>
           </p:cNvPr>
@@ -19404,17 +19472,17 @@
           <a:p>
             <a:r>
               <a:rPr lang="en-US" dirty="0"/>
-              <a:t>Plan for the week</a:t>
+              <a:t>Reminders</a:t>
             </a:r>
           </a:p>
         </p:txBody>
       </p:sp>
       <p:sp>
         <p:nvSpPr>
-          <p:cNvPr id="3" name="Text Placeholder 2">
+          <p:cNvPr id="5" name="Text Placeholder 4">
             <a:extLst>
               <a:ext uri="{FF2B5EF4-FFF2-40B4-BE49-F238E27FC236}">
-                <a16:creationId xmlns:a16="http://schemas.microsoft.com/office/drawing/2014/main" id="{7861BAD4-F7FB-1D48-9D37-2273592A75CE}"/>
+                <a16:creationId xmlns:a16="http://schemas.microsoft.com/office/drawing/2014/main" id="{F4E0A5F0-1D89-954D-91FB-596CD9E690F2}"/>
               </a:ext>
             </a:extLst>
           </p:cNvPr>
@@ -19430,47 +19498,121 @@
           <a:bodyPr/>
           <a:lstStyle/>
           <a:p>
+            <a:pPr marL="76200" indent="0">
+              <a:buNone/>
+            </a:pPr>
             <a:r>
-              <a:rPr lang="en-US" dirty="0"/>
-              <a:t>What you should be discussing this week within your team</a:t>
+              <a:rPr lang="en-US" b="1" dirty="0">
+                <a:solidFill>
+                  <a:schemeClr val="tx1">
+                    <a:lumMod val="75000"/>
+                    <a:lumOff val="25000"/>
+                  </a:schemeClr>
+                </a:solidFill>
+              </a:rPr>
+              <a:t>This week:</a:t>
             </a:r>
           </a:p>
           <a:p>
-            <a:pPr lvl="1"/>
             <a:r>
-              <a:rPr lang="en-US" dirty="0"/>
-              <a:t>Validation strategy &amp; temporal parameters</a:t>
+              <a:rPr lang="en-US" dirty="0">
+                <a:solidFill>
+                  <a:schemeClr val="tx1">
+                    <a:lumMod val="75000"/>
+                    <a:lumOff val="25000"/>
+                  </a:schemeClr>
+                </a:solidFill>
+              </a:rPr>
+              <a:t>Tomorrow: Wednesday Group Check-Ins</a:t>
             </a:r>
           </a:p>
           <a:p>
-            <a:pPr lvl="1"/>
             <a:r>
-              <a:rPr lang="en-US" dirty="0"/>
-              <a:t>Initial brainstorming features you’d like to build</a:t>
+              <a:rPr lang="en-US" dirty="0">
+                <a:solidFill>
+                  <a:schemeClr val="tx1">
+                    <a:lumMod val="75000"/>
+                    <a:lumOff val="25000"/>
+                  </a:schemeClr>
+                </a:solidFill>
+              </a:rPr>
+              <a:t>Thursday: Triage Q&amp;A + time for group work</a:t>
             </a:r>
-          </a:p>
-          <a:p>
-            <a:pPr lvl="1"/>
-            <a:endParaRPr lang="en-US" dirty="0"/>
-          </a:p>
-          <a:p>
+            <a:endParaRPr lang="en-US" b="1" dirty="0">
+              <a:solidFill>
+                <a:schemeClr val="tx1">
+                  <a:lumMod val="75000"/>
+                  <a:lumOff val="25000"/>
+                </a:schemeClr>
+              </a:solidFill>
+            </a:endParaRPr>
+          </a:p>
+          <a:p>
+            <a:pPr marL="76200" indent="0">
+              <a:buNone/>
+            </a:pPr>
+            <a:endParaRPr lang="en-US" b="1" dirty="0">
+              <a:solidFill>
+                <a:schemeClr val="tx1">
+                  <a:lumMod val="75000"/>
+                  <a:lumOff val="25000"/>
+                </a:schemeClr>
+              </a:solidFill>
+            </a:endParaRPr>
+          </a:p>
+          <a:p>
+            <a:pPr marL="76200" indent="0">
+              <a:buNone/>
+            </a:pPr>
             <a:r>
-              <a:rPr lang="en-US" dirty="0"/>
-              <a:t>What you should be building this week</a:t>
+              <a:rPr lang="en-US" b="1" dirty="0">
+                <a:solidFill>
+                  <a:schemeClr val="tx1">
+                    <a:lumMod val="75000"/>
+                    <a:lumOff val="25000"/>
+                  </a:schemeClr>
+                </a:solidFill>
+              </a:rPr>
+              <a:t>Coming up after fall break:</a:t>
             </a:r>
           </a:p>
           <a:p>
-            <a:pPr lvl="1"/>
             <a:r>
-              <a:rPr lang="en-US" dirty="0"/>
-              <a:t>Temporal Validation Parameters</a:t>
+              <a:rPr lang="en-US" dirty="0">
+                <a:solidFill>
+                  <a:schemeClr val="tx1">
+                    <a:lumMod val="75000"/>
+                    <a:lumOff val="25000"/>
+                  </a:schemeClr>
+                </a:solidFill>
+              </a:rPr>
+              <a:t>Monday: Project Update 3</a:t>
             </a:r>
           </a:p>
           <a:p>
-            <a:pPr lvl="1"/>
             <a:r>
-              <a:rPr lang="en-US" dirty="0"/>
-              <a:t>Updated Cohort &amp; Label Queries</a:t>
+              <a:rPr lang="en-US" dirty="0">
+                <a:solidFill>
+                  <a:schemeClr val="tx1">
+                    <a:lumMod val="75000"/>
+                    <a:lumOff val="25000"/>
+                  </a:schemeClr>
+                </a:solidFill>
+              </a:rPr>
+              <a:t>Tuesday: Weekly Feedback Form</a:t>
+            </a:r>
+          </a:p>
+          <a:p>
+            <a:r>
+              <a:rPr lang="en-US" dirty="0">
+                <a:solidFill>
+                  <a:schemeClr val="tx1">
+                    <a:lumMod val="75000"/>
+                    <a:lumOff val="25000"/>
+                  </a:schemeClr>
+                </a:solidFill>
+              </a:rPr>
+              <a:t>Tuesday: Building Features in Triage</a:t>
             </a:r>
           </a:p>
         </p:txBody>
@@ -19478,7 +19620,7 @@
     </p:spTree>
     <p:extLst>
       <p:ext uri="{BB962C8B-B14F-4D97-AF65-F5344CB8AC3E}">
-        <p14:creationId xmlns:p14="http://schemas.microsoft.com/office/powerpoint/2010/main" val="517800727"/>
+        <p14:creationId xmlns:p14="http://schemas.microsoft.com/office/powerpoint/2010/main" val="186046226"/>
       </p:ext>
     </p:extLst>
   </p:cSld>
@@ -19522,7 +19664,7 @@
           <a:p>
             <a:r>
               <a:rPr lang="en-US" dirty="0"/>
-              <a:t>Missing Values</a:t>
+              <a:t>Imputing – Central Tendency</a:t>
             </a:r>
           </a:p>
         </p:txBody>
@@ -19544,46 +19686,37 @@
           <a:p>
             <a:r>
               <a:rPr lang="en-US" dirty="0"/>
-              <a:t>Impute (Fill in) missing values based on why you think they may be missing and what you want the model to do with those missing values</a:t>
+              <a:t>Simple to calculate and computationally fast</a:t>
             </a:r>
-          </a:p>
-          <a:p>
-            <a:pPr lvl="1"/>
+            <a:br>
+              <a:rPr lang="en-US" dirty="0"/>
+            </a:br>
+            <a:endParaRPr lang="en-US" dirty="0"/>
+          </a:p>
+          <a:p>
             <a:r>
               <a:rPr lang="en-US" dirty="0"/>
-              <a:t>Missing Completely at Random</a:t>
+              <a:t>Often a reasonable starting point</a:t>
             </a:r>
-          </a:p>
-          <a:p>
-            <a:pPr lvl="1"/>
+            <a:br>
+              <a:rPr lang="en-US" dirty="0"/>
+            </a:br>
+            <a:endParaRPr lang="en-US" dirty="0"/>
+          </a:p>
+          <a:p>
             <a:r>
               <a:rPr lang="en-US" dirty="0"/>
-              <a:t>Missing at Random</a:t>
+              <a:t>May be able to capture more nuance by using other, correlated data to help fill in missing values</a:t>
             </a:r>
-          </a:p>
-          <a:p>
-            <a:pPr lvl="1"/>
+            <a:br>
+              <a:rPr lang="en-US" dirty="0"/>
+            </a:br>
+            <a:endParaRPr lang="en-US" dirty="0"/>
+          </a:p>
+          <a:p>
             <a:r>
               <a:rPr lang="en-US" dirty="0"/>
-              <a:t>Missing Not at Random</a:t>
-            </a:r>
-          </a:p>
-          <a:p>
-            <a:pPr lvl="1"/>
-            <a:endParaRPr lang="en-US" dirty="0"/>
-          </a:p>
-          <a:p>
-            <a:r>
-              <a:rPr lang="en-US" dirty="0"/>
-              <a:t>Typically, also add binary feature (dummy) for missing vs not missing in case “</a:t>
-            </a:r>
-            <a:r>
-              <a:rPr lang="en-US" dirty="0" err="1"/>
-              <a:t>missingness</a:t>
-            </a:r>
-            <a:r>
-              <a:rPr lang="en-US" dirty="0"/>
-              <a:t>” is predictive of the outcome</a:t>
+              <a:t>Under-represents variance/covariance of data</a:t>
             </a:r>
           </a:p>
         </p:txBody>
@@ -19591,13 +19724,91 @@
     </p:spTree>
     <p:extLst>
       <p:ext uri="{BB962C8B-B14F-4D97-AF65-F5344CB8AC3E}">
-        <p14:creationId xmlns:p14="http://schemas.microsoft.com/office/powerpoint/2010/main" val="3357099955"/>
+        <p14:creationId xmlns:p14="http://schemas.microsoft.com/office/powerpoint/2010/main" val="2396215195"/>
       </p:ext>
     </p:extLst>
   </p:cSld>
   <p:clrMapOvr>
     <a:masterClrMapping/>
   </p:clrMapOvr>
+  <p:timing>
+    <p:tnLst>
+      <p:par>
+        <p:cTn id="1" dur="indefinite" restart="never" nodeType="tmRoot">
+          <p:childTnLst>
+            <p:seq concurrent="1" nextAc="seek">
+              <p:cTn id="2" dur="indefinite" nodeType="mainSeq">
+                <p:childTnLst>
+                  <p:par>
+                    <p:cTn id="3" fill="hold">
+                      <p:stCondLst>
+                        <p:cond delay="indefinite"/>
+                      </p:stCondLst>
+                      <p:childTnLst>
+                        <p:par>
+                          <p:cTn id="4" fill="hold">
+                            <p:stCondLst>
+                              <p:cond delay="0"/>
+                            </p:stCondLst>
+                            <p:childTnLst>
+                              <p:par>
+                                <p:cTn id="5" presetID="1" presetClass="entr" presetSubtype="0" fill="hold" grpId="0" nodeType="clickEffect">
+                                  <p:stCondLst>
+                                    <p:cond delay="0"/>
+                                  </p:stCondLst>
+                                  <p:childTnLst>
+                                    <p:set>
+                                      <p:cBhvr>
+                                        <p:cTn id="6" dur="1" fill="hold">
+                                          <p:stCondLst>
+                                            <p:cond delay="0"/>
+                                          </p:stCondLst>
+                                        </p:cTn>
+                                        <p:tgtEl>
+                                          <p:spTgt spid="2"/>
+                                        </p:tgtEl>
+                                        <p:attrNameLst>
+                                          <p:attrName>style.visibility</p:attrName>
+                                        </p:attrNameLst>
+                                      </p:cBhvr>
+                                      <p:to>
+                                        <p:strVal val="visible"/>
+                                      </p:to>
+                                    </p:set>
+                                  </p:childTnLst>
+                                </p:cTn>
+                              </p:par>
+                            </p:childTnLst>
+                          </p:cTn>
+                        </p:par>
+                      </p:childTnLst>
+                    </p:cTn>
+                  </p:par>
+                </p:childTnLst>
+              </p:cTn>
+              <p:prevCondLst>
+                <p:cond evt="onPrev" delay="0">
+                  <p:tgtEl>
+                    <p:sldTgt/>
+                  </p:tgtEl>
+                </p:cond>
+              </p:prevCondLst>
+              <p:nextCondLst>
+                <p:cond evt="onNext" delay="0">
+                  <p:tgtEl>
+                    <p:sldTgt/>
+                  </p:tgtEl>
+                </p:cond>
+              </p:nextCondLst>
+            </p:seq>
+          </p:childTnLst>
+        </p:cTn>
+      </p:par>
+    </p:tnLst>
+    <p:bldLst>
+      <p:bldP spid="2" grpId="0"/>
+    </p:bldLst>
+  </p:timing>
 </p:sld>
 </file>
 
@@ -19635,7 +19846,7 @@
           <a:p>
             <a:r>
               <a:rPr lang="en-US" dirty="0"/>
-              <a:t>Imputing Missing Values: Some Options</a:t>
+              <a:t>Imputing – ML Methods with Missing Data Handling</a:t>
             </a:r>
           </a:p>
         </p:txBody>
@@ -19650,38 +19861,14 @@
             <p:ph type="body" idx="1"/>
           </p:nvPr>
         </p:nvSpPr>
-        <p:spPr>
-          <a:xfrm>
-            <a:off x="415600" y="1601179"/>
-            <a:ext cx="11360700" cy="4555200"/>
-          </a:xfrm>
-        </p:spPr>
+        <p:spPr/>
         <p:txBody>
           <a:bodyPr/>
           <a:lstStyle/>
           <a:p>
             <a:r>
               <a:rPr lang="en-US" dirty="0"/>
-              <a:t>Nothing?</a:t>
-            </a:r>
-          </a:p>
-          <a:p>
-            <a:endParaRPr lang="en-US" dirty="0"/>
-          </a:p>
-          <a:p>
-            <a:r>
-              <a:rPr lang="en-US" dirty="0"/>
-              <a:t>Central Tendency: Mean / Median / Mode</a:t>
-            </a:r>
-            <a:br>
-              <a:rPr lang="en-US" dirty="0"/>
-            </a:br>
-            <a:endParaRPr lang="en-US" dirty="0"/>
-          </a:p>
-          <a:p>
-            <a:r>
-              <a:rPr lang="en-US" dirty="0"/>
-              <a:t>ML methods that handle missing data (e.g., </a:t>
+              <a:t>Some models have built-in handling of missing data, such as </a:t>
             </a:r>
             <a:r>
               <a:rPr lang="en-US" dirty="0" err="1"/>
@@ -19689,55 +19876,119 @@
             </a:r>
             <a:r>
               <a:rPr lang="en-US" dirty="0"/>
-              <a:t>)</a:t>
-            </a:r>
-          </a:p>
-          <a:p>
-            <a:endParaRPr lang="en-US" dirty="0"/>
-          </a:p>
-          <a:p>
-            <a:r>
-              <a:rPr lang="en-US" dirty="0"/>
-              <a:t>Others</a:t>
-            </a:r>
-          </a:p>
-          <a:p>
-            <a:pPr lvl="1"/>
-            <a:r>
-              <a:rPr lang="en-US" dirty="0"/>
-              <a:t>Regression</a:t>
-            </a:r>
-          </a:p>
-          <a:p>
-            <a:pPr lvl="1"/>
-            <a:r>
-              <a:rPr lang="en-US" dirty="0"/>
-              <a:t>k-Nearest Neighbor</a:t>
-            </a:r>
-          </a:p>
-          <a:p>
-            <a:pPr lvl="1"/>
-            <a:r>
-              <a:rPr lang="en-US" dirty="0"/>
-              <a:t>Multiple Imputation</a:t>
+              <a:t> (which decides which direction to send missing values at each split)</a:t>
             </a:r>
             <a:br>
               <a:rPr lang="en-US" dirty="0"/>
             </a:br>
             <a:endParaRPr lang="en-US" dirty="0"/>
           </a:p>
+          <a:p>
+            <a:r>
+              <a:rPr lang="en-US" dirty="0"/>
+              <a:t>May not be the best modeling method for your problem, don’t want to be locked into certain type of model</a:t>
+            </a:r>
+            <a:br>
+              <a:rPr lang="en-US" dirty="0"/>
+            </a:br>
+            <a:endParaRPr lang="en-US" dirty="0"/>
+          </a:p>
+          <a:p>
+            <a:r>
+              <a:rPr lang="en-US" dirty="0"/>
+              <a:t>Nevertheless, worth exploring performance of other imputation methods even when using these models as well</a:t>
+            </a:r>
+          </a:p>
         </p:txBody>
       </p:sp>
     </p:spTree>
     <p:extLst>
       <p:ext uri="{BB962C8B-B14F-4D97-AF65-F5344CB8AC3E}">
-        <p14:creationId xmlns:p14="http://schemas.microsoft.com/office/powerpoint/2010/main" val="1168414506"/>
+        <p14:creationId xmlns:p14="http://schemas.microsoft.com/office/powerpoint/2010/main" val="2521997284"/>
       </p:ext>
     </p:extLst>
   </p:cSld>
   <p:clrMapOvr>
     <a:masterClrMapping/>
   </p:clrMapOvr>
+  <p:timing>
+    <p:tnLst>
+      <p:par>
+        <p:cTn id="1" dur="indefinite" restart="never" nodeType="tmRoot">
+          <p:childTnLst>
+            <p:seq concurrent="1" nextAc="seek">
+              <p:cTn id="2" dur="indefinite" nodeType="mainSeq">
+                <p:childTnLst>
+                  <p:par>
+                    <p:cTn id="3" fill="hold">
+                      <p:stCondLst>
+                        <p:cond delay="indefinite"/>
+                      </p:stCondLst>
+                      <p:childTnLst>
+                        <p:par>
+                          <p:cTn id="4" fill="hold">
+                            <p:stCondLst>
+                              <p:cond delay="0"/>
+                            </p:stCondLst>
+                            <p:childTnLst>
+                              <p:par>
+                                <p:cTn id="5" presetID="1" presetClass="entr" presetSubtype="0" fill="hold" grpId="0" nodeType="clickEffect">
+                                  <p:stCondLst>
+                                    <p:cond delay="0"/>
+                                  </p:stCondLst>
+                                  <p:childTnLst>
+                                    <p:set>
+                                      <p:cBhvr>
+                                        <p:cTn id="6" dur="1" fill="hold">
+                                          <p:stCondLst>
+                                            <p:cond delay="0"/>
+                                          </p:stCondLst>
+                                        </p:cTn>
+                                        <p:tgtEl>
+                                          <p:spTgt spid="2"/>
+                                        </p:tgtEl>
+                                        <p:attrNameLst>
+                                          <p:attrName>style.visibility</p:attrName>
+                                        </p:attrNameLst>
+                                      </p:cBhvr>
+                                      <p:to>
+                                        <p:strVal val="visible"/>
+                                      </p:to>
+                                    </p:set>
+                                  </p:childTnLst>
+                                </p:cTn>
+                              </p:par>
+                            </p:childTnLst>
+                          </p:cTn>
+                        </p:par>
+                      </p:childTnLst>
+                    </p:cTn>
+                  </p:par>
+                </p:childTnLst>
+              </p:cTn>
+              <p:prevCondLst>
+                <p:cond evt="onPrev" delay="0">
+                  <p:tgtEl>
+                    <p:sldTgt/>
+                  </p:tgtEl>
+                </p:cond>
+              </p:prevCondLst>
+              <p:nextCondLst>
+                <p:cond evt="onNext" delay="0">
+                  <p:tgtEl>
+                    <p:sldTgt/>
+                  </p:tgtEl>
+                </p:cond>
+              </p:nextCondLst>
+            </p:seq>
+          </p:childTnLst>
+        </p:cTn>
+      </p:par>
+    </p:tnLst>
+    <p:bldLst>
+      <p:bldP spid="2" grpId="0"/>
+    </p:bldLst>
+  </p:timing>
 </p:sld>
 </file>
 
@@ -19775,7 +20026,7 @@
           <a:p>
             <a:r>
               <a:rPr lang="en-US" dirty="0"/>
-              <a:t>Imputing – Central Tendency</a:t>
+              <a:t>Imputing – Regression</a:t>
             </a:r>
           </a:p>
         </p:txBody>
@@ -19797,7 +20048,7 @@
           <a:p>
             <a:r>
               <a:rPr lang="en-US" dirty="0"/>
-              <a:t>Simple to calculate and computationally fast</a:t>
+              <a:t>Make use of information in correlated features, more flexible than central tendency</a:t>
             </a:r>
             <a:br>
               <a:rPr lang="en-US" dirty="0"/>
@@ -19807,7 +20058,7 @@
           <a:p>
             <a:r>
               <a:rPr lang="en-US" dirty="0"/>
-              <a:t>Often a reasonable starting point</a:t>
+              <a:t>However, may not be flexible enough to capture complex relationships or interactions</a:t>
             </a:r>
             <a:br>
               <a:rPr lang="en-US" dirty="0"/>
@@ -19817,7 +20068,7 @@
           <a:p>
             <a:r>
               <a:rPr lang="en-US" dirty="0"/>
-              <a:t>May be able to capture more nuance by using other, correlated data to help fill in missing values</a:t>
+              <a:t>May be somewhat more computationally expensive </a:t>
             </a:r>
             <a:br>
               <a:rPr lang="en-US" dirty="0"/>
@@ -19827,7 +20078,7 @@
           <a:p>
             <a:r>
               <a:rPr lang="en-US" dirty="0"/>
-              <a:t>Under-represents variance/covariance of data</a:t>
+              <a:t>Generally will still underestimate variation in data</a:t>
             </a:r>
           </a:p>
         </p:txBody>
@@ -19835,7 +20086,7 @@
     </p:spTree>
     <p:extLst>
       <p:ext uri="{BB962C8B-B14F-4D97-AF65-F5344CB8AC3E}">
-        <p14:creationId xmlns:p14="http://schemas.microsoft.com/office/powerpoint/2010/main" val="2396215195"/>
+        <p14:creationId xmlns:p14="http://schemas.microsoft.com/office/powerpoint/2010/main" val="3808227576"/>
       </p:ext>
     </p:extLst>
   </p:cSld>
@@ -19957,7 +20208,7 @@
           <a:p>
             <a:r>
               <a:rPr lang="en-US" dirty="0"/>
-              <a:t>Imputing – ML Methods with Missing Data Handling</a:t>
+              <a:t>Imputing – k-Nearest Neighbor</a:t>
             </a:r>
           </a:p>
         </p:txBody>
@@ -19979,15 +20230,7 @@
           <a:p>
             <a:r>
               <a:rPr lang="en-US" dirty="0"/>
-              <a:t>Some models have built-in handling of missing data, such as </a:t>
-            </a:r>
-            <a:r>
-              <a:rPr lang="en-US" dirty="0" err="1"/>
-              <a:t>xgboost</a:t>
-            </a:r>
-            <a:r>
-              <a:rPr lang="en-US" dirty="0"/>
-              <a:t> (which decides which direction to send missing values at each split)</a:t>
+              <a:t>More flexible option, capture more complexity in relationships in data</a:t>
             </a:r>
             <a:br>
               <a:rPr lang="en-US" dirty="0"/>
@@ -19997,7 +20240,7 @@
           <a:p>
             <a:r>
               <a:rPr lang="en-US" dirty="0"/>
-              <a:t>May not be the best modeling method for your problem, don’t want to be locked into certain type of model</a:t>
+              <a:t>Difficult to choose appropriate distance metric, value of k</a:t>
             </a:r>
             <a:br>
               <a:rPr lang="en-US" dirty="0"/>
@@ -20007,7 +20250,17 @@
           <a:p>
             <a:r>
               <a:rPr lang="en-US" dirty="0"/>
-              <a:t>Nevertheless, worth exploring performance of other imputation methods even when using these models as well</a:t>
+              <a:t>More computationally expensive than other methods of imputation</a:t>
+            </a:r>
+            <a:br>
+              <a:rPr lang="en-US" dirty="0"/>
+            </a:br>
+            <a:endParaRPr lang="en-US" dirty="0"/>
+          </a:p>
+          <a:p>
+            <a:r>
+              <a:rPr lang="en-US" dirty="0"/>
+              <a:t>Requires entire training set to calculate imputed values for new examples</a:t>
             </a:r>
           </a:p>
         </p:txBody>
@@ -20015,7 +20268,7 @@
     </p:spTree>
     <p:extLst>
       <p:ext uri="{BB962C8B-B14F-4D97-AF65-F5344CB8AC3E}">
-        <p14:creationId xmlns:p14="http://schemas.microsoft.com/office/powerpoint/2010/main" val="2521997284"/>
+        <p14:creationId xmlns:p14="http://schemas.microsoft.com/office/powerpoint/2010/main" val="3729575760"/>
       </p:ext>
     </p:extLst>
   </p:cSld>
@@ -20137,7 +20390,7 @@
           <a:p>
             <a:r>
               <a:rPr lang="en-US" dirty="0"/>
-              <a:t>Imputing – Regression</a:t>
+              <a:t>Imputing – Multiple Imputation</a:t>
             </a:r>
           </a:p>
         </p:txBody>
@@ -20159,7 +20412,7 @@
           <a:p>
             <a:r>
               <a:rPr lang="en-US" dirty="0"/>
-              <a:t>Make use of information in correlated features, more flexible than central tendency</a:t>
+              <a:t>Create multiple “complete” datasets with different values using different regression models</a:t>
             </a:r>
             <a:br>
               <a:rPr lang="en-US" dirty="0"/>
@@ -20169,7 +20422,7 @@
           <a:p>
             <a:r>
               <a:rPr lang="en-US" dirty="0"/>
-              <a:t>However, may not be flexible enough to capture complex relationships or interactions</a:t>
+              <a:t>Helps analyze sensitivity to handling of missing values</a:t>
             </a:r>
             <a:br>
               <a:rPr lang="en-US" dirty="0"/>
@@ -20179,7 +20432,7 @@
           <a:p>
             <a:r>
               <a:rPr lang="en-US" dirty="0"/>
-              <a:t>May be somewhat more computationally expensive </a:t>
+              <a:t>Much more computationally expensive, both for imputation and downstream modeling</a:t>
             </a:r>
             <a:br>
               <a:rPr lang="en-US" dirty="0"/>
@@ -20189,7 +20442,7 @@
           <a:p>
             <a:r>
               <a:rPr lang="en-US" dirty="0"/>
-              <a:t>Generally will still underestimate variation in data</a:t>
+              <a:t>Can provide better representation of variability in data</a:t>
             </a:r>
           </a:p>
         </p:txBody>
@@ -20197,7 +20450,7 @@
     </p:spTree>
     <p:extLst>
       <p:ext uri="{BB962C8B-B14F-4D97-AF65-F5344CB8AC3E}">
-        <p14:creationId xmlns:p14="http://schemas.microsoft.com/office/powerpoint/2010/main" val="3808227576"/>
+        <p14:creationId xmlns:p14="http://schemas.microsoft.com/office/powerpoint/2010/main" val="2069799902"/>
       </p:ext>
     </p:extLst>
   </p:cSld>
@@ -20304,370 +20557,6 @@
       </p:grpSpPr>
       <p:sp>
         <p:nvSpPr>
-          <p:cNvPr id="3" name="Title 2"/>
-          <p:cNvSpPr>
-            <a:spLocks noGrp="1"/>
-          </p:cNvSpPr>
-          <p:nvPr>
-            <p:ph type="title"/>
-          </p:nvPr>
-        </p:nvSpPr>
-        <p:spPr/>
-        <p:txBody>
-          <a:bodyPr/>
-          <a:lstStyle/>
-          <a:p>
-            <a:r>
-              <a:rPr lang="en-US" dirty="0"/>
-              <a:t>Imputing – k-Nearest Neighbor</a:t>
-            </a:r>
-          </a:p>
-        </p:txBody>
-      </p:sp>
-      <p:sp>
-        <p:nvSpPr>
-          <p:cNvPr id="2" name="Content Placeholder 1"/>
-          <p:cNvSpPr>
-            <a:spLocks noGrp="1"/>
-          </p:cNvSpPr>
-          <p:nvPr>
-            <p:ph type="body" idx="1"/>
-          </p:nvPr>
-        </p:nvSpPr>
-        <p:spPr/>
-        <p:txBody>
-          <a:bodyPr/>
-          <a:lstStyle/>
-          <a:p>
-            <a:r>
-              <a:rPr lang="en-US" dirty="0"/>
-              <a:t>More flexible option, capture more complexity in relationships in data</a:t>
-            </a:r>
-            <a:br>
-              <a:rPr lang="en-US" dirty="0"/>
-            </a:br>
-            <a:endParaRPr lang="en-US" dirty="0"/>
-          </a:p>
-          <a:p>
-            <a:r>
-              <a:rPr lang="en-US" dirty="0"/>
-              <a:t>Difficult to choose appropriate distance metric, value of k</a:t>
-            </a:r>
-            <a:br>
-              <a:rPr lang="en-US" dirty="0"/>
-            </a:br>
-            <a:endParaRPr lang="en-US" dirty="0"/>
-          </a:p>
-          <a:p>
-            <a:r>
-              <a:rPr lang="en-US" dirty="0"/>
-              <a:t>More computationally expensive than other methods of imputation</a:t>
-            </a:r>
-            <a:br>
-              <a:rPr lang="en-US" dirty="0"/>
-            </a:br>
-            <a:endParaRPr lang="en-US" dirty="0"/>
-          </a:p>
-          <a:p>
-            <a:r>
-              <a:rPr lang="en-US" dirty="0"/>
-              <a:t>Requires entire training set to calculate imputed values for new examples</a:t>
-            </a:r>
-          </a:p>
-        </p:txBody>
-      </p:sp>
-    </p:spTree>
-    <p:extLst>
-      <p:ext uri="{BB962C8B-B14F-4D97-AF65-F5344CB8AC3E}">
-        <p14:creationId xmlns:p14="http://schemas.microsoft.com/office/powerpoint/2010/main" val="3729575760"/>
-      </p:ext>
-    </p:extLst>
-  </p:cSld>
-  <p:clrMapOvr>
-    <a:masterClrMapping/>
-  </p:clrMapOvr>
-  <p:timing>
-    <p:tnLst>
-      <p:par>
-        <p:cTn id="1" dur="indefinite" restart="never" nodeType="tmRoot">
-          <p:childTnLst>
-            <p:seq concurrent="1" nextAc="seek">
-              <p:cTn id="2" dur="indefinite" nodeType="mainSeq">
-                <p:childTnLst>
-                  <p:par>
-                    <p:cTn id="3" fill="hold">
-                      <p:stCondLst>
-                        <p:cond delay="indefinite"/>
-                      </p:stCondLst>
-                      <p:childTnLst>
-                        <p:par>
-                          <p:cTn id="4" fill="hold">
-                            <p:stCondLst>
-                              <p:cond delay="0"/>
-                            </p:stCondLst>
-                            <p:childTnLst>
-                              <p:par>
-                                <p:cTn id="5" presetID="1" presetClass="entr" presetSubtype="0" fill="hold" grpId="0" nodeType="clickEffect">
-                                  <p:stCondLst>
-                                    <p:cond delay="0"/>
-                                  </p:stCondLst>
-                                  <p:childTnLst>
-                                    <p:set>
-                                      <p:cBhvr>
-                                        <p:cTn id="6" dur="1" fill="hold">
-                                          <p:stCondLst>
-                                            <p:cond delay="0"/>
-                                          </p:stCondLst>
-                                        </p:cTn>
-                                        <p:tgtEl>
-                                          <p:spTgt spid="2"/>
-                                        </p:tgtEl>
-                                        <p:attrNameLst>
-                                          <p:attrName>style.visibility</p:attrName>
-                                        </p:attrNameLst>
-                                      </p:cBhvr>
-                                      <p:to>
-                                        <p:strVal val="visible"/>
-                                      </p:to>
-                                    </p:set>
-                                  </p:childTnLst>
-                                </p:cTn>
-                              </p:par>
-                            </p:childTnLst>
-                          </p:cTn>
-                        </p:par>
-                      </p:childTnLst>
-                    </p:cTn>
-                  </p:par>
-                </p:childTnLst>
-              </p:cTn>
-              <p:prevCondLst>
-                <p:cond evt="onPrev" delay="0">
-                  <p:tgtEl>
-                    <p:sldTgt/>
-                  </p:tgtEl>
-                </p:cond>
-              </p:prevCondLst>
-              <p:nextCondLst>
-                <p:cond evt="onNext" delay="0">
-                  <p:tgtEl>
-                    <p:sldTgt/>
-                  </p:tgtEl>
-                </p:cond>
-              </p:nextCondLst>
-            </p:seq>
-          </p:childTnLst>
-        </p:cTn>
-      </p:par>
-    </p:tnLst>
-    <p:bldLst>
-      <p:bldP spid="2" grpId="0"/>
-    </p:bldLst>
-  </p:timing>
-</p:sld>
-</file>
-
-<file path=ppt/slides/slide36.xml><?xml version="1.0" encoding="utf-8"?>
-<p:sld xmlns:a="http://schemas.openxmlformats.org/drawingml/2006/main" xmlns:r="http://schemas.openxmlformats.org/officeDocument/2006/relationships" xmlns:p="http://schemas.openxmlformats.org/presentationml/2006/main">
-  <p:cSld>
-    <p:spTree>
-      <p:nvGrpSpPr>
-        <p:cNvPr id="1" name=""/>
-        <p:cNvGrpSpPr/>
-        <p:nvPr/>
-      </p:nvGrpSpPr>
-      <p:grpSpPr>
-        <a:xfrm>
-          <a:off x="0" y="0"/>
-          <a:ext cx="0" cy="0"/>
-          <a:chOff x="0" y="0"/>
-          <a:chExt cx="0" cy="0"/>
-        </a:xfrm>
-      </p:grpSpPr>
-      <p:sp>
-        <p:nvSpPr>
-          <p:cNvPr id="3" name="Title 2"/>
-          <p:cNvSpPr>
-            <a:spLocks noGrp="1"/>
-          </p:cNvSpPr>
-          <p:nvPr>
-            <p:ph type="title"/>
-          </p:nvPr>
-        </p:nvSpPr>
-        <p:spPr/>
-        <p:txBody>
-          <a:bodyPr/>
-          <a:lstStyle/>
-          <a:p>
-            <a:r>
-              <a:rPr lang="en-US" dirty="0"/>
-              <a:t>Imputing – Multiple Imputation</a:t>
-            </a:r>
-          </a:p>
-        </p:txBody>
-      </p:sp>
-      <p:sp>
-        <p:nvSpPr>
-          <p:cNvPr id="2" name="Content Placeholder 1"/>
-          <p:cNvSpPr>
-            <a:spLocks noGrp="1"/>
-          </p:cNvSpPr>
-          <p:nvPr>
-            <p:ph type="body" idx="1"/>
-          </p:nvPr>
-        </p:nvSpPr>
-        <p:spPr/>
-        <p:txBody>
-          <a:bodyPr/>
-          <a:lstStyle/>
-          <a:p>
-            <a:r>
-              <a:rPr lang="en-US" dirty="0"/>
-              <a:t>Create multiple “complete” datasets with different values using different regression models</a:t>
-            </a:r>
-            <a:br>
-              <a:rPr lang="en-US" dirty="0"/>
-            </a:br>
-            <a:endParaRPr lang="en-US" dirty="0"/>
-          </a:p>
-          <a:p>
-            <a:r>
-              <a:rPr lang="en-US" dirty="0"/>
-              <a:t>Helps analyze sensitivity to handling of missing values</a:t>
-            </a:r>
-            <a:br>
-              <a:rPr lang="en-US" dirty="0"/>
-            </a:br>
-            <a:endParaRPr lang="en-US" dirty="0"/>
-          </a:p>
-          <a:p>
-            <a:r>
-              <a:rPr lang="en-US" dirty="0"/>
-              <a:t>Much more computationally expensive, both for imputation and downstream modeling</a:t>
-            </a:r>
-            <a:br>
-              <a:rPr lang="en-US" dirty="0"/>
-            </a:br>
-            <a:endParaRPr lang="en-US" dirty="0"/>
-          </a:p>
-          <a:p>
-            <a:r>
-              <a:rPr lang="en-US" dirty="0"/>
-              <a:t>Can provide better representation of variability in data</a:t>
-            </a:r>
-          </a:p>
-        </p:txBody>
-      </p:sp>
-    </p:spTree>
-    <p:extLst>
-      <p:ext uri="{BB962C8B-B14F-4D97-AF65-F5344CB8AC3E}">
-        <p14:creationId xmlns:p14="http://schemas.microsoft.com/office/powerpoint/2010/main" val="2069799902"/>
-      </p:ext>
-    </p:extLst>
-  </p:cSld>
-  <p:clrMapOvr>
-    <a:masterClrMapping/>
-  </p:clrMapOvr>
-  <p:timing>
-    <p:tnLst>
-      <p:par>
-        <p:cTn id="1" dur="indefinite" restart="never" nodeType="tmRoot">
-          <p:childTnLst>
-            <p:seq concurrent="1" nextAc="seek">
-              <p:cTn id="2" dur="indefinite" nodeType="mainSeq">
-                <p:childTnLst>
-                  <p:par>
-                    <p:cTn id="3" fill="hold">
-                      <p:stCondLst>
-                        <p:cond delay="indefinite"/>
-                      </p:stCondLst>
-                      <p:childTnLst>
-                        <p:par>
-                          <p:cTn id="4" fill="hold">
-                            <p:stCondLst>
-                              <p:cond delay="0"/>
-                            </p:stCondLst>
-                            <p:childTnLst>
-                              <p:par>
-                                <p:cTn id="5" presetID="1" presetClass="entr" presetSubtype="0" fill="hold" grpId="0" nodeType="clickEffect">
-                                  <p:stCondLst>
-                                    <p:cond delay="0"/>
-                                  </p:stCondLst>
-                                  <p:childTnLst>
-                                    <p:set>
-                                      <p:cBhvr>
-                                        <p:cTn id="6" dur="1" fill="hold">
-                                          <p:stCondLst>
-                                            <p:cond delay="0"/>
-                                          </p:stCondLst>
-                                        </p:cTn>
-                                        <p:tgtEl>
-                                          <p:spTgt spid="2"/>
-                                        </p:tgtEl>
-                                        <p:attrNameLst>
-                                          <p:attrName>style.visibility</p:attrName>
-                                        </p:attrNameLst>
-                                      </p:cBhvr>
-                                      <p:to>
-                                        <p:strVal val="visible"/>
-                                      </p:to>
-                                    </p:set>
-                                  </p:childTnLst>
-                                </p:cTn>
-                              </p:par>
-                            </p:childTnLst>
-                          </p:cTn>
-                        </p:par>
-                      </p:childTnLst>
-                    </p:cTn>
-                  </p:par>
-                </p:childTnLst>
-              </p:cTn>
-              <p:prevCondLst>
-                <p:cond evt="onPrev" delay="0">
-                  <p:tgtEl>
-                    <p:sldTgt/>
-                  </p:tgtEl>
-                </p:cond>
-              </p:prevCondLst>
-              <p:nextCondLst>
-                <p:cond evt="onNext" delay="0">
-                  <p:tgtEl>
-                    <p:sldTgt/>
-                  </p:tgtEl>
-                </p:cond>
-              </p:nextCondLst>
-            </p:seq>
-          </p:childTnLst>
-        </p:cTn>
-      </p:par>
-    </p:tnLst>
-    <p:bldLst>
-      <p:bldP spid="2" grpId="0"/>
-    </p:bldLst>
-  </p:timing>
-</p:sld>
-</file>
-
-<file path=ppt/slides/slide37.xml><?xml version="1.0" encoding="utf-8"?>
-<p:sld xmlns:a="http://schemas.openxmlformats.org/drawingml/2006/main" xmlns:r="http://schemas.openxmlformats.org/officeDocument/2006/relationships" xmlns:p="http://schemas.openxmlformats.org/presentationml/2006/main">
-  <p:cSld>
-    <p:spTree>
-      <p:nvGrpSpPr>
-        <p:cNvPr id="1" name=""/>
-        <p:cNvGrpSpPr/>
-        <p:nvPr/>
-      </p:nvGrpSpPr>
-      <p:grpSpPr>
-        <a:xfrm>
-          <a:off x="0" y="0"/>
-          <a:ext cx="0" cy="0"/>
-          <a:chOff x="0" y="0"/>
-          <a:chExt cx="0" cy="0"/>
-        </a:xfrm>
-      </p:grpSpPr>
-      <p:sp>
-        <p:nvSpPr>
           <p:cNvPr id="2" name="Title 1">
             <a:extLst>
               <a:ext uri="{FF2B5EF4-FFF2-40B4-BE49-F238E27FC236}">
@@ -20762,7 +20651,7 @@
 </p:sld>
 </file>
 
-<file path=ppt/slides/slide38.xml><?xml version="1.0" encoding="utf-8"?>
+<file path=ppt/slides/slide36.xml><?xml version="1.0" encoding="utf-8"?>
 <p:sld xmlns:a="http://schemas.openxmlformats.org/drawingml/2006/main" xmlns:r="http://schemas.openxmlformats.org/officeDocument/2006/relationships" xmlns:p="http://schemas.openxmlformats.org/presentationml/2006/main">
   <p:cSld>
     <p:spTree>
@@ -20845,7 +20734,7 @@
 </p:sld>
 </file>
 
-<file path=ppt/slides/slide39.xml><?xml version="1.0" encoding="utf-8"?>
+<file path=ppt/slides/slide37.xml><?xml version="1.0" encoding="utf-8"?>
 <p:sld xmlns:a="http://schemas.openxmlformats.org/drawingml/2006/main" xmlns:r="http://schemas.openxmlformats.org/officeDocument/2006/relationships" xmlns:p="http://schemas.openxmlformats.org/presentationml/2006/main">
   <p:cSld>
     <p:spTree>
@@ -20986,7 +20875,13 @@
       </p:grpSpPr>
       <p:sp>
         <p:nvSpPr>
-          <p:cNvPr id="3" name="Title 2"/>
+          <p:cNvPr id="2" name="Title 1">
+            <a:extLst>
+              <a:ext uri="{FF2B5EF4-FFF2-40B4-BE49-F238E27FC236}">
+                <a16:creationId xmlns:a16="http://schemas.microsoft.com/office/drawing/2014/main" id="{A073B702-ED77-884E-88F7-92D73313F38D}"/>
+              </a:ext>
+            </a:extLst>
+          </p:cNvPr>
           <p:cNvSpPr>
             <a:spLocks noGrp="1"/>
           </p:cNvSpPr>
@@ -21001,401 +20896,81 @@
           <a:p>
             <a:r>
               <a:rPr lang="en-US" dirty="0"/>
-              <a:t>Reminder: The PR-k Curve</a:t>
+              <a:t>Plan for the week</a:t>
             </a:r>
           </a:p>
         </p:txBody>
       </p:sp>
-      <p:grpSp>
-        <p:nvGrpSpPr>
-          <p:cNvPr id="5" name="Group 4"/>
-          <p:cNvGrpSpPr/>
-          <p:nvPr/>
-        </p:nvGrpSpPr>
-        <p:grpSpPr>
-          <a:xfrm>
-            <a:off x="2435740" y="1562635"/>
-            <a:ext cx="7320520" cy="4944871"/>
-            <a:chOff x="616981" y="1325057"/>
-            <a:chExt cx="7320520" cy="4944871"/>
-          </a:xfrm>
-        </p:grpSpPr>
-        <p:pic>
-          <p:nvPicPr>
-            <p:cNvPr id="4" name="Picture 3"/>
-            <p:cNvPicPr>
-              <a:picLocks noChangeAspect="1"/>
-            </p:cNvPicPr>
-            <p:nvPr/>
-          </p:nvPicPr>
-          <p:blipFill>
-            <a:blip r:embed="rId2"/>
-            <a:stretch>
-              <a:fillRect/>
-            </a:stretch>
-          </p:blipFill>
-          <p:spPr>
-            <a:xfrm>
-              <a:off x="616981" y="1325057"/>
-              <a:ext cx="7320520" cy="4944871"/>
-            </a:xfrm>
-            <a:prstGeom prst="rect">
-              <a:avLst/>
-            </a:prstGeom>
-          </p:spPr>
-        </p:pic>
-        <p:sp>
-          <p:nvSpPr>
-            <p:cNvPr id="2" name="Rectangle 1"/>
-            <p:cNvSpPr/>
-            <p:nvPr/>
-          </p:nvSpPr>
-          <p:spPr>
-            <a:xfrm>
-              <a:off x="4064000" y="1409700"/>
-              <a:ext cx="342900" cy="279400"/>
-            </a:xfrm>
-            <a:prstGeom prst="rect">
-              <a:avLst/>
-            </a:prstGeom>
-            <a:ln>
-              <a:noFill/>
-            </a:ln>
-          </p:spPr>
-          <p:style>
-            <a:lnRef idx="2">
-              <a:schemeClr val="dk1"/>
-            </a:lnRef>
-            <a:fillRef idx="1">
-              <a:schemeClr val="lt1"/>
-            </a:fillRef>
-            <a:effectRef idx="0">
-              <a:schemeClr val="dk1"/>
-            </a:effectRef>
-            <a:fontRef idx="minor">
-              <a:schemeClr val="dk1"/>
-            </a:fontRef>
-          </p:style>
-          <p:txBody>
-            <a:bodyPr rtlCol="0" anchor="ctr"/>
-            <a:lstStyle/>
-            <a:p>
-              <a:pPr algn="ctr" defTabSz="457200">
-                <a:buClrTx/>
-              </a:pPr>
-              <a:endParaRPr lang="en-US" sz="1800" kern="1200">
-                <a:solidFill>
-                  <a:prstClr val="black"/>
-                </a:solidFill>
-                <a:latin typeface="Calibri"/>
-              </a:endParaRPr>
-            </a:p>
-          </p:txBody>
-        </p:sp>
-      </p:grpSp>
-      <p:grpSp>
-        <p:nvGrpSpPr>
-          <p:cNvPr id="9" name="Group 8">
+      <p:sp>
+        <p:nvSpPr>
+          <p:cNvPr id="3" name="Text Placeholder 2">
             <a:extLst>
               <a:ext uri="{FF2B5EF4-FFF2-40B4-BE49-F238E27FC236}">
-                <a16:creationId xmlns:a16="http://schemas.microsoft.com/office/drawing/2014/main" id="{100148AF-CA57-0541-9177-560EC8D36156}"/>
+                <a16:creationId xmlns:a16="http://schemas.microsoft.com/office/drawing/2014/main" id="{7861BAD4-F7FB-1D48-9D37-2273592A75CE}"/>
               </a:ext>
             </a:extLst>
           </p:cNvPr>
-          <p:cNvGrpSpPr/>
-          <p:nvPr/>
-        </p:nvGrpSpPr>
-        <p:grpSpPr>
-          <a:xfrm>
-            <a:off x="3018798" y="1150982"/>
-            <a:ext cx="6607802" cy="882961"/>
-            <a:chOff x="1494798" y="1150981"/>
-            <a:chExt cx="6607802" cy="882961"/>
-          </a:xfrm>
-        </p:grpSpPr>
-        <p:sp>
-          <p:nvSpPr>
-            <p:cNvPr id="6" name="TextBox 5"/>
-            <p:cNvSpPr txBox="1"/>
-            <p:nvPr/>
-          </p:nvSpPr>
-          <p:spPr>
-            <a:xfrm>
-              <a:off x="1494798" y="1387611"/>
-              <a:ext cx="6607802" cy="646331"/>
-            </a:xfrm>
-            <a:prstGeom prst="rect">
-              <a:avLst/>
-            </a:prstGeom>
-            <a:noFill/>
-          </p:spPr>
-          <p:txBody>
-            <a:bodyPr wrap="square" rtlCol="0">
-              <a:spAutoFit/>
-            </a:bodyPr>
-            <a:lstStyle/>
-            <a:p>
-              <a:pPr defTabSz="457200">
-                <a:buClrTx/>
-              </a:pPr>
-              <a:r>
-                <a:rPr lang="en-US" sz="1800" b="1" kern="1200" dirty="0">
-                  <a:solidFill>
-                    <a:srgbClr val="C0504D">
-                      <a:lumMod val="75000"/>
-                    </a:srgbClr>
-                  </a:solidFill>
-                  <a:latin typeface="Calibri"/>
-                  <a:ea typeface="+mn-ea"/>
-                  <a:cs typeface="+mn-cs"/>
-                </a:rPr>
-                <a:t>1         .9     .8                .7        .6            .5    .4  .3.                  .2     .1 </a:t>
-              </a:r>
-            </a:p>
-            <a:p>
-              <a:pPr defTabSz="457200">
-                <a:buClrTx/>
-              </a:pPr>
-              <a:r>
-                <a:rPr lang="en-US" sz="1050" b="1" kern="1200" dirty="0">
-                  <a:solidFill>
-                    <a:srgbClr val="C0504D">
-                      <a:lumMod val="75000"/>
-                    </a:srgbClr>
-                  </a:solidFill>
-                  <a:latin typeface="Calibri"/>
-                  <a:ea typeface="+mn-ea"/>
-                  <a:cs typeface="+mn-cs"/>
-                </a:rPr>
-                <a:t> |                  |             |                               |                  |                        |           |        |                                    |            |</a:t>
-              </a:r>
-              <a:r>
-                <a:rPr lang="en-US" sz="1800" b="1" kern="1200" dirty="0">
-                  <a:solidFill>
-                    <a:srgbClr val="C0504D">
-                      <a:lumMod val="75000"/>
-                    </a:srgbClr>
-                  </a:solidFill>
-                  <a:latin typeface="Calibri"/>
-                  <a:ea typeface="+mn-ea"/>
-                  <a:cs typeface="+mn-cs"/>
-                </a:rPr>
-                <a:t>   </a:t>
-              </a:r>
-              <a:r>
-                <a:rPr lang="en-US" sz="1800" kern="1200" dirty="0">
-                  <a:solidFill>
-                    <a:srgbClr val="EEECE1">
-                      <a:lumMod val="25000"/>
-                    </a:srgbClr>
-                  </a:solidFill>
-                  <a:latin typeface="Calibri"/>
-                  <a:ea typeface="+mn-ea"/>
-                  <a:cs typeface="+mn-cs"/>
-                </a:rPr>
-                <a:t>      </a:t>
-              </a:r>
-            </a:p>
-          </p:txBody>
-        </p:sp>
-        <p:sp>
-          <p:nvSpPr>
-            <p:cNvPr id="8" name="TextBox 7">
-              <a:extLst>
-                <a:ext uri="{FF2B5EF4-FFF2-40B4-BE49-F238E27FC236}">
-                  <a16:creationId xmlns:a16="http://schemas.microsoft.com/office/drawing/2014/main" id="{EFA4ED1E-FBFF-4545-BB64-FFD28CAC8A4B}"/>
-                </a:ext>
-              </a:extLst>
-            </p:cNvPr>
-            <p:cNvSpPr txBox="1"/>
-            <p:nvPr/>
-          </p:nvSpPr>
-          <p:spPr>
-            <a:xfrm>
-              <a:off x="4097994" y="1150981"/>
-              <a:ext cx="700705" cy="369332"/>
-            </a:xfrm>
-            <a:prstGeom prst="rect">
-              <a:avLst/>
-            </a:prstGeom>
-            <a:noFill/>
-          </p:spPr>
-          <p:txBody>
-            <a:bodyPr wrap="none" rtlCol="0">
-              <a:spAutoFit/>
-            </a:bodyPr>
-            <a:lstStyle/>
-            <a:p>
-              <a:pPr defTabSz="457200">
-                <a:buClrTx/>
-              </a:pPr>
-              <a:r>
-                <a:rPr lang="en-US" sz="1800" b="1" kern="1200" dirty="0">
-                  <a:solidFill>
-                    <a:srgbClr val="C00000"/>
-                  </a:solidFill>
-                  <a:latin typeface="Calibri"/>
-                  <a:ea typeface="+mn-ea"/>
-                  <a:cs typeface="+mn-cs"/>
-                </a:rPr>
-                <a:t>Score</a:t>
-              </a:r>
-            </a:p>
-          </p:txBody>
-        </p:sp>
-      </p:grpSp>
-      <p:grpSp>
-        <p:nvGrpSpPr>
-          <p:cNvPr id="15" name="Group 14">
-            <a:extLst>
-              <a:ext uri="{FF2B5EF4-FFF2-40B4-BE49-F238E27FC236}">
-                <a16:creationId xmlns:a16="http://schemas.microsoft.com/office/drawing/2014/main" id="{F79BF13E-AE77-6A46-B2C2-E1985346BF6A}"/>
-              </a:ext>
-            </a:extLst>
-          </p:cNvPr>
-          <p:cNvGrpSpPr/>
-          <p:nvPr/>
-        </p:nvGrpSpPr>
-        <p:grpSpPr>
-          <a:xfrm>
-            <a:off x="1836283" y="5550212"/>
-            <a:ext cx="7221578" cy="369332"/>
-            <a:chOff x="312283" y="5550212"/>
-            <a:chExt cx="7221578" cy="369332"/>
-          </a:xfrm>
-        </p:grpSpPr>
-        <p:cxnSp>
-          <p:nvCxnSpPr>
-            <p:cNvPr id="11" name="Straight Connector 10">
-              <a:extLst>
-                <a:ext uri="{FF2B5EF4-FFF2-40B4-BE49-F238E27FC236}">
-                  <a16:creationId xmlns:a16="http://schemas.microsoft.com/office/drawing/2014/main" id="{91561906-EEC1-6046-905E-0E55B1D4B60D}"/>
-                </a:ext>
-              </a:extLst>
-            </p:cNvPr>
-            <p:cNvCxnSpPr/>
-            <p:nvPr/>
-          </p:nvCxnSpPr>
-          <p:spPr>
-            <a:xfrm flipH="1">
-              <a:off x="1649896" y="5734878"/>
-              <a:ext cx="5883965" cy="0"/>
-            </a:xfrm>
-            <a:prstGeom prst="line">
-              <a:avLst/>
-            </a:prstGeom>
-            <a:ln w="28575">
-              <a:solidFill>
-                <a:srgbClr val="00B0F0"/>
-              </a:solidFill>
-            </a:ln>
-          </p:spPr>
-          <p:style>
-            <a:lnRef idx="2">
-              <a:schemeClr val="accent1"/>
-            </a:lnRef>
-            <a:fillRef idx="0">
-              <a:schemeClr val="accent1"/>
-            </a:fillRef>
-            <a:effectRef idx="1">
-              <a:schemeClr val="accent1"/>
-            </a:effectRef>
-            <a:fontRef idx="minor">
-              <a:schemeClr val="tx1"/>
-            </a:fontRef>
-          </p:style>
-        </p:cxnSp>
-        <p:sp>
-          <p:nvSpPr>
-            <p:cNvPr id="12" name="TextBox 11">
-              <a:extLst>
-                <a:ext uri="{FF2B5EF4-FFF2-40B4-BE49-F238E27FC236}">
-                  <a16:creationId xmlns:a16="http://schemas.microsoft.com/office/drawing/2014/main" id="{79F59512-F15A-1445-8C8B-BFD99D51B252}"/>
-                </a:ext>
-              </a:extLst>
-            </p:cNvPr>
-            <p:cNvSpPr txBox="1"/>
-            <p:nvPr/>
-          </p:nvSpPr>
-          <p:spPr>
-            <a:xfrm>
-              <a:off x="312283" y="5550212"/>
-              <a:ext cx="1069139" cy="369332"/>
-            </a:xfrm>
-            <a:prstGeom prst="rect">
-              <a:avLst/>
-            </a:prstGeom>
-            <a:noFill/>
-          </p:spPr>
-          <p:txBody>
-            <a:bodyPr wrap="none" rtlCol="0">
-              <a:spAutoFit/>
-            </a:bodyPr>
-            <a:lstStyle/>
-            <a:p>
-              <a:pPr defTabSz="457200">
-                <a:buClrTx/>
-              </a:pPr>
-              <a:r>
-                <a:rPr lang="en-US" sz="1800" b="1" kern="1200" dirty="0">
-                  <a:solidFill>
-                    <a:srgbClr val="C00000"/>
-                  </a:solidFill>
-                  <a:latin typeface="Calibri"/>
-                  <a:ea typeface="+mn-ea"/>
-                  <a:cs typeface="+mn-cs"/>
-                </a:rPr>
-                <a:t>Base rate</a:t>
-              </a:r>
-            </a:p>
-          </p:txBody>
-        </p:sp>
-        <p:cxnSp>
-          <p:nvCxnSpPr>
-            <p:cNvPr id="14" name="Straight Arrow Connector 13">
-              <a:extLst>
-                <a:ext uri="{FF2B5EF4-FFF2-40B4-BE49-F238E27FC236}">
-                  <a16:creationId xmlns:a16="http://schemas.microsoft.com/office/drawing/2014/main" id="{E9A4A58B-B356-1E41-A6F4-EEF6E44A9AD1}"/>
-                </a:ext>
-              </a:extLst>
-            </p:cNvPr>
-            <p:cNvCxnSpPr>
-              <a:stCxn id="12" idx="3"/>
-            </p:cNvCxnSpPr>
-            <p:nvPr/>
-          </p:nvCxnSpPr>
-          <p:spPr>
-            <a:xfrm>
-              <a:off x="1381422" y="5734878"/>
-              <a:ext cx="198900" cy="0"/>
-            </a:xfrm>
-            <a:prstGeom prst="straightConnector1">
-              <a:avLst/>
-            </a:prstGeom>
-            <a:ln>
-              <a:tailEnd type="triangle"/>
-            </a:ln>
-          </p:spPr>
-          <p:style>
-            <a:lnRef idx="2">
-              <a:schemeClr val="accent1"/>
-            </a:lnRef>
-            <a:fillRef idx="0">
-              <a:schemeClr val="accent1"/>
-            </a:fillRef>
-            <a:effectRef idx="1">
-              <a:schemeClr val="accent1"/>
-            </a:effectRef>
-            <a:fontRef idx="minor">
-              <a:schemeClr val="tx1"/>
-            </a:fontRef>
-          </p:style>
-        </p:cxnSp>
-      </p:grpSp>
+          <p:cNvSpPr>
+            <a:spLocks noGrp="1"/>
+          </p:cNvSpPr>
+          <p:nvPr>
+            <p:ph type="body" idx="1"/>
+          </p:nvPr>
+        </p:nvSpPr>
+        <p:spPr/>
+        <p:txBody>
+          <a:bodyPr/>
+          <a:lstStyle/>
+          <a:p>
+            <a:r>
+              <a:rPr lang="en-US" dirty="0"/>
+              <a:t>What you should be discussing this week within your team</a:t>
+            </a:r>
+          </a:p>
+          <a:p>
+            <a:pPr lvl="1"/>
+            <a:r>
+              <a:rPr lang="en-US" dirty="0"/>
+              <a:t>Validation strategy &amp; temporal parameters</a:t>
+            </a:r>
+          </a:p>
+          <a:p>
+            <a:pPr lvl="1"/>
+            <a:r>
+              <a:rPr lang="en-US" dirty="0"/>
+              <a:t>Initial brainstorming features you’d like to build</a:t>
+            </a:r>
+          </a:p>
+          <a:p>
+            <a:pPr lvl="1"/>
+            <a:endParaRPr lang="en-US" dirty="0"/>
+          </a:p>
+          <a:p>
+            <a:r>
+              <a:rPr lang="en-US" dirty="0"/>
+              <a:t>What you should be building this week</a:t>
+            </a:r>
+          </a:p>
+          <a:p>
+            <a:pPr lvl="1"/>
+            <a:r>
+              <a:rPr lang="en-US" dirty="0"/>
+              <a:t>Temporal Validation Parameters</a:t>
+            </a:r>
+          </a:p>
+          <a:p>
+            <a:pPr lvl="1"/>
+            <a:r>
+              <a:rPr lang="en-US" dirty="0"/>
+              <a:t>Updated Cohort &amp; Label Queries</a:t>
+            </a:r>
+          </a:p>
+        </p:txBody>
+      </p:sp>
     </p:spTree>
     <p:extLst>
       <p:ext uri="{BB962C8B-B14F-4D97-AF65-F5344CB8AC3E}">
-        <p14:creationId xmlns:p14="http://schemas.microsoft.com/office/powerpoint/2010/main" val="255739373"/>
+        <p14:creationId xmlns:p14="http://schemas.microsoft.com/office/powerpoint/2010/main" val="517800727"/>
       </p:ext>
     </p:extLst>
   </p:cSld>
@@ -21424,119 +20999,75 @@
       </p:grpSpPr>
       <p:sp>
         <p:nvSpPr>
-          <p:cNvPr id="3" name="Title 2">
+          <p:cNvPr id="4" name="TextBox 3">
             <a:extLst>
               <a:ext uri="{FF2B5EF4-FFF2-40B4-BE49-F238E27FC236}">
-                <a16:creationId xmlns:a16="http://schemas.microsoft.com/office/drawing/2014/main" id="{9323871C-7CA8-1448-8FFC-1AE6E1838941}"/>
+                <a16:creationId xmlns:a16="http://schemas.microsoft.com/office/drawing/2014/main" id="{678E8A16-2F7F-9443-93CD-17932D868828}"/>
               </a:ext>
             </a:extLst>
           </p:cNvPr>
-          <p:cNvSpPr>
-            <a:spLocks noGrp="1"/>
-          </p:cNvSpPr>
-          <p:nvPr>
-            <p:ph type="title"/>
-          </p:nvPr>
+          <p:cNvSpPr txBox="1"/>
+          <p:nvPr/>
         </p:nvSpPr>
         <p:spPr>
           <a:xfrm>
-            <a:off x="415600" y="2667"/>
-            <a:ext cx="11360700" cy="763500"/>
-          </a:xfrm>
-        </p:spPr>
-        <p:txBody>
-          <a:bodyPr/>
-          <a:lstStyle/>
-          <a:p>
-            <a:pPr algn="ctr"/>
-            <a:r>
-              <a:rPr lang="en-US" b="1" dirty="0" err="1"/>
-              <a:t>slido.com</a:t>
-            </a:r>
-            <a:r>
-              <a:rPr lang="en-US" b="1" dirty="0"/>
-              <a:t>/94889</a:t>
-            </a:r>
-            <a:br>
-              <a:rPr lang="en-US" dirty="0"/>
-            </a:br>
-            <a:r>
-              <a:rPr lang="en-US" sz="2400" dirty="0"/>
-              <a:t>Which of these is a </a:t>
-            </a:r>
-            <a:r>
-              <a:rPr lang="en-US" sz="2400" u="sng" dirty="0"/>
-              <a:t>possible</a:t>
-            </a:r>
-            <a:r>
-              <a:rPr lang="en-US" sz="2400" dirty="0"/>
-              <a:t> PR-k curve on the same dataset as the one outlined?</a:t>
-            </a:r>
-            <a:r>
-              <a:rPr lang="en-US" dirty="0"/>
-              <a:t> </a:t>
-            </a:r>
-          </a:p>
-        </p:txBody>
-      </p:sp>
-      <p:pic>
-        <p:nvPicPr>
-          <p:cNvPr id="1026" name="Picture 2">
-            <a:extLst>
-              <a:ext uri="{FF2B5EF4-FFF2-40B4-BE49-F238E27FC236}">
-                <a16:creationId xmlns:a16="http://schemas.microsoft.com/office/drawing/2014/main" id="{5821B651-BAFB-8E46-9563-DD473DB1F8A6}"/>
-              </a:ext>
-            </a:extLst>
-          </p:cNvPr>
-          <p:cNvPicPr>
-            <a:picLocks noChangeAspect="1" noChangeArrowheads="1"/>
-          </p:cNvPicPr>
-          <p:nvPr/>
-        </p:nvPicPr>
-        <p:blipFill>
-          <a:blip r:embed="rId2">
-            <a:extLst>
-              <a:ext uri="{28A0092B-C50C-407E-A947-70E740481C1C}">
-                <a14:useLocalDpi xmlns:a14="http://schemas.microsoft.com/office/drawing/2010/main" val="0"/>
-              </a:ext>
-            </a:extLst>
-          </a:blip>
-          <a:srcRect/>
-          <a:stretch>
-            <a:fillRect/>
-          </a:stretch>
-        </p:blipFill>
-        <p:spPr bwMode="auto">
-          <a:xfrm>
-            <a:off x="102630" y="1484699"/>
-            <a:ext cx="3683000" cy="2603500"/>
+            <a:off x="4572001" y="5979885"/>
+            <a:ext cx="7738016" cy="307777"/>
           </a:xfrm>
           <a:prstGeom prst="rect">
             <a:avLst/>
           </a:prstGeom>
           <a:noFill/>
-          <a:ln w="57150">
-            <a:solidFill>
-              <a:srgbClr val="7030A0"/>
-            </a:solidFill>
-          </a:ln>
-          <a:extLst>
-            <a:ext uri="{909E8E84-426E-40DD-AFC4-6F175D3DCCD1}">
-              <a14:hiddenFill xmlns:a14="http://schemas.microsoft.com/office/drawing/2010/main">
-                <a:solidFill>
-                  <a:srgbClr val="FFFFFF"/>
-                </a:solidFill>
-              </a14:hiddenFill>
-            </a:ext>
-          </a:extLst>
+        </p:spPr>
+        <p:txBody>
+          <a:bodyPr wrap="none" rtlCol="0">
+            <a:spAutoFit/>
+          </a:bodyPr>
+          <a:lstStyle/>
+          <a:p>
+            <a:r>
+              <a:rPr lang="en-US" dirty="0"/>
+              <a:t>2014                          2015                              2016                           2017                          2018</a:t>
+            </a:r>
+          </a:p>
+        </p:txBody>
+      </p:sp>
+      <p:pic>
+        <p:nvPicPr>
+          <p:cNvPr id="2" name="Picture 1">
+            <a:extLst>
+              <a:ext uri="{FF2B5EF4-FFF2-40B4-BE49-F238E27FC236}">
+                <a16:creationId xmlns:a16="http://schemas.microsoft.com/office/drawing/2014/main" id="{5AA66AF8-5911-C4C0-8FEE-37A63809EF1E}"/>
+              </a:ext>
+            </a:extLst>
+          </p:cNvPr>
+          <p:cNvPicPr>
+            <a:picLocks noChangeAspect="1"/>
+          </p:cNvPicPr>
+          <p:nvPr/>
+        </p:nvPicPr>
+        <p:blipFill>
+          <a:blip r:embed="rId2"/>
+          <a:stretch>
+            <a:fillRect/>
+          </a:stretch>
+        </p:blipFill>
+        <p:spPr>
+          <a:xfrm>
+            <a:off x="0" y="995516"/>
+            <a:ext cx="4995772" cy="5862484"/>
+          </a:xfrm>
+          <a:prstGeom prst="rect">
+            <a:avLst/>
+          </a:prstGeom>
         </p:spPr>
       </p:pic>
       <p:pic>
         <p:nvPicPr>
-          <p:cNvPr id="8" name="Picture 7">
+          <p:cNvPr id="3" name="Picture 2">
             <a:extLst>
               <a:ext uri="{FF2B5EF4-FFF2-40B4-BE49-F238E27FC236}">
-                <a16:creationId xmlns:a16="http://schemas.microsoft.com/office/drawing/2014/main" id="{B85614E7-F81E-E446-B0C7-8FD2E9C9318F}"/>
+                <a16:creationId xmlns:a16="http://schemas.microsoft.com/office/drawing/2014/main" id="{C7E8F66F-F4C4-8A4B-BD28-D3552AF8B841}"/>
               </a:ext>
             </a:extLst>
           </p:cNvPr>
@@ -21553,506 +21084,8 @@
         </p:blipFill>
         <p:spPr>
           <a:xfrm>
-            <a:off x="4194089" y="1325675"/>
-            <a:ext cx="3318819" cy="2390675"/>
-          </a:xfrm>
-          <a:prstGeom prst="rect">
-            <a:avLst/>
-          </a:prstGeom>
-        </p:spPr>
-      </p:pic>
-      <p:pic>
-        <p:nvPicPr>
-          <p:cNvPr id="9" name="Picture 8">
-            <a:extLst>
-              <a:ext uri="{FF2B5EF4-FFF2-40B4-BE49-F238E27FC236}">
-                <a16:creationId xmlns:a16="http://schemas.microsoft.com/office/drawing/2014/main" id="{691734CC-D6CC-D148-9AD3-760F6BBC7F3D}"/>
-              </a:ext>
-            </a:extLst>
-          </p:cNvPr>
-          <p:cNvPicPr>
-            <a:picLocks noChangeAspect="1"/>
-          </p:cNvPicPr>
-          <p:nvPr/>
-        </p:nvPicPr>
-        <p:blipFill>
-          <a:blip r:embed="rId4"/>
-          <a:stretch>
-            <a:fillRect/>
-          </a:stretch>
-        </p:blipFill>
-        <p:spPr>
-          <a:xfrm>
-            <a:off x="8457481" y="1328644"/>
-            <a:ext cx="3318819" cy="2387706"/>
-          </a:xfrm>
-          <a:prstGeom prst="rect">
-            <a:avLst/>
-          </a:prstGeom>
-        </p:spPr>
-      </p:pic>
-      <p:pic>
-        <p:nvPicPr>
-          <p:cNvPr id="11" name="Picture 10">
-            <a:extLst>
-              <a:ext uri="{FF2B5EF4-FFF2-40B4-BE49-F238E27FC236}">
-                <a16:creationId xmlns:a16="http://schemas.microsoft.com/office/drawing/2014/main" id="{5FE55A37-C444-CB41-A9F1-BA81FEE25656}"/>
-              </a:ext>
-            </a:extLst>
-          </p:cNvPr>
-          <p:cNvPicPr>
-            <a:picLocks noChangeAspect="1"/>
-          </p:cNvPicPr>
-          <p:nvPr/>
-        </p:nvPicPr>
-        <p:blipFill>
-          <a:blip r:embed="rId5"/>
-          <a:stretch>
-            <a:fillRect/>
-          </a:stretch>
-        </p:blipFill>
-        <p:spPr>
-          <a:xfrm>
-            <a:off x="4194089" y="3703891"/>
-            <a:ext cx="3346946" cy="2390676"/>
-          </a:xfrm>
-          <a:prstGeom prst="rect">
-            <a:avLst/>
-          </a:prstGeom>
-        </p:spPr>
-      </p:pic>
-      <p:pic>
-        <p:nvPicPr>
-          <p:cNvPr id="12" name="Picture 11">
-            <a:extLst>
-              <a:ext uri="{FF2B5EF4-FFF2-40B4-BE49-F238E27FC236}">
-                <a16:creationId xmlns:a16="http://schemas.microsoft.com/office/drawing/2014/main" id="{C15DB196-3EE2-434E-B765-C69CAE0F1ABD}"/>
-              </a:ext>
-            </a:extLst>
-          </p:cNvPr>
-          <p:cNvPicPr>
-            <a:picLocks noChangeAspect="1"/>
-          </p:cNvPicPr>
-          <p:nvPr/>
-        </p:nvPicPr>
-        <p:blipFill>
-          <a:blip r:embed="rId6"/>
-          <a:stretch>
-            <a:fillRect/>
-          </a:stretch>
-        </p:blipFill>
-        <p:spPr>
-          <a:xfrm>
-            <a:off x="8457481" y="3648836"/>
-            <a:ext cx="3151434" cy="2686313"/>
-          </a:xfrm>
-          <a:prstGeom prst="rect">
-            <a:avLst/>
-          </a:prstGeom>
-        </p:spPr>
-      </p:pic>
-      <p:pic>
-        <p:nvPicPr>
-          <p:cNvPr id="14" name="Picture 13">
-            <a:extLst>
-              <a:ext uri="{FF2B5EF4-FFF2-40B4-BE49-F238E27FC236}">
-                <a16:creationId xmlns:a16="http://schemas.microsoft.com/office/drawing/2014/main" id="{1CF0C0F7-7C05-B341-BF1D-68116ED1E538}"/>
-              </a:ext>
-            </a:extLst>
-          </p:cNvPr>
-          <p:cNvPicPr>
-            <a:picLocks noChangeAspect="1"/>
-          </p:cNvPicPr>
-          <p:nvPr/>
-        </p:nvPicPr>
-        <p:blipFill rotWithShape="1">
-          <a:blip r:embed="rId6"/>
-          <a:srcRect t="88921"/>
-          <a:stretch/>
-        </p:blipFill>
-        <p:spPr>
-          <a:xfrm>
-            <a:off x="4389601" y="6067076"/>
-            <a:ext cx="3151434" cy="297609"/>
-          </a:xfrm>
-          <a:prstGeom prst="rect">
-            <a:avLst/>
-          </a:prstGeom>
-        </p:spPr>
-      </p:pic>
-      <p:pic>
-        <p:nvPicPr>
-          <p:cNvPr id="15" name="Picture 14">
-            <a:extLst>
-              <a:ext uri="{FF2B5EF4-FFF2-40B4-BE49-F238E27FC236}">
-                <a16:creationId xmlns:a16="http://schemas.microsoft.com/office/drawing/2014/main" id="{9137F808-ABB8-7941-9FAE-DE98E8DE45FD}"/>
-              </a:ext>
-            </a:extLst>
-          </p:cNvPr>
-          <p:cNvPicPr>
-            <a:picLocks noChangeAspect="1"/>
-          </p:cNvPicPr>
-          <p:nvPr/>
-        </p:nvPicPr>
-        <p:blipFill rotWithShape="1">
-          <a:blip r:embed="rId4"/>
-          <a:srcRect l="92220"/>
-          <a:stretch/>
-        </p:blipFill>
-        <p:spPr>
-          <a:xfrm>
-            <a:off x="11590780" y="3700215"/>
-            <a:ext cx="258193" cy="2387706"/>
-          </a:xfrm>
-          <a:prstGeom prst="rect">
-            <a:avLst/>
-          </a:prstGeom>
-        </p:spPr>
-      </p:pic>
-      <p:sp>
-        <p:nvSpPr>
-          <p:cNvPr id="13" name="Rectangle 12">
-            <a:extLst>
-              <a:ext uri="{FF2B5EF4-FFF2-40B4-BE49-F238E27FC236}">
-                <a16:creationId xmlns:a16="http://schemas.microsoft.com/office/drawing/2014/main" id="{15DEBDEF-2E84-1E48-8558-7AF3CE99300E}"/>
-              </a:ext>
-            </a:extLst>
-          </p:cNvPr>
-          <p:cNvSpPr/>
-          <p:nvPr/>
-        </p:nvSpPr>
-        <p:spPr>
-          <a:xfrm>
-            <a:off x="6582391" y="2985924"/>
-            <a:ext cx="613540" cy="477079"/>
-          </a:xfrm>
-          <a:prstGeom prst="rect">
-            <a:avLst/>
-          </a:prstGeom>
-          <a:solidFill>
-            <a:schemeClr val="bg1"/>
-          </a:solidFill>
-          <a:ln>
-            <a:noFill/>
-          </a:ln>
-        </p:spPr>
-        <p:style>
-          <a:lnRef idx="2">
-            <a:schemeClr val="accent1">
-              <a:shade val="50000"/>
-            </a:schemeClr>
-          </a:lnRef>
-          <a:fillRef idx="1">
-            <a:schemeClr val="accent1"/>
-          </a:fillRef>
-          <a:effectRef idx="0">
-            <a:schemeClr val="accent1"/>
-          </a:effectRef>
-          <a:fontRef idx="minor">
-            <a:schemeClr val="lt1"/>
-          </a:fontRef>
-        </p:style>
-        <p:txBody>
-          <a:bodyPr rtlCol="0" anchor="ctr"/>
-          <a:lstStyle/>
-          <a:p>
-            <a:pPr algn="ctr"/>
-            <a:r>
-              <a:rPr lang="en-US" sz="2800" b="1" dirty="0">
-                <a:solidFill>
-                  <a:schemeClr val="tx1"/>
-                </a:solidFill>
-              </a:rPr>
-              <a:t>A</a:t>
-            </a:r>
-            <a:endParaRPr lang="en-US" b="1" dirty="0">
-              <a:solidFill>
-                <a:schemeClr val="tx1"/>
-              </a:solidFill>
-            </a:endParaRPr>
-          </a:p>
-        </p:txBody>
-      </p:sp>
-      <p:sp>
-        <p:nvSpPr>
-          <p:cNvPr id="17" name="Rectangle 16">
-            <a:extLst>
-              <a:ext uri="{FF2B5EF4-FFF2-40B4-BE49-F238E27FC236}">
-                <a16:creationId xmlns:a16="http://schemas.microsoft.com/office/drawing/2014/main" id="{7D7EC8D8-F48E-1649-A4BD-70F7D4FD0BC6}"/>
-              </a:ext>
-            </a:extLst>
-          </p:cNvPr>
-          <p:cNvSpPr/>
-          <p:nvPr/>
-        </p:nvSpPr>
-        <p:spPr>
-          <a:xfrm>
-            <a:off x="10577922" y="2959419"/>
-            <a:ext cx="613540" cy="477079"/>
-          </a:xfrm>
-          <a:prstGeom prst="rect">
-            <a:avLst/>
-          </a:prstGeom>
-          <a:solidFill>
-            <a:schemeClr val="bg1"/>
-          </a:solidFill>
-          <a:ln>
-            <a:noFill/>
-          </a:ln>
-        </p:spPr>
-        <p:style>
-          <a:lnRef idx="2">
-            <a:schemeClr val="accent1">
-              <a:shade val="50000"/>
-            </a:schemeClr>
-          </a:lnRef>
-          <a:fillRef idx="1">
-            <a:schemeClr val="accent1"/>
-          </a:fillRef>
-          <a:effectRef idx="0">
-            <a:schemeClr val="accent1"/>
-          </a:effectRef>
-          <a:fontRef idx="minor">
-            <a:schemeClr val="lt1"/>
-          </a:fontRef>
-        </p:style>
-        <p:txBody>
-          <a:bodyPr rtlCol="0" anchor="ctr"/>
-          <a:lstStyle/>
-          <a:p>
-            <a:pPr algn="ctr"/>
-            <a:r>
-              <a:rPr lang="en-US" sz="2800" b="1" dirty="0">
-                <a:solidFill>
-                  <a:schemeClr val="tx1"/>
-                </a:solidFill>
-              </a:rPr>
-              <a:t>B</a:t>
-            </a:r>
-            <a:endParaRPr lang="en-US" b="1" dirty="0">
-              <a:solidFill>
-                <a:schemeClr val="tx1"/>
-              </a:solidFill>
-            </a:endParaRPr>
-          </a:p>
-        </p:txBody>
-      </p:sp>
-      <p:sp>
-        <p:nvSpPr>
-          <p:cNvPr id="18" name="Rectangle 17">
-            <a:extLst>
-              <a:ext uri="{FF2B5EF4-FFF2-40B4-BE49-F238E27FC236}">
-                <a16:creationId xmlns:a16="http://schemas.microsoft.com/office/drawing/2014/main" id="{8B182DA0-52CD-F14E-A064-789A39327B64}"/>
-              </a:ext>
-            </a:extLst>
-          </p:cNvPr>
-          <p:cNvSpPr/>
-          <p:nvPr/>
-        </p:nvSpPr>
-        <p:spPr>
-          <a:xfrm>
-            <a:off x="6416739" y="5473153"/>
-            <a:ext cx="613540" cy="392794"/>
-          </a:xfrm>
-          <a:prstGeom prst="rect">
-            <a:avLst/>
-          </a:prstGeom>
-          <a:solidFill>
-            <a:schemeClr val="bg1"/>
-          </a:solidFill>
-          <a:ln>
-            <a:noFill/>
-          </a:ln>
-        </p:spPr>
-        <p:style>
-          <a:lnRef idx="2">
-            <a:schemeClr val="accent1">
-              <a:shade val="50000"/>
-            </a:schemeClr>
-          </a:lnRef>
-          <a:fillRef idx="1">
-            <a:schemeClr val="accent1"/>
-          </a:fillRef>
-          <a:effectRef idx="0">
-            <a:schemeClr val="accent1"/>
-          </a:effectRef>
-          <a:fontRef idx="minor">
-            <a:schemeClr val="lt1"/>
-          </a:fontRef>
-        </p:style>
-        <p:txBody>
-          <a:bodyPr rtlCol="0" anchor="ctr"/>
-          <a:lstStyle/>
-          <a:p>
-            <a:pPr algn="ctr"/>
-            <a:r>
-              <a:rPr lang="en-US" sz="2800" b="1" dirty="0">
-                <a:solidFill>
-                  <a:schemeClr val="tx1"/>
-                </a:solidFill>
-              </a:rPr>
-              <a:t>C</a:t>
-            </a:r>
-            <a:endParaRPr lang="en-US" b="1" dirty="0">
-              <a:solidFill>
-                <a:schemeClr val="tx1"/>
-              </a:solidFill>
-            </a:endParaRPr>
-          </a:p>
-        </p:txBody>
-      </p:sp>
-      <p:sp>
-        <p:nvSpPr>
-          <p:cNvPr id="19" name="Rectangle 18">
-            <a:extLst>
-              <a:ext uri="{FF2B5EF4-FFF2-40B4-BE49-F238E27FC236}">
-                <a16:creationId xmlns:a16="http://schemas.microsoft.com/office/drawing/2014/main" id="{C3991B48-CAD6-3B45-9058-D4B6799F4CF3}"/>
-              </a:ext>
-            </a:extLst>
-          </p:cNvPr>
-          <p:cNvSpPr/>
-          <p:nvPr/>
-        </p:nvSpPr>
-        <p:spPr>
-          <a:xfrm>
-            <a:off x="10611053" y="5369520"/>
-            <a:ext cx="613540" cy="392794"/>
-          </a:xfrm>
-          <a:prstGeom prst="rect">
-            <a:avLst/>
-          </a:prstGeom>
-          <a:solidFill>
-            <a:schemeClr val="bg1"/>
-          </a:solidFill>
-          <a:ln>
-            <a:noFill/>
-          </a:ln>
-        </p:spPr>
-        <p:style>
-          <a:lnRef idx="2">
-            <a:schemeClr val="accent1">
-              <a:shade val="50000"/>
-            </a:schemeClr>
-          </a:lnRef>
-          <a:fillRef idx="1">
-            <a:schemeClr val="accent1"/>
-          </a:fillRef>
-          <a:effectRef idx="0">
-            <a:schemeClr val="accent1"/>
-          </a:effectRef>
-          <a:fontRef idx="minor">
-            <a:schemeClr val="lt1"/>
-          </a:fontRef>
-        </p:style>
-        <p:txBody>
-          <a:bodyPr rtlCol="0" anchor="ctr"/>
-          <a:lstStyle/>
-          <a:p>
-            <a:pPr algn="ctr"/>
-            <a:r>
-              <a:rPr lang="en-US" sz="2800" b="1" dirty="0">
-                <a:solidFill>
-                  <a:schemeClr val="tx1"/>
-                </a:solidFill>
-              </a:rPr>
-              <a:t>D</a:t>
-            </a:r>
-            <a:endParaRPr lang="en-US" b="1" dirty="0">
-              <a:solidFill>
-                <a:schemeClr val="tx1"/>
-              </a:solidFill>
-            </a:endParaRPr>
-          </a:p>
-        </p:txBody>
-      </p:sp>
-      <p:sp>
-        <p:nvSpPr>
-          <p:cNvPr id="20" name="Rectangle 19">
-            <a:extLst>
-              <a:ext uri="{FF2B5EF4-FFF2-40B4-BE49-F238E27FC236}">
-                <a16:creationId xmlns:a16="http://schemas.microsoft.com/office/drawing/2014/main" id="{A73966B4-C814-5449-8741-2C42DD123299}"/>
-              </a:ext>
-            </a:extLst>
-          </p:cNvPr>
-          <p:cNvSpPr/>
-          <p:nvPr/>
-        </p:nvSpPr>
-        <p:spPr>
-          <a:xfrm>
-            <a:off x="6416739" y="6410197"/>
-            <a:ext cx="3346945" cy="392794"/>
-          </a:xfrm>
-          <a:prstGeom prst="rect">
-            <a:avLst/>
-          </a:prstGeom>
-          <a:solidFill>
-            <a:schemeClr val="bg1"/>
-          </a:solidFill>
-          <a:ln>
-            <a:noFill/>
-          </a:ln>
-        </p:spPr>
-        <p:style>
-          <a:lnRef idx="2">
-            <a:schemeClr val="accent1">
-              <a:shade val="50000"/>
-            </a:schemeClr>
-          </a:lnRef>
-          <a:fillRef idx="1">
-            <a:schemeClr val="accent1"/>
-          </a:fillRef>
-          <a:effectRef idx="0">
-            <a:schemeClr val="accent1"/>
-          </a:effectRef>
-          <a:fontRef idx="minor">
-            <a:schemeClr val="lt1"/>
-          </a:fontRef>
-        </p:style>
-        <p:txBody>
-          <a:bodyPr rtlCol="0" anchor="ctr"/>
-          <a:lstStyle/>
-          <a:p>
-            <a:pPr algn="ctr"/>
-            <a:r>
-              <a:rPr lang="en-US" sz="2800" b="1" dirty="0">
-                <a:solidFill>
-                  <a:schemeClr val="tx1"/>
-                </a:solidFill>
-              </a:rPr>
-              <a:t>E. None of these</a:t>
-            </a:r>
-            <a:endParaRPr lang="en-US" b="1" dirty="0">
-              <a:solidFill>
-                <a:schemeClr val="tx1"/>
-              </a:solidFill>
-            </a:endParaRPr>
-          </a:p>
-        </p:txBody>
-      </p:sp>
-      <p:pic>
-        <p:nvPicPr>
-          <p:cNvPr id="2" name="Picture 1">
-            <a:extLst>
-              <a:ext uri="{FF2B5EF4-FFF2-40B4-BE49-F238E27FC236}">
-                <a16:creationId xmlns:a16="http://schemas.microsoft.com/office/drawing/2014/main" id="{E73C463E-F1F2-6B40-9DD8-85A9282FFD21}"/>
-              </a:ext>
-            </a:extLst>
-          </p:cNvPr>
-          <p:cNvPicPr>
-            <a:picLocks noChangeAspect="1"/>
-          </p:cNvPicPr>
-          <p:nvPr/>
-        </p:nvPicPr>
-        <p:blipFill>
-          <a:blip r:embed="rId7"/>
-          <a:stretch>
-            <a:fillRect/>
-          </a:stretch>
-        </p:blipFill>
-        <p:spPr>
-          <a:xfrm>
-            <a:off x="902868" y="4152763"/>
-            <a:ext cx="2214435" cy="2257434"/>
+            <a:off x="4419600" y="1682109"/>
+            <a:ext cx="7772400" cy="3493782"/>
           </a:xfrm>
           <a:prstGeom prst="rect">
             <a:avLst/>
@@ -22062,7 +21095,7 @@
     </p:spTree>
     <p:extLst>
       <p:ext uri="{BB962C8B-B14F-4D97-AF65-F5344CB8AC3E}">
-        <p14:creationId xmlns:p14="http://schemas.microsoft.com/office/powerpoint/2010/main" val="2219935164"/>
+        <p14:creationId xmlns:p14="http://schemas.microsoft.com/office/powerpoint/2010/main" val="43427705"/>
       </p:ext>
     </p:extLst>
   </p:cSld>
@@ -22073,6 +21106,126 @@
 </file>
 
 <file path=ppt/slides/slide6.xml><?xml version="1.0" encoding="utf-8"?>
+<p:sld xmlns:a="http://schemas.openxmlformats.org/drawingml/2006/main" xmlns:r="http://schemas.openxmlformats.org/officeDocument/2006/relationships" xmlns:p="http://schemas.openxmlformats.org/presentationml/2006/main">
+  <p:cSld>
+    <p:spTree>
+      <p:nvGrpSpPr>
+        <p:cNvPr id="1" name=""/>
+        <p:cNvGrpSpPr/>
+        <p:nvPr/>
+      </p:nvGrpSpPr>
+      <p:grpSpPr>
+        <a:xfrm>
+          <a:off x="0" y="0"/>
+          <a:ext cx="0" cy="0"/>
+          <a:chOff x="0" y="0"/>
+          <a:chExt cx="0" cy="0"/>
+        </a:xfrm>
+      </p:grpSpPr>
+      <p:sp>
+        <p:nvSpPr>
+          <p:cNvPr id="2" name="Title 1">
+            <a:extLst>
+              <a:ext uri="{FF2B5EF4-FFF2-40B4-BE49-F238E27FC236}">
+                <a16:creationId xmlns:a16="http://schemas.microsoft.com/office/drawing/2014/main" id="{8A7AA672-F56C-2F41-B566-750991980C8A}"/>
+              </a:ext>
+            </a:extLst>
+          </p:cNvPr>
+          <p:cNvSpPr>
+            <a:spLocks noGrp="1"/>
+          </p:cNvSpPr>
+          <p:nvPr>
+            <p:ph type="title"/>
+          </p:nvPr>
+        </p:nvSpPr>
+        <p:spPr/>
+        <p:txBody>
+          <a:bodyPr/>
+          <a:lstStyle/>
+          <a:p>
+            <a:r>
+              <a:rPr lang="en-US" dirty="0"/>
+              <a:t>Some tips</a:t>
+            </a:r>
+          </a:p>
+        </p:txBody>
+      </p:sp>
+      <p:sp>
+        <p:nvSpPr>
+          <p:cNvPr id="3" name="Text Placeholder 2">
+            <a:extLst>
+              <a:ext uri="{FF2B5EF4-FFF2-40B4-BE49-F238E27FC236}">
+                <a16:creationId xmlns:a16="http://schemas.microsoft.com/office/drawing/2014/main" id="{95B2F8AE-4F06-1B49-B482-20CE10B4D010}"/>
+              </a:ext>
+            </a:extLst>
+          </p:cNvPr>
+          <p:cNvSpPr>
+            <a:spLocks noGrp="1"/>
+          </p:cNvSpPr>
+          <p:nvPr>
+            <p:ph type="body" idx="1"/>
+          </p:nvPr>
+        </p:nvSpPr>
+        <p:spPr/>
+        <p:txBody>
+          <a:bodyPr/>
+          <a:lstStyle/>
+          <a:p>
+            <a:r>
+              <a:rPr lang="en-US" dirty="0"/>
+              <a:t>Set up validation set(s) to match deployment scenarios (and constraints)</a:t>
+            </a:r>
+          </a:p>
+          <a:p>
+            <a:endParaRPr lang="en-US" dirty="0"/>
+          </a:p>
+          <a:p>
+            <a:r>
+              <a:rPr lang="en-US" dirty="0"/>
+              <a:t>Set up training set(s) any way we want but match data (both features and labels) available at training time</a:t>
+            </a:r>
+          </a:p>
+          <a:p>
+            <a:pPr lvl="1"/>
+            <a:r>
+              <a:rPr lang="en-US" dirty="0"/>
+              <a:t>Making sure labels are not censored based on label period</a:t>
+            </a:r>
+          </a:p>
+          <a:p>
+            <a:pPr lvl="1"/>
+            <a:r>
+              <a:rPr lang="en-US" dirty="0"/>
+              <a:t> Sampling (if helpful)</a:t>
+            </a:r>
+          </a:p>
+          <a:p>
+            <a:pPr lvl="1"/>
+            <a:r>
+              <a:rPr lang="en-US" dirty="0"/>
+              <a:t>Data collection and update lag</a:t>
+            </a:r>
+          </a:p>
+          <a:p>
+            <a:pPr lvl="1"/>
+            <a:endParaRPr lang="en-US" dirty="0"/>
+          </a:p>
+        </p:txBody>
+      </p:sp>
+    </p:spTree>
+    <p:extLst>
+      <p:ext uri="{BB962C8B-B14F-4D97-AF65-F5344CB8AC3E}">
+        <p14:creationId xmlns:p14="http://schemas.microsoft.com/office/powerpoint/2010/main" val="1958591717"/>
+      </p:ext>
+    </p:extLst>
+  </p:cSld>
+  <p:clrMapOvr>
+    <a:masterClrMapping/>
+  </p:clrMapOvr>
+</p:sld>
+</file>
+
+<file path=ppt/slides/slide7.xml><?xml version="1.0" encoding="utf-8"?>
 <p:sld xmlns:a="http://schemas.openxmlformats.org/drawingml/2006/main" xmlns:r="http://schemas.openxmlformats.org/officeDocument/2006/relationships" xmlns:p="http://schemas.openxmlformats.org/presentationml/2006/main">
   <p:cSld>
     <p:spTree>
@@ -22112,7 +21265,7 @@
           <a:p>
             <a:r>
               <a:rPr lang="en-US" dirty="0"/>
-              <a:t>PR-k Curve example</a:t>
+              <a:t>What We’ll Cover Today</a:t>
             </a:r>
           </a:p>
         </p:txBody>
@@ -22133,485 +21286,45 @@
             <p:ph type="body" idx="1"/>
           </p:nvPr>
         </p:nvSpPr>
-        <p:spPr>
-          <a:xfrm>
-            <a:off x="3962400" y="1536632"/>
-            <a:ext cx="7813900" cy="2279993"/>
-          </a:xfrm>
-        </p:spPr>
+        <p:spPr/>
         <p:txBody>
           <a:bodyPr/>
           <a:lstStyle/>
           <a:p>
-            <a:pPr marL="76200" indent="0">
-              <a:buNone/>
-            </a:pPr>
-            <a:r>
-              <a:rPr lang="en-US" sz="3200" dirty="0"/>
-              <a:t>For this example, what would the PR-k curve from a random model look like? What about from a perfect model?</a:t>
-            </a:r>
-          </a:p>
-        </p:txBody>
-      </p:sp>
-      <p:pic>
-        <p:nvPicPr>
-          <p:cNvPr id="5" name="Picture 2">
-            <a:extLst>
-              <a:ext uri="{FF2B5EF4-FFF2-40B4-BE49-F238E27FC236}">
-                <a16:creationId xmlns:a16="http://schemas.microsoft.com/office/drawing/2014/main" id="{A8EE1529-648D-3E45-BDB1-18C295D69920}"/>
-              </a:ext>
-            </a:extLst>
-          </p:cNvPr>
-          <p:cNvPicPr>
-            <a:picLocks noChangeAspect="1" noChangeArrowheads="1"/>
-          </p:cNvPicPr>
-          <p:nvPr/>
-        </p:nvPicPr>
-        <p:blipFill>
-          <a:blip r:embed="rId2">
-            <a:extLst>
-              <a:ext uri="{28A0092B-C50C-407E-A947-70E740481C1C}">
-                <a14:useLocalDpi xmlns:a14="http://schemas.microsoft.com/office/drawing/2010/main" val="0"/>
-              </a:ext>
-            </a:extLst>
-          </a:blip>
-          <a:srcRect/>
-          <a:stretch>
-            <a:fillRect/>
-          </a:stretch>
-        </p:blipFill>
-        <p:spPr bwMode="auto">
-          <a:xfrm>
-            <a:off x="102630" y="1484699"/>
-            <a:ext cx="3683000" cy="2603500"/>
-          </a:xfrm>
-          <a:prstGeom prst="rect">
-            <a:avLst/>
-          </a:prstGeom>
-          <a:noFill/>
-          <a:ln w="57150">
-            <a:solidFill>
-              <a:srgbClr val="7030A0"/>
-            </a:solidFill>
-          </a:ln>
-          <a:extLst>
-            <a:ext uri="{909E8E84-426E-40DD-AFC4-6F175D3DCCD1}">
-              <a14:hiddenFill xmlns:a14="http://schemas.microsoft.com/office/drawing/2010/main">
-                <a:solidFill>
-                  <a:srgbClr val="FFFFFF"/>
-                </a:solidFill>
-              </a14:hiddenFill>
-            </a:ext>
-          </a:extLst>
-        </p:spPr>
-      </p:pic>
-    </p:spTree>
-    <p:extLst>
-      <p:ext uri="{BB962C8B-B14F-4D97-AF65-F5344CB8AC3E}">
-        <p14:creationId xmlns:p14="http://schemas.microsoft.com/office/powerpoint/2010/main" val="4247683129"/>
-      </p:ext>
-    </p:extLst>
-  </p:cSld>
-  <p:clrMapOvr>
-    <a:masterClrMapping/>
-  </p:clrMapOvr>
-</p:sld>
-</file>
-
-<file path=ppt/slides/slide7.xml><?xml version="1.0" encoding="utf-8"?>
-<p:sld xmlns:a="http://schemas.openxmlformats.org/drawingml/2006/main" xmlns:r="http://schemas.openxmlformats.org/officeDocument/2006/relationships" xmlns:p="http://schemas.openxmlformats.org/presentationml/2006/main">
-  <p:cSld>
-    <p:spTree>
-      <p:nvGrpSpPr>
-        <p:cNvPr id="1" name=""/>
-        <p:cNvGrpSpPr/>
-        <p:nvPr/>
-      </p:nvGrpSpPr>
-      <p:grpSpPr>
-        <a:xfrm>
-          <a:off x="0" y="0"/>
-          <a:ext cx="0" cy="0"/>
-          <a:chOff x="0" y="0"/>
-          <a:chExt cx="0" cy="0"/>
-        </a:xfrm>
-      </p:grpSpPr>
-      <p:pic>
-        <p:nvPicPr>
-          <p:cNvPr id="1026" name="Picture 2" descr="img">
-            <a:extLst>
-              <a:ext uri="{FF2B5EF4-FFF2-40B4-BE49-F238E27FC236}">
-                <a16:creationId xmlns:a16="http://schemas.microsoft.com/office/drawing/2014/main" id="{B0366070-7513-EA4F-8DAA-A5F0BFA2D273}"/>
-              </a:ext>
-            </a:extLst>
-          </p:cNvPr>
-          <p:cNvPicPr>
-            <a:picLocks noChangeAspect="1" noChangeArrowheads="1"/>
-          </p:cNvPicPr>
-          <p:nvPr/>
-        </p:nvPicPr>
-        <p:blipFill rotWithShape="1">
-          <a:blip r:embed="rId2">
-            <a:extLst>
-              <a:ext uri="{28A0092B-C50C-407E-A947-70E740481C1C}">
-                <a14:useLocalDpi xmlns:a14="http://schemas.microsoft.com/office/drawing/2010/main" val="0"/>
-              </a:ext>
-            </a:extLst>
-          </a:blip>
-          <a:srcRect l="11856" t="9859" r="9516" b="10303"/>
-          <a:stretch/>
-        </p:blipFill>
-        <p:spPr bwMode="auto">
-          <a:xfrm>
-            <a:off x="4419600" y="995516"/>
-            <a:ext cx="7772402" cy="4866967"/>
-          </a:xfrm>
-          <a:prstGeom prst="rect">
-            <a:avLst/>
-          </a:prstGeom>
-          <a:noFill/>
-          <a:extLst>
-            <a:ext uri="{909E8E84-426E-40DD-AFC4-6F175D3DCCD1}">
-              <a14:hiddenFill xmlns:a14="http://schemas.microsoft.com/office/drawing/2010/main">
-                <a:solidFill>
-                  <a:srgbClr val="FFFFFF"/>
-                </a:solidFill>
-              </a14:hiddenFill>
-            </a:ext>
-          </a:extLst>
-        </p:spPr>
-      </p:pic>
-      <p:sp>
-        <p:nvSpPr>
-          <p:cNvPr id="4" name="TextBox 3">
-            <a:extLst>
-              <a:ext uri="{FF2B5EF4-FFF2-40B4-BE49-F238E27FC236}">
-                <a16:creationId xmlns:a16="http://schemas.microsoft.com/office/drawing/2014/main" id="{678E8A16-2F7F-9443-93CD-17932D868828}"/>
-              </a:ext>
-            </a:extLst>
-          </p:cNvPr>
-          <p:cNvSpPr txBox="1"/>
-          <p:nvPr/>
-        </p:nvSpPr>
-        <p:spPr>
-          <a:xfrm>
-            <a:off x="4572001" y="5979885"/>
-            <a:ext cx="7738016" cy="307777"/>
-          </a:xfrm>
-          <a:prstGeom prst="rect">
-            <a:avLst/>
-          </a:prstGeom>
-          <a:noFill/>
-        </p:spPr>
-        <p:txBody>
-          <a:bodyPr wrap="none" rtlCol="0">
-            <a:spAutoFit/>
-          </a:bodyPr>
-          <a:lstStyle/>
-          <a:p>
             <a:r>
               <a:rPr lang="en-US" dirty="0"/>
-              <a:t>2014                          2015                              2016                           2017                          2018</a:t>
+              <a:t>Feature Creation/Engineering</a:t>
             </a:r>
-          </a:p>
-        </p:txBody>
-      </p:sp>
-      <p:pic>
-        <p:nvPicPr>
-          <p:cNvPr id="5" name="Picture 4">
-            <a:extLst>
-              <a:ext uri="{FF2B5EF4-FFF2-40B4-BE49-F238E27FC236}">
-                <a16:creationId xmlns:a16="http://schemas.microsoft.com/office/drawing/2014/main" id="{E752B697-97D8-C045-A58D-BDC94728CEC5}"/>
-              </a:ext>
-            </a:extLst>
-          </p:cNvPr>
-          <p:cNvPicPr>
-            <a:picLocks noChangeAspect="1"/>
-          </p:cNvPicPr>
-          <p:nvPr/>
-        </p:nvPicPr>
-        <p:blipFill>
-          <a:blip r:embed="rId3"/>
-          <a:stretch>
-            <a:fillRect/>
-          </a:stretch>
-        </p:blipFill>
-        <p:spPr>
-          <a:xfrm>
-            <a:off x="0" y="1492249"/>
-            <a:ext cx="4419600" cy="3873500"/>
-          </a:xfrm>
-          <a:prstGeom prst="rect">
-            <a:avLst/>
-          </a:prstGeom>
-        </p:spPr>
-      </p:pic>
-      <p:sp>
-        <p:nvSpPr>
-          <p:cNvPr id="6" name="Text Placeholder 2">
-            <a:extLst>
-              <a:ext uri="{FF2B5EF4-FFF2-40B4-BE49-F238E27FC236}">
-                <a16:creationId xmlns:a16="http://schemas.microsoft.com/office/drawing/2014/main" id="{5A2B6EAB-BB36-1C44-B96D-264CD7B51325}"/>
-              </a:ext>
-            </a:extLst>
-          </p:cNvPr>
-          <p:cNvSpPr txBox="1">
-            <a:spLocks/>
-          </p:cNvSpPr>
-          <p:nvPr/>
-        </p:nvSpPr>
-        <p:spPr>
-          <a:xfrm>
-            <a:off x="53790" y="107581"/>
-            <a:ext cx="7813900" cy="570338"/>
-          </a:xfrm>
-          <a:prstGeom prst="rect">
-            <a:avLst/>
-          </a:prstGeom>
-        </p:spPr>
-        <p:txBody>
-          <a:bodyPr/>
-          <a:lstStyle>
-            <a:defPPr marR="0" lvl="0" algn="l" rtl="0">
-              <a:lnSpc>
-                <a:spcPct val="100000"/>
-              </a:lnSpc>
-              <a:spcBef>
-                <a:spcPts val="0"/>
-              </a:spcBef>
-              <a:spcAft>
-                <a:spcPts val="0"/>
-              </a:spcAft>
-            </a:defPPr>
-            <a:lvl1pPr marR="0" lvl="0" algn="l" rtl="0">
-              <a:lnSpc>
-                <a:spcPct val="100000"/>
-              </a:lnSpc>
-              <a:spcBef>
-                <a:spcPts val="0"/>
-              </a:spcBef>
-              <a:spcAft>
-                <a:spcPts val="0"/>
-              </a:spcAft>
-              <a:buClr>
-                <a:srgbClr val="000000"/>
-              </a:buClr>
-              <a:buFont typeface="Arial"/>
-              <a:defRPr sz="1400" b="0" i="0" u="none" strike="noStrike" cap="none">
-                <a:solidFill>
-                  <a:srgbClr val="000000"/>
-                </a:solidFill>
-                <a:latin typeface="Arial"/>
-                <a:ea typeface="Arial"/>
-                <a:cs typeface="Arial"/>
-                <a:sym typeface="Arial"/>
-              </a:defRPr>
-            </a:lvl1pPr>
-            <a:lvl2pPr marR="0" lvl="1" algn="l" rtl="0">
-              <a:lnSpc>
-                <a:spcPct val="100000"/>
-              </a:lnSpc>
-              <a:spcBef>
-                <a:spcPts val="0"/>
-              </a:spcBef>
-              <a:spcAft>
-                <a:spcPts val="0"/>
-              </a:spcAft>
-              <a:buClr>
-                <a:srgbClr val="000000"/>
-              </a:buClr>
-              <a:buFont typeface="Arial"/>
-              <a:defRPr sz="1400" b="0" i="0" u="none" strike="noStrike" cap="none">
-                <a:solidFill>
-                  <a:srgbClr val="000000"/>
-                </a:solidFill>
-                <a:latin typeface="Arial"/>
-                <a:ea typeface="Arial"/>
-                <a:cs typeface="Arial"/>
-                <a:sym typeface="Arial"/>
-              </a:defRPr>
-            </a:lvl2pPr>
-            <a:lvl3pPr marR="0" lvl="2" algn="l" rtl="0">
-              <a:lnSpc>
-                <a:spcPct val="100000"/>
-              </a:lnSpc>
-              <a:spcBef>
-                <a:spcPts val="0"/>
-              </a:spcBef>
-              <a:spcAft>
-                <a:spcPts val="0"/>
-              </a:spcAft>
-              <a:buClr>
-                <a:srgbClr val="000000"/>
-              </a:buClr>
-              <a:buFont typeface="Arial"/>
-              <a:defRPr sz="1400" b="0" i="0" u="none" strike="noStrike" cap="none">
-                <a:solidFill>
-                  <a:srgbClr val="000000"/>
-                </a:solidFill>
-                <a:latin typeface="Arial"/>
-                <a:ea typeface="Arial"/>
-                <a:cs typeface="Arial"/>
-                <a:sym typeface="Arial"/>
-              </a:defRPr>
-            </a:lvl3pPr>
-            <a:lvl4pPr marR="0" lvl="3" algn="l" rtl="0">
-              <a:lnSpc>
-                <a:spcPct val="100000"/>
-              </a:lnSpc>
-              <a:spcBef>
-                <a:spcPts val="0"/>
-              </a:spcBef>
-              <a:spcAft>
-                <a:spcPts val="0"/>
-              </a:spcAft>
-              <a:buClr>
-                <a:srgbClr val="000000"/>
-              </a:buClr>
-              <a:buFont typeface="Arial"/>
-              <a:defRPr sz="1400" b="0" i="0" u="none" strike="noStrike" cap="none">
-                <a:solidFill>
-                  <a:srgbClr val="000000"/>
-                </a:solidFill>
-                <a:latin typeface="Arial"/>
-                <a:ea typeface="Arial"/>
-                <a:cs typeface="Arial"/>
-                <a:sym typeface="Arial"/>
-              </a:defRPr>
-            </a:lvl4pPr>
-            <a:lvl5pPr marR="0" lvl="4" algn="l" rtl="0">
-              <a:lnSpc>
-                <a:spcPct val="100000"/>
-              </a:lnSpc>
-              <a:spcBef>
-                <a:spcPts val="0"/>
-              </a:spcBef>
-              <a:spcAft>
-                <a:spcPts val="0"/>
-              </a:spcAft>
-              <a:buClr>
-                <a:srgbClr val="000000"/>
-              </a:buClr>
-              <a:buFont typeface="Arial"/>
-              <a:defRPr sz="1400" b="0" i="0" u="none" strike="noStrike" cap="none">
-                <a:solidFill>
-                  <a:srgbClr val="000000"/>
-                </a:solidFill>
-                <a:latin typeface="Arial"/>
-                <a:ea typeface="Arial"/>
-                <a:cs typeface="Arial"/>
-                <a:sym typeface="Arial"/>
-              </a:defRPr>
-            </a:lvl5pPr>
-            <a:lvl6pPr marR="0" lvl="5" algn="l" rtl="0">
-              <a:lnSpc>
-                <a:spcPct val="100000"/>
-              </a:lnSpc>
-              <a:spcBef>
-                <a:spcPts val="0"/>
-              </a:spcBef>
-              <a:spcAft>
-                <a:spcPts val="0"/>
-              </a:spcAft>
-              <a:buClr>
-                <a:srgbClr val="000000"/>
-              </a:buClr>
-              <a:buFont typeface="Arial"/>
-              <a:defRPr sz="1400" b="0" i="0" u="none" strike="noStrike" cap="none">
-                <a:solidFill>
-                  <a:srgbClr val="000000"/>
-                </a:solidFill>
-                <a:latin typeface="Arial"/>
-                <a:ea typeface="Arial"/>
-                <a:cs typeface="Arial"/>
-                <a:sym typeface="Arial"/>
-              </a:defRPr>
-            </a:lvl6pPr>
-            <a:lvl7pPr marR="0" lvl="6" algn="l" rtl="0">
-              <a:lnSpc>
-                <a:spcPct val="100000"/>
-              </a:lnSpc>
-              <a:spcBef>
-                <a:spcPts val="0"/>
-              </a:spcBef>
-              <a:spcAft>
-                <a:spcPts val="0"/>
-              </a:spcAft>
-              <a:buClr>
-                <a:srgbClr val="000000"/>
-              </a:buClr>
-              <a:buFont typeface="Arial"/>
-              <a:defRPr sz="1400" b="0" i="0" u="none" strike="noStrike" cap="none">
-                <a:solidFill>
-                  <a:srgbClr val="000000"/>
-                </a:solidFill>
-                <a:latin typeface="Arial"/>
-                <a:ea typeface="Arial"/>
-                <a:cs typeface="Arial"/>
-                <a:sym typeface="Arial"/>
-              </a:defRPr>
-            </a:lvl7pPr>
-            <a:lvl8pPr marR="0" lvl="7" algn="l" rtl="0">
-              <a:lnSpc>
-                <a:spcPct val="100000"/>
-              </a:lnSpc>
-              <a:spcBef>
-                <a:spcPts val="0"/>
-              </a:spcBef>
-              <a:spcAft>
-                <a:spcPts val="0"/>
-              </a:spcAft>
-              <a:buClr>
-                <a:srgbClr val="000000"/>
-              </a:buClr>
-              <a:buFont typeface="Arial"/>
-              <a:defRPr sz="1400" b="0" i="0" u="none" strike="noStrike" cap="none">
-                <a:solidFill>
-                  <a:srgbClr val="000000"/>
-                </a:solidFill>
-                <a:latin typeface="Arial"/>
-                <a:ea typeface="Arial"/>
-                <a:cs typeface="Arial"/>
-                <a:sym typeface="Arial"/>
-              </a:defRPr>
-            </a:lvl8pPr>
-            <a:lvl9pPr marR="0" lvl="8" algn="l" rtl="0">
-              <a:lnSpc>
-                <a:spcPct val="100000"/>
-              </a:lnSpc>
-              <a:spcBef>
-                <a:spcPts val="0"/>
-              </a:spcBef>
-              <a:spcAft>
-                <a:spcPts val="0"/>
-              </a:spcAft>
-              <a:buClr>
-                <a:srgbClr val="000000"/>
-              </a:buClr>
-              <a:buFont typeface="Arial"/>
-              <a:defRPr sz="1400" b="0" i="0" u="none" strike="noStrike" cap="none">
-                <a:solidFill>
-                  <a:srgbClr val="000000"/>
-                </a:solidFill>
-                <a:latin typeface="Arial"/>
-                <a:ea typeface="Arial"/>
-                <a:cs typeface="Arial"/>
-                <a:sym typeface="Arial"/>
-              </a:defRPr>
-            </a:lvl9pPr>
-          </a:lstStyle>
-          <a:p>
-            <a:pPr marL="76200"/>
+            <a:br>
+              <a:rPr lang="en-US" dirty="0"/>
+            </a:br>
+            <a:endParaRPr lang="en-US" dirty="0"/>
+          </a:p>
+          <a:p>
             <a:r>
-              <a:rPr lang="en-US" sz="3200" dirty="0"/>
-              <a:t>Reminder: Splitting Time with Triage</a:t>
+              <a:rPr lang="en-US" dirty="0"/>
+              <a:t>Introducing Bias in Feature Development</a:t>
             </a:r>
+            <a:br>
+              <a:rPr lang="en-US" dirty="0"/>
+            </a:br>
+            <a:endParaRPr lang="en-US" dirty="0"/>
+          </a:p>
+          <a:p>
+            <a:r>
+              <a:rPr lang="en-US" dirty="0"/>
+              <a:t>Dealing with Missing Data</a:t>
+            </a:r>
+          </a:p>
+          <a:p>
+            <a:endParaRPr lang="en-US" dirty="0"/>
           </a:p>
         </p:txBody>
       </p:sp>
     </p:spTree>
     <p:extLst>
       <p:ext uri="{BB962C8B-B14F-4D97-AF65-F5344CB8AC3E}">
-        <p14:creationId xmlns:p14="http://schemas.microsoft.com/office/powerpoint/2010/main" val="43427705"/>
+        <p14:creationId xmlns:p14="http://schemas.microsoft.com/office/powerpoint/2010/main" val="1721185332"/>
       </p:ext>
     </p:extLst>
   </p:cSld>
@@ -22640,13 +21353,7 @@
       </p:grpSpPr>
       <p:sp>
         <p:nvSpPr>
-          <p:cNvPr id="2" name="Title 1">
-            <a:extLst>
-              <a:ext uri="{FF2B5EF4-FFF2-40B4-BE49-F238E27FC236}">
-                <a16:creationId xmlns:a16="http://schemas.microsoft.com/office/drawing/2014/main" id="{94CF2A94-A63F-6149-AA28-2E35B60E3D3E}"/>
-              </a:ext>
-            </a:extLst>
-          </p:cNvPr>
+          <p:cNvPr id="3" name="Title 2"/>
           <p:cNvSpPr>
             <a:spLocks noGrp="1"/>
           </p:cNvSpPr>
@@ -22659,88 +21366,72 @@
           <a:bodyPr/>
           <a:lstStyle/>
           <a:p>
-            <a:endParaRPr lang="en-US"/>
+            <a:r>
+              <a:rPr lang="en-US" dirty="0"/>
+              <a:t>Why do we care?</a:t>
+            </a:r>
           </a:p>
         </p:txBody>
       </p:sp>
-      <p:graphicFrame>
-        <p:nvGraphicFramePr>
-          <p:cNvPr id="3" name="Diagram 2">
-            <a:extLst>
-              <a:ext uri="{FF2B5EF4-FFF2-40B4-BE49-F238E27FC236}">
-                <a16:creationId xmlns:a16="http://schemas.microsoft.com/office/drawing/2014/main" id="{8E902576-68A9-6E48-B0FE-5B1889953DC8}"/>
-              </a:ext>
-            </a:extLst>
-          </p:cNvPr>
-          <p:cNvGraphicFramePr/>
-          <p:nvPr/>
-        </p:nvGraphicFramePr>
-        <p:xfrm>
-          <a:off x="180467" y="0"/>
-          <a:ext cx="11776400" cy="6858000"/>
-        </p:xfrm>
-        <a:graphic>
-          <a:graphicData uri="http://schemas.openxmlformats.org/drawingml/2006/diagram">
-            <dgm:relIds xmlns:dgm="http://schemas.openxmlformats.org/drawingml/2006/diagram" xmlns:r="http://schemas.openxmlformats.org/officeDocument/2006/relationships" r:dm="rId2" r:lo="rId3" r:qs="rId4" r:cs="rId5"/>
-          </a:graphicData>
-        </a:graphic>
-      </p:graphicFrame>
       <p:sp>
         <p:nvSpPr>
-          <p:cNvPr id="4" name="Rectangle 3">
-            <a:extLst>
-              <a:ext uri="{FF2B5EF4-FFF2-40B4-BE49-F238E27FC236}">
-                <a16:creationId xmlns:a16="http://schemas.microsoft.com/office/drawing/2014/main" id="{E2C99BF2-C81A-5246-89D3-E49BCDCAD699}"/>
-              </a:ext>
-            </a:extLst>
-          </p:cNvPr>
-          <p:cNvSpPr/>
-          <p:nvPr/>
+          <p:cNvPr id="2" name="Content Placeholder 1"/>
+          <p:cNvSpPr>
+            <a:spLocks noGrp="1"/>
+          </p:cNvSpPr>
+          <p:nvPr>
+            <p:ph type="body" idx="1"/>
+          </p:nvPr>
         </p:nvSpPr>
-        <p:spPr>
-          <a:xfrm>
-            <a:off x="9553197" y="260501"/>
-            <a:ext cx="2534195" cy="1789611"/>
-          </a:xfrm>
-          <a:prstGeom prst="rect">
-            <a:avLst/>
-          </a:prstGeom>
-          <a:noFill/>
-          <a:ln w="76200">
-            <a:solidFill>
-              <a:srgbClr val="C00000"/>
-            </a:solidFill>
-          </a:ln>
-        </p:spPr>
-        <p:style>
-          <a:lnRef idx="2">
-            <a:schemeClr val="accent1">
-              <a:shade val="50000"/>
-            </a:schemeClr>
-          </a:lnRef>
-          <a:fillRef idx="1">
-            <a:schemeClr val="accent1"/>
-          </a:fillRef>
-          <a:effectRef idx="0">
-            <a:schemeClr val="accent1"/>
-          </a:effectRef>
-          <a:fontRef idx="minor">
-            <a:schemeClr val="lt1"/>
-          </a:fontRef>
-        </p:style>
+        <p:spPr/>
         <p:txBody>
-          <a:bodyPr rtlCol="0" anchor="ctr"/>
+          <a:bodyPr>
+            <a:normAutofit/>
+          </a:bodyPr>
           <a:lstStyle/>
           <a:p>
-            <a:pPr algn="ctr"/>
-            <a:endParaRPr lang="en-US"/>
+            <a:r>
+              <a:rPr lang="en-US" dirty="0"/>
+              <a:t>Features are hints/rules of thumb you give your model</a:t>
+            </a:r>
+          </a:p>
+          <a:p>
+            <a:pPr lvl="1"/>
+            <a:r>
+              <a:rPr lang="en-US" sz="2000" dirty="0"/>
+              <a:t>Encoding domain knowledge and context for the model to use</a:t>
+            </a:r>
+          </a:p>
+          <a:p>
+            <a:endParaRPr lang="en-US" dirty="0"/>
+          </a:p>
+          <a:p>
+            <a:r>
+              <a:rPr lang="en-US" dirty="0"/>
+              <a:t>Feature generation is a critical part of the machine learning modeling process, especially with structured data.</a:t>
+            </a:r>
+          </a:p>
+          <a:p>
+            <a:endParaRPr lang="en-US" dirty="0"/>
+          </a:p>
+          <a:p>
+            <a:r>
+              <a:rPr lang="en-US" dirty="0"/>
+              <a:t>Complexity in features may allow us to use less complex models that are faster to run, easier to understand and easier to maintain.</a:t>
+            </a:r>
+          </a:p>
+          <a:p>
+            <a:endParaRPr lang="en-US" dirty="0"/>
+          </a:p>
+          <a:p>
+            <a:endParaRPr lang="en-US" dirty="0"/>
           </a:p>
         </p:txBody>
       </p:sp>
     </p:spTree>
     <p:extLst>
       <p:ext uri="{BB962C8B-B14F-4D97-AF65-F5344CB8AC3E}">
-        <p14:creationId xmlns:p14="http://schemas.microsoft.com/office/powerpoint/2010/main" val="71354461"/>
+        <p14:creationId xmlns:p14="http://schemas.microsoft.com/office/powerpoint/2010/main" val="837826461"/>
       </p:ext>
     </p:extLst>
   </p:cSld>
@@ -22769,13 +21460,7 @@
       </p:grpSpPr>
       <p:sp>
         <p:nvSpPr>
-          <p:cNvPr id="2" name="Title 1">
-            <a:extLst>
-              <a:ext uri="{FF2B5EF4-FFF2-40B4-BE49-F238E27FC236}">
-                <a16:creationId xmlns:a16="http://schemas.microsoft.com/office/drawing/2014/main" id="{21359BA9-BA2B-D148-89DA-A99081B1FF81}"/>
-              </a:ext>
-            </a:extLst>
-          </p:cNvPr>
+          <p:cNvPr id="3" name="Title 2"/>
           <p:cNvSpPr>
             <a:spLocks noGrp="1"/>
           </p:cNvSpPr>
@@ -22790,20 +21475,14 @@
           <a:p>
             <a:r>
               <a:rPr lang="en-US" dirty="0"/>
-              <a:t>What We’ll Cover Today</a:t>
+              <a:t>Practical Pointers</a:t>
             </a:r>
           </a:p>
         </p:txBody>
       </p:sp>
       <p:sp>
         <p:nvSpPr>
-          <p:cNvPr id="3" name="Text Placeholder 2">
-            <a:extLst>
-              <a:ext uri="{FF2B5EF4-FFF2-40B4-BE49-F238E27FC236}">
-                <a16:creationId xmlns:a16="http://schemas.microsoft.com/office/drawing/2014/main" id="{DDA03E0F-5F3D-5B4D-8232-BF72B84A198E}"/>
-              </a:ext>
-            </a:extLst>
-          </p:cNvPr>
+          <p:cNvPr id="2" name="Content Placeholder 1"/>
           <p:cNvSpPr>
             <a:spLocks noGrp="1"/>
           </p:cNvSpPr>
@@ -22813,12 +21492,41 @@
         </p:nvSpPr>
         <p:spPr/>
         <p:txBody>
-          <a:bodyPr/>
+          <a:bodyPr>
+            <a:normAutofit/>
+          </a:bodyPr>
           <a:lstStyle/>
           <a:p>
             <a:r>
               <a:rPr lang="en-US" dirty="0"/>
-              <a:t>Feature Creation/Engineering</a:t>
+              <a:t>When generating a feature, what did you know and </a:t>
+            </a:r>
+            <a:r>
+              <a:rPr lang="en-US" b="1" u="sng" dirty="0"/>
+              <a:t>when</a:t>
+            </a:r>
+            <a:r>
+              <a:rPr lang="en-US" dirty="0"/>
+              <a:t> did you know it?</a:t>
+            </a:r>
+          </a:p>
+          <a:p>
+            <a:pPr lvl="1"/>
+            <a:r>
+              <a:rPr lang="en-US" dirty="0"/>
+              <a:t>You can only create features from information available </a:t>
+            </a:r>
+            <a:r>
+              <a:rPr lang="en-US" sz="3200" b="1" dirty="0">
+                <a:solidFill>
+                  <a:srgbClr val="FF0000"/>
+                </a:solidFill>
+              </a:rPr>
+              <a:t>before</a:t>
+            </a:r>
+            <a:r>
+              <a:rPr lang="en-US" dirty="0"/>
+              <a:t> the “training” date for a given row</a:t>
             </a:r>
             <a:br>
               <a:rPr lang="en-US" dirty="0"/>
@@ -22828,17 +21536,7 @@
           <a:p>
             <a:r>
               <a:rPr lang="en-US" dirty="0"/>
-              <a:t>Introducing Bias in Feature Development</a:t>
-            </a:r>
-            <a:br>
-              <a:rPr lang="en-US" dirty="0"/>
-            </a:br>
-            <a:endParaRPr lang="en-US" dirty="0"/>
-          </a:p>
-          <a:p>
-            <a:r>
-              <a:rPr lang="en-US" dirty="0"/>
-              <a:t>Dealing with Missing Data</a:t>
+              <a:t>Domain/expert knowledge and prior research in the field can help a lot!</a:t>
             </a:r>
           </a:p>
           <a:p>
@@ -22849,7 +21547,7 @@
     </p:spTree>
     <p:extLst>
       <p:ext uri="{BB962C8B-B14F-4D97-AF65-F5344CB8AC3E}">
-        <p14:creationId xmlns:p14="http://schemas.microsoft.com/office/powerpoint/2010/main" val="1721185332"/>
+        <p14:creationId xmlns:p14="http://schemas.microsoft.com/office/powerpoint/2010/main" val="4045032903"/>
       </p:ext>
     </p:extLst>
   </p:cSld>

--- a/Lectures/12-features-and-imputation.pptx
+++ b/Lectures/12-features-and-imputation.pptx
@@ -16536,7 +16536,7 @@
 </file>
 
 <file path=ppt/slides/slide16.xml><?xml version="1.0" encoding="utf-8"?>
-<p:sld xmlns:a="http://schemas.openxmlformats.org/drawingml/2006/main" xmlns:r="http://schemas.openxmlformats.org/officeDocument/2006/relationships" xmlns:p="http://schemas.openxmlformats.org/presentationml/2006/main">
+<p:sld xmlns:a="http://schemas.openxmlformats.org/drawingml/2006/main" xmlns:r="http://schemas.openxmlformats.org/officeDocument/2006/relationships" xmlns:p="http://schemas.openxmlformats.org/presentationml/2006/main" show="0">
   <p:cSld>
     <p:spTree>
       <p:nvGrpSpPr>

--- a/Lectures/12-features-and-imputation.pptx
+++ b/Lectures/12-features-and-imputation.pptx
@@ -5,7 +5,7 @@
     <p:sldMasterId id="2147483648" r:id="rId1"/>
   </p:sldMasterIdLst>
   <p:notesMasterIdLst>
-    <p:notesMasterId r:id="rId39"/>
+    <p:notesMasterId r:id="rId46"/>
   </p:notesMasterIdLst>
   <p:sldIdLst>
     <p:sldId id="256" r:id="rId2"/>
@@ -25,26 +25,33 @@
     <p:sldId id="503" r:id="rId16"/>
     <p:sldId id="478" r:id="rId17"/>
     <p:sldId id="502" r:id="rId18"/>
-    <p:sldId id="500" r:id="rId19"/>
-    <p:sldId id="501" r:id="rId20"/>
-    <p:sldId id="300" r:id="rId21"/>
-    <p:sldId id="302" r:id="rId22"/>
-    <p:sldId id="304" r:id="rId23"/>
-    <p:sldId id="277" r:id="rId24"/>
-    <p:sldId id="278" r:id="rId25"/>
-    <p:sldId id="280" r:id="rId26"/>
-    <p:sldId id="279" r:id="rId27"/>
-    <p:sldId id="306" r:id="rId28"/>
-    <p:sldId id="310" r:id="rId29"/>
-    <p:sldId id="312" r:id="rId30"/>
-    <p:sldId id="313" r:id="rId31"/>
-    <p:sldId id="317" r:id="rId32"/>
-    <p:sldId id="314" r:id="rId33"/>
-    <p:sldId id="316" r:id="rId34"/>
-    <p:sldId id="315" r:id="rId35"/>
-    <p:sldId id="322" r:id="rId36"/>
-    <p:sldId id="473" r:id="rId37"/>
-    <p:sldId id="504" r:id="rId38"/>
+    <p:sldId id="522" r:id="rId19"/>
+    <p:sldId id="524" r:id="rId20"/>
+    <p:sldId id="525" r:id="rId21"/>
+    <p:sldId id="526" r:id="rId22"/>
+    <p:sldId id="514" r:id="rId23"/>
+    <p:sldId id="541" r:id="rId24"/>
+    <p:sldId id="542" r:id="rId25"/>
+    <p:sldId id="513" r:id="rId26"/>
+    <p:sldId id="515" r:id="rId27"/>
+    <p:sldId id="300" r:id="rId28"/>
+    <p:sldId id="302" r:id="rId29"/>
+    <p:sldId id="304" r:id="rId30"/>
+    <p:sldId id="277" r:id="rId31"/>
+    <p:sldId id="278" r:id="rId32"/>
+    <p:sldId id="280" r:id="rId33"/>
+    <p:sldId id="279" r:id="rId34"/>
+    <p:sldId id="306" r:id="rId35"/>
+    <p:sldId id="310" r:id="rId36"/>
+    <p:sldId id="312" r:id="rId37"/>
+    <p:sldId id="313" r:id="rId38"/>
+    <p:sldId id="317" r:id="rId39"/>
+    <p:sldId id="314" r:id="rId40"/>
+    <p:sldId id="316" r:id="rId41"/>
+    <p:sldId id="315" r:id="rId42"/>
+    <p:sldId id="322" r:id="rId43"/>
+    <p:sldId id="473" r:id="rId44"/>
+    <p:sldId id="504" r:id="rId45"/>
   </p:sldIdLst>
   <p:sldSz cx="12192000" cy="6858000"/>
   <p:notesSz cx="6858000" cy="9144000"/>
@@ -282,7 +289,7 @@
       <p15:sldGuideLst xmlns:p15="http://schemas.microsoft.com/office/powerpoint/2012/main"/>
     </p:ext>
     <p:ext uri="http://customooxmlschemas.google.com/">
-      <go:slidesCustomData xmlns:go="http://customooxmlschemas.google.com/" xmlns:p15="http://schemas.microsoft.com/office/powerpoint/2012/main" xmlns:p14="http://schemas.microsoft.com/office/powerpoint/2010/main" xmlns:com="http://schemas.openxmlformats.org/drawingml/2006/compatibility" xmlns:pvml="urn:schemas-microsoft-com:office:powerpoint" xmlns:v="urn:schemas-microsoft-com:vml" xmlns:o="urn:schemas-microsoft-com:office:office" xmlns:dgm="http://schemas.openxmlformats.org/drawingml/2006/diagram" xmlns:c="http://schemas.openxmlformats.org/drawingml/2006/chart" xmlns:mv="urn:schemas-microsoft-com:mac:vml" xmlns:mc="http://schemas.openxmlformats.org/markup-compatibility/2006" xmlns="" r:id="rId42" roundtripDataSignature="AMtx7mjFyVUGRZWio+dc9dxzYsimUxNJbg=="/>
+      <go:slidesCustomData xmlns="" xmlns:mc="http://schemas.openxmlformats.org/markup-compatibility/2006" xmlns:mv="urn:schemas-microsoft-com:mac:vml" xmlns:c="http://schemas.openxmlformats.org/drawingml/2006/chart" xmlns:dgm="http://schemas.openxmlformats.org/drawingml/2006/diagram" xmlns:o="urn:schemas-microsoft-com:office:office" xmlns:v="urn:schemas-microsoft-com:vml" xmlns:pvml="urn:schemas-microsoft-com:office:powerpoint" xmlns:com="http://schemas.openxmlformats.org/drawingml/2006/compatibility" xmlns:p14="http://schemas.microsoft.com/office/powerpoint/2010/main" xmlns:p15="http://schemas.microsoft.com/office/powerpoint/2012/main" xmlns:go="http://customooxmlschemas.google.com/" r:id="rId47" roundtripDataSignature="AMtx7mjFyVUGRZWio+dc9dxzYsimUxNJbg=="/>
     </p:ext>
   </p:extLst>
 </p:presentation>
@@ -17022,7 +17029,7 @@
           <a:p>
             <a:r>
               <a:rPr lang="en-US" dirty="0"/>
-              <a:t>Features in triage: Collate</a:t>
+              <a:t>Features in triage</a:t>
             </a:r>
           </a:p>
         </p:txBody>
@@ -17050,7 +17057,7 @@
           <a:p>
             <a:r>
               <a:rPr lang="en-US" dirty="0"/>
-              <a:t>All features are temporal aggregates, reflecting nature of data</a:t>
+              <a:t>All features are temporal aggregates, reflecting the nature of the data we typically get. Even gender, race, etc. can be a function of time (but may not be captured as such sometimes)</a:t>
             </a:r>
             <a:br>
               <a:rPr lang="en-US" dirty="0"/>
@@ -17060,7 +17067,7 @@
           <a:p>
             <a:r>
               <a:rPr lang="en-US" dirty="0"/>
-              <a:t>Need to specify what you’re using and when it was known</a:t>
+              <a:t>Need to specify what data you’re using and when that information was known</a:t>
             </a:r>
             <a:br>
               <a:rPr lang="en-US" dirty="0"/>
@@ -17120,6 +17127,239 @@
           <p:cNvPr id="2" name="Title 1">
             <a:extLst>
               <a:ext uri="{FF2B5EF4-FFF2-40B4-BE49-F238E27FC236}">
+                <a16:creationId xmlns:a16="http://schemas.microsoft.com/office/drawing/2014/main" id="{FA2B515F-3878-52E2-AA26-BCC798D1978F}"/>
+              </a:ext>
+            </a:extLst>
+          </p:cNvPr>
+          <p:cNvSpPr>
+            <a:spLocks noGrp="1"/>
+          </p:cNvSpPr>
+          <p:nvPr>
+            <p:ph type="title"/>
+          </p:nvPr>
+        </p:nvSpPr>
+        <p:spPr/>
+        <p:txBody>
+          <a:bodyPr/>
+          <a:lstStyle/>
+          <a:p>
+            <a:r>
+              <a:rPr lang="en-US" dirty="0"/>
+              <a:t>Features in triage</a:t>
+            </a:r>
+          </a:p>
+        </p:txBody>
+      </p:sp>
+      <p:sp>
+        <p:nvSpPr>
+          <p:cNvPr id="3" name="Text Placeholder 2">
+            <a:extLst>
+              <a:ext uri="{FF2B5EF4-FFF2-40B4-BE49-F238E27FC236}">
+                <a16:creationId xmlns:a16="http://schemas.microsoft.com/office/drawing/2014/main" id="{A6BB8DCB-9E7D-FB3A-93C3-39AF7ABA193D}"/>
+              </a:ext>
+            </a:extLst>
+          </p:cNvPr>
+          <p:cNvSpPr>
+            <a:spLocks noGrp="1"/>
+          </p:cNvSpPr>
+          <p:nvPr>
+            <p:ph type="body" idx="1"/>
+          </p:nvPr>
+        </p:nvSpPr>
+        <p:spPr/>
+        <p:txBody>
+          <a:bodyPr/>
+          <a:lstStyle/>
+          <a:p>
+            <a:r>
+              <a:rPr lang="en-US" dirty="0"/>
+              <a:t>Features get defined in blocks (</a:t>
+            </a:r>
+            <a:r>
+              <a:rPr lang="en-US" dirty="0">
+                <a:solidFill>
+                  <a:srgbClr val="FF0000"/>
+                </a:solidFill>
+              </a:rPr>
+              <a:t>feature groups</a:t>
+            </a:r>
+            <a:r>
+              <a:rPr lang="en-US" dirty="0"/>
+              <a:t>) – each feature group comes from a data source (called </a:t>
+            </a:r>
+            <a:r>
+              <a:rPr lang="en-US" dirty="0" err="1">
+                <a:solidFill>
+                  <a:srgbClr val="FF0000"/>
+                </a:solidFill>
+              </a:rPr>
+              <a:t>from_obj</a:t>
+            </a:r>
+            <a:r>
+              <a:rPr lang="en-US" dirty="0">
+                <a:solidFill>
+                  <a:srgbClr val="FF0000"/>
+                </a:solidFill>
+              </a:rPr>
+              <a:t> </a:t>
+            </a:r>
+            <a:r>
+              <a:rPr lang="en-US" dirty="0">
+                <a:sym typeface="Wingdings" pitchFamily="2" charset="2"/>
+              </a:rPr>
+              <a:t>and all features in that feature group share a </a:t>
+            </a:r>
+            <a:r>
+              <a:rPr lang="en-US" dirty="0">
+                <a:solidFill>
+                  <a:srgbClr val="FF0000"/>
+                </a:solidFill>
+                <a:sym typeface="Wingdings" pitchFamily="2" charset="2"/>
+              </a:rPr>
+              <a:t>prefix</a:t>
+            </a:r>
+            <a:endParaRPr lang="en-US" dirty="0"/>
+          </a:p>
+          <a:p>
+            <a:endParaRPr lang="en-US" dirty="0"/>
+          </a:p>
+          <a:p>
+            <a:r>
+              <a:rPr lang="en-US" dirty="0" err="1">
+                <a:solidFill>
+                  <a:srgbClr val="FF0000"/>
+                </a:solidFill>
+              </a:rPr>
+              <a:t>from_obj</a:t>
+            </a:r>
+            <a:r>
+              <a:rPr lang="en-US" dirty="0">
+                <a:solidFill>
+                  <a:srgbClr val="FF0000"/>
+                </a:solidFill>
+              </a:rPr>
+              <a:t> : </a:t>
+            </a:r>
+            <a:r>
+              <a:rPr lang="en-US" dirty="0">
+                <a:sym typeface="Wingdings" pitchFamily="2" charset="2"/>
+              </a:rPr>
+              <a:t>can be a table or </a:t>
+            </a:r>
+            <a:r>
+              <a:rPr lang="en-US" dirty="0" err="1">
+                <a:sym typeface="Wingdings" pitchFamily="2" charset="2"/>
+              </a:rPr>
+              <a:t>sql</a:t>
+            </a:r>
+            <a:r>
+              <a:rPr lang="en-US" dirty="0">
+                <a:sym typeface="Wingdings" pitchFamily="2" charset="2"/>
+              </a:rPr>
+              <a:t> query </a:t>
+            </a:r>
+            <a:r>
+              <a:rPr lang="en-US" dirty="0"/>
+              <a:t>and needs a field for </a:t>
+            </a:r>
+            <a:r>
+              <a:rPr lang="en-US" dirty="0" err="1">
+                <a:solidFill>
+                  <a:srgbClr val="FF0000"/>
+                </a:solidFill>
+              </a:rPr>
+              <a:t>entity_id</a:t>
+            </a:r>
+            <a:r>
+              <a:rPr lang="en-US" dirty="0">
+                <a:solidFill>
+                  <a:srgbClr val="FF0000"/>
+                </a:solidFill>
+              </a:rPr>
+              <a:t> </a:t>
+            </a:r>
+            <a:r>
+              <a:rPr lang="en-US" dirty="0"/>
+              <a:t>and a </a:t>
+            </a:r>
+            <a:r>
+              <a:rPr lang="en-US" dirty="0" err="1">
+                <a:solidFill>
+                  <a:srgbClr val="FF0000"/>
+                </a:solidFill>
+              </a:rPr>
+              <a:t>knowledge_date_column</a:t>
+            </a:r>
+            <a:r>
+              <a:rPr lang="en-US" dirty="0">
+                <a:solidFill>
+                  <a:srgbClr val="FF0000"/>
+                </a:solidFill>
+              </a:rPr>
+              <a:t> </a:t>
+            </a:r>
+            <a:r>
+              <a:rPr lang="en-US" dirty="0">
+                <a:solidFill>
+                  <a:schemeClr val="tx1"/>
+                </a:solidFill>
+              </a:rPr>
+              <a:t>field</a:t>
+            </a:r>
+            <a:r>
+              <a:rPr lang="en-US" dirty="0">
+                <a:solidFill>
+                  <a:srgbClr val="FF0000"/>
+                </a:solidFill>
+              </a:rPr>
+              <a:t> </a:t>
+            </a:r>
+            <a:r>
+              <a:rPr lang="en-US" dirty="0"/>
+              <a:t>that specifies when that event happened </a:t>
+            </a:r>
+            <a:br>
+              <a:rPr lang="en-US" dirty="0"/>
+            </a:br>
+            <a:endParaRPr lang="en-US" dirty="0"/>
+          </a:p>
+        </p:txBody>
+      </p:sp>
+    </p:spTree>
+    <p:extLst>
+      <p:ext uri="{BB962C8B-B14F-4D97-AF65-F5344CB8AC3E}">
+        <p14:creationId xmlns:p14="http://schemas.microsoft.com/office/powerpoint/2010/main" val="827233646"/>
+      </p:ext>
+    </p:extLst>
+  </p:cSld>
+  <p:clrMapOvr>
+    <a:masterClrMapping/>
+  </p:clrMapOvr>
+</p:sld>
+</file>
+
+<file path=ppt/slides/slide19.xml><?xml version="1.0" encoding="utf-8"?>
+<p:sld xmlns:a="http://schemas.openxmlformats.org/drawingml/2006/main" xmlns:r="http://schemas.openxmlformats.org/officeDocument/2006/relationships" xmlns:p="http://schemas.openxmlformats.org/presentationml/2006/main">
+  <p:cSld>
+    <p:spTree>
+      <p:nvGrpSpPr>
+        <p:cNvPr id="1" name=""/>
+        <p:cNvGrpSpPr/>
+        <p:nvPr/>
+      </p:nvGrpSpPr>
+      <p:grpSpPr>
+        <a:xfrm>
+          <a:off x="0" y="0"/>
+          <a:ext cx="0" cy="0"/>
+          <a:chOff x="0" y="0"/>
+          <a:chExt cx="0" cy="0"/>
+        </a:xfrm>
+      </p:grpSpPr>
+      <p:sp>
+        <p:nvSpPr>
+          <p:cNvPr id="2" name="Title 1">
+            <a:extLst>
+              <a:ext uri="{FF2B5EF4-FFF2-40B4-BE49-F238E27FC236}">
                 <a16:creationId xmlns:a16="http://schemas.microsoft.com/office/drawing/2014/main" id="{98347210-B4BE-4047-93B4-3D7AA966D0F1}"/>
               </a:ext>
             </a:extLst>
@@ -17138,7 +17378,7 @@
           <a:p>
             <a:r>
               <a:rPr lang="en-US" dirty="0"/>
-              <a:t>Features in triage: Collate</a:t>
+              <a:t>Features in triage – aggregate features</a:t>
             </a:r>
           </a:p>
         </p:txBody>
@@ -17155,18 +17395,17 @@
           <p:cNvPicPr preferRelativeResize="0"/>
           <p:nvPr/>
         </p:nvPicPr>
-        <p:blipFill>
+        <p:blipFill rotWithShape="1">
           <a:blip r:embed="rId2">
             <a:alphaModFix/>
           </a:blip>
-          <a:stretch>
-            <a:fillRect/>
-          </a:stretch>
+          <a:srcRect b="11517"/>
+          <a:stretch/>
         </p:blipFill>
         <p:spPr>
           <a:xfrm>
             <a:off x="268552" y="1475202"/>
-            <a:ext cx="5464983" cy="5071236"/>
+            <a:ext cx="5464983" cy="4487187"/>
           </a:xfrm>
           <a:prstGeom prst="rect">
             <a:avLst/>
@@ -17191,8 +17430,8 @@
         </p:nvSpPr>
         <p:spPr>
           <a:xfrm>
-            <a:off x="5870067" y="2525206"/>
-            <a:ext cx="2575500" cy="694500"/>
+            <a:off x="5870066" y="2615359"/>
+            <a:ext cx="4877265" cy="694500"/>
           </a:xfrm>
           <a:prstGeom prst="rect">
             <a:avLst/>
@@ -17218,13 +17457,31 @@
               <a:buNone/>
             </a:pPr>
             <a:r>
+              <a:rPr lang="en-US" sz="2000" b="1" dirty="0">
+                <a:latin typeface="Calibri"/>
+                <a:ea typeface="Calibri"/>
+                <a:cs typeface="Calibri"/>
+                <a:sym typeface="Calibri"/>
+              </a:rPr>
+              <a:t>I</a:t>
+            </a:r>
+            <a:r>
+              <a:rPr lang="en" sz="2000" b="1" dirty="0" err="1">
+                <a:latin typeface="Calibri"/>
+                <a:ea typeface="Calibri"/>
+                <a:cs typeface="Calibri"/>
+                <a:sym typeface="Calibri"/>
+              </a:rPr>
+              <a:t>mputation</a:t>
+            </a:r>
+            <a:r>
               <a:rPr lang="en" sz="2000" b="1" dirty="0">
                 <a:latin typeface="Calibri"/>
                 <a:ea typeface="Calibri"/>
                 <a:cs typeface="Calibri"/>
                 <a:sym typeface="Calibri"/>
               </a:rPr>
-              <a:t>Several options for missing data</a:t>
+              <a:t> method for missing data  - default for this group (each feature can override this)</a:t>
             </a:r>
             <a:endParaRPr sz="2000" b="1" dirty="0">
               <a:latin typeface="Calibri"/>
@@ -17280,14 +17537,13 @@
           </p:cNvPr>
           <p:cNvCxnSpPr>
             <a:cxnSpLocks/>
-            <a:stCxn id="10" idx="1"/>
           </p:cNvCxnSpPr>
           <p:nvPr/>
         </p:nvCxnSpPr>
         <p:spPr>
           <a:xfrm flipH="1">
-            <a:off x="3361038" y="2014434"/>
-            <a:ext cx="2509029" cy="438403"/>
+            <a:off x="3361038" y="1863678"/>
+            <a:ext cx="2524896" cy="589159"/>
           </a:xfrm>
           <a:prstGeom prst="straightConnector1">
             <a:avLst/>
@@ -17318,8 +17574,8 @@
         </p:nvSpPr>
         <p:spPr>
           <a:xfrm>
-            <a:off x="5870067" y="1777584"/>
-            <a:ext cx="2826900" cy="473700"/>
+            <a:off x="5907642" y="1690334"/>
+            <a:ext cx="5914629" cy="473700"/>
           </a:xfrm>
           <a:prstGeom prst="rect">
             <a:avLst/>
@@ -17345,15 +17601,15 @@
               <a:buNone/>
             </a:pPr>
             <a:r>
-              <a:rPr lang="en" sz="2000" b="1">
+              <a:rPr lang="en" sz="2000" b="1" dirty="0">
                 <a:latin typeface="Calibri"/>
                 <a:ea typeface="Calibri"/>
                 <a:cs typeface="Calibri"/>
                 <a:sym typeface="Calibri"/>
               </a:rPr>
-              <a:t>Table or SQL snippet</a:t>
-            </a:r>
-            <a:endParaRPr sz="2000" b="1">
+              <a:t>Table or SQL snippet (used to generate the feature)</a:t>
+            </a:r>
+            <a:endParaRPr sz="2000" b="1" dirty="0">
               <a:latin typeface="Calibri"/>
               <a:ea typeface="Calibri"/>
               <a:cs typeface="Calibri"/>
@@ -17410,8 +17666,8 @@
         </p:nvSpPr>
         <p:spPr>
           <a:xfrm>
-            <a:off x="5870066" y="3515384"/>
-            <a:ext cx="2843165" cy="694500"/>
+            <a:off x="5893167" y="3756488"/>
+            <a:ext cx="5952205" cy="694500"/>
           </a:xfrm>
           <a:prstGeom prst="rect">
             <a:avLst/>
@@ -17443,33 +17699,7 @@
                 <a:cs typeface="Calibri"/>
                 <a:sym typeface="Calibri"/>
               </a:rPr>
-              <a:t>Column or SQL snippet</a:t>
-            </a:r>
-            <a:endParaRPr sz="2000" b="1" dirty="0">
-              <a:latin typeface="Calibri"/>
-              <a:ea typeface="Calibri"/>
-              <a:cs typeface="Calibri"/>
-              <a:sym typeface="Calibri"/>
-            </a:endParaRPr>
-          </a:p>
-          <a:p>
-            <a:pPr marL="0" lvl="0" indent="0" algn="l" rtl="0">
-              <a:spcBef>
-                <a:spcPts val="0"/>
-              </a:spcBef>
-              <a:spcAft>
-                <a:spcPts val="0"/>
-              </a:spcAft>
-              <a:buNone/>
-            </a:pPr>
-            <a:r>
-              <a:rPr lang="en" sz="2000" b="1" dirty="0">
-                <a:latin typeface="Calibri"/>
-                <a:ea typeface="Calibri"/>
-                <a:cs typeface="Calibri"/>
-                <a:sym typeface="Calibri"/>
-              </a:rPr>
-              <a:t>and aggregation function</a:t>
+              <a:t>Column or SQL snippet and aggregation function</a:t>
             </a:r>
             <a:endParaRPr sz="2000" b="1" dirty="0">
               <a:latin typeface="Calibri"/>
@@ -17526,8 +17756,8 @@
         </p:nvSpPr>
         <p:spPr>
           <a:xfrm>
-            <a:off x="6121467" y="5129452"/>
-            <a:ext cx="2575500" cy="694500"/>
+            <a:off x="6121467" y="5219605"/>
+            <a:ext cx="4625864" cy="694500"/>
           </a:xfrm>
           <a:prstGeom prst="rect">
             <a:avLst/>
@@ -17559,7 +17789,7 @@
                 <a:cs typeface="Calibri"/>
                 <a:sym typeface="Calibri"/>
               </a:rPr>
-              <a:t>Time frames for aggregation</a:t>
+              <a:t>Historical time periods for aggregation</a:t>
             </a:r>
             <a:endParaRPr sz="2000" b="1" dirty="0">
               <a:latin typeface="Calibri"/>
@@ -17570,10 +17800,247 @@
           </a:p>
         </p:txBody>
       </p:sp>
+      <p:cxnSp>
+        <p:nvCxnSpPr>
+          <p:cNvPr id="3" name="Google Shape;364;p31">
+            <a:extLst>
+              <a:ext uri="{FF2B5EF4-FFF2-40B4-BE49-F238E27FC236}">
+                <a16:creationId xmlns:a16="http://schemas.microsoft.com/office/drawing/2014/main" id="{DA00C2C9-7609-72F9-9410-0951CD83E500}"/>
+              </a:ext>
+            </a:extLst>
+          </p:cNvPr>
+          <p:cNvCxnSpPr>
+            <a:cxnSpLocks/>
+            <a:stCxn id="4" idx="1"/>
+          </p:cNvCxnSpPr>
+          <p:nvPr/>
+        </p:nvCxnSpPr>
+        <p:spPr>
+          <a:xfrm flipH="1">
+            <a:off x="3519814" y="2432351"/>
+            <a:ext cx="2502652" cy="388476"/>
+          </a:xfrm>
+          <a:prstGeom prst="straightConnector1">
+            <a:avLst/>
+          </a:prstGeom>
+          <a:noFill/>
+          <a:ln w="38100" cap="flat" cmpd="sng">
+            <a:solidFill>
+              <a:srgbClr val="000000"/>
+            </a:solidFill>
+            <a:prstDash val="solid"/>
+            <a:round/>
+            <a:headEnd type="none" w="med" len="med"/>
+            <a:tailEnd type="triangle" w="med" len="med"/>
+          </a:ln>
+        </p:spPr>
+      </p:cxnSp>
+      <p:sp>
+        <p:nvSpPr>
+          <p:cNvPr id="4" name="Google Shape;365;p31">
+            <a:extLst>
+              <a:ext uri="{FF2B5EF4-FFF2-40B4-BE49-F238E27FC236}">
+                <a16:creationId xmlns:a16="http://schemas.microsoft.com/office/drawing/2014/main" id="{C6D82868-2F1A-CB80-4B39-3E052700179B}"/>
+              </a:ext>
+            </a:extLst>
+          </p:cNvPr>
+          <p:cNvSpPr txBox="1"/>
+          <p:nvPr/>
+        </p:nvSpPr>
+        <p:spPr>
+          <a:xfrm>
+            <a:off x="6022466" y="2195501"/>
+            <a:ext cx="5753833" cy="473700"/>
+          </a:xfrm>
+          <a:prstGeom prst="rect">
+            <a:avLst/>
+          </a:prstGeom>
+          <a:noFill/>
+          <a:ln>
+            <a:noFill/>
+          </a:ln>
+        </p:spPr>
+        <p:txBody>
+          <a:bodyPr spcFirstLastPara="1" wrap="square" lIns="91425" tIns="91425" rIns="91425" bIns="91425" anchor="t" anchorCtr="0">
+            <a:noAutofit/>
+          </a:bodyPr>
+          <a:lstStyle/>
+          <a:p>
+            <a:pPr marL="0" lvl="0" indent="0" algn="l" rtl="0">
+              <a:spcBef>
+                <a:spcPts val="0"/>
+              </a:spcBef>
+              <a:spcAft>
+                <a:spcPts val="0"/>
+              </a:spcAft>
+              <a:buNone/>
+            </a:pPr>
+            <a:r>
+              <a:rPr lang="en-US" sz="2000" b="1" dirty="0">
+                <a:latin typeface="Calibri"/>
+                <a:ea typeface="Calibri"/>
+                <a:cs typeface="Calibri"/>
+                <a:sym typeface="Calibri"/>
+              </a:rPr>
+              <a:t>D</a:t>
+            </a:r>
+            <a:r>
+              <a:rPr lang="en" sz="2000" b="1" dirty="0">
+                <a:latin typeface="Calibri"/>
+                <a:ea typeface="Calibri"/>
+                <a:cs typeface="Calibri"/>
+                <a:sym typeface="Calibri"/>
+              </a:rPr>
+              <a:t>ate field specifying when the event happened</a:t>
+            </a:r>
+            <a:endParaRPr sz="2000" b="1" dirty="0">
+              <a:latin typeface="Calibri"/>
+              <a:ea typeface="Calibri"/>
+              <a:cs typeface="Calibri"/>
+              <a:sym typeface="Calibri"/>
+            </a:endParaRPr>
+          </a:p>
+        </p:txBody>
+      </p:sp>
+      <p:cxnSp>
+        <p:nvCxnSpPr>
+          <p:cNvPr id="20" name="Google Shape;364;p31">
+            <a:extLst>
+              <a:ext uri="{FF2B5EF4-FFF2-40B4-BE49-F238E27FC236}">
+                <a16:creationId xmlns:a16="http://schemas.microsoft.com/office/drawing/2014/main" id="{6892F1CB-BB4D-7097-9601-98FB5F183972}"/>
+              </a:ext>
+            </a:extLst>
+          </p:cNvPr>
+          <p:cNvCxnSpPr>
+            <a:cxnSpLocks/>
+          </p:cNvCxnSpPr>
+          <p:nvPr/>
+        </p:nvCxnSpPr>
+        <p:spPr>
+          <a:xfrm flipH="1">
+            <a:off x="2931090" y="1453084"/>
+            <a:ext cx="3000307" cy="785263"/>
+          </a:xfrm>
+          <a:prstGeom prst="straightConnector1">
+            <a:avLst/>
+          </a:prstGeom>
+          <a:noFill/>
+          <a:ln w="38100" cap="flat" cmpd="sng">
+            <a:solidFill>
+              <a:srgbClr val="000000"/>
+            </a:solidFill>
+            <a:prstDash val="solid"/>
+            <a:round/>
+            <a:headEnd type="none" w="med" len="med"/>
+            <a:tailEnd type="triangle" w="med" len="med"/>
+          </a:ln>
+        </p:spPr>
+      </p:cxnSp>
+      <p:sp>
+        <p:nvSpPr>
+          <p:cNvPr id="21" name="Google Shape;365;p31">
+            <a:extLst>
+              <a:ext uri="{FF2B5EF4-FFF2-40B4-BE49-F238E27FC236}">
+                <a16:creationId xmlns:a16="http://schemas.microsoft.com/office/drawing/2014/main" id="{8BA77B62-0726-1750-30BE-B242BB5FDC58}"/>
+              </a:ext>
+            </a:extLst>
+          </p:cNvPr>
+          <p:cNvSpPr txBox="1"/>
+          <p:nvPr/>
+        </p:nvSpPr>
+        <p:spPr>
+          <a:xfrm>
+            <a:off x="5953105" y="1279740"/>
+            <a:ext cx="5914629" cy="473700"/>
+          </a:xfrm>
+          <a:prstGeom prst="rect">
+            <a:avLst/>
+          </a:prstGeom>
+          <a:noFill/>
+          <a:ln>
+            <a:noFill/>
+          </a:ln>
+        </p:spPr>
+        <p:txBody>
+          <a:bodyPr spcFirstLastPara="1" wrap="square" lIns="91425" tIns="91425" rIns="91425" bIns="91425" anchor="t" anchorCtr="0">
+            <a:noAutofit/>
+          </a:bodyPr>
+          <a:lstStyle/>
+          <a:p>
+            <a:pPr marL="0" lvl="0" indent="0" algn="l" rtl="0">
+              <a:spcBef>
+                <a:spcPts val="0"/>
+              </a:spcBef>
+              <a:spcAft>
+                <a:spcPts val="0"/>
+              </a:spcAft>
+              <a:buNone/>
+            </a:pPr>
+            <a:r>
+              <a:rPr lang="en-US" sz="2000" b="1" dirty="0">
+                <a:latin typeface="Calibri"/>
+                <a:ea typeface="Calibri"/>
+                <a:cs typeface="Calibri"/>
+                <a:sym typeface="Calibri"/>
+              </a:rPr>
+              <a:t>Naming P</a:t>
+            </a:r>
+            <a:r>
+              <a:rPr lang="en" sz="2000" b="1" dirty="0">
+                <a:latin typeface="Calibri"/>
+                <a:ea typeface="Calibri"/>
+                <a:cs typeface="Calibri"/>
+                <a:sym typeface="Calibri"/>
+              </a:rPr>
+              <a:t>refix shared by all the features in this group </a:t>
+            </a:r>
+            <a:endParaRPr sz="2000" b="1" dirty="0">
+              <a:latin typeface="Calibri"/>
+              <a:ea typeface="Calibri"/>
+              <a:cs typeface="Calibri"/>
+              <a:sym typeface="Calibri"/>
+            </a:endParaRPr>
+          </a:p>
+        </p:txBody>
+      </p:sp>
+      <p:cxnSp>
+        <p:nvCxnSpPr>
+          <p:cNvPr id="23" name="Google Shape;366;p31">
+            <a:extLst>
+              <a:ext uri="{FF2B5EF4-FFF2-40B4-BE49-F238E27FC236}">
+                <a16:creationId xmlns:a16="http://schemas.microsoft.com/office/drawing/2014/main" id="{82FC41AB-5924-E2D6-0960-C95A7C0DE1B1}"/>
+              </a:ext>
+            </a:extLst>
+          </p:cNvPr>
+          <p:cNvCxnSpPr>
+            <a:cxnSpLocks/>
+          </p:cNvCxnSpPr>
+          <p:nvPr/>
+        </p:nvCxnSpPr>
+        <p:spPr>
+          <a:xfrm flipH="1">
+            <a:off x="2329841" y="3897959"/>
+            <a:ext cx="3601556" cy="1231493"/>
+          </a:xfrm>
+          <a:prstGeom prst="straightConnector1">
+            <a:avLst/>
+          </a:prstGeom>
+          <a:noFill/>
+          <a:ln w="38100" cap="flat" cmpd="sng">
+            <a:solidFill>
+              <a:srgbClr val="000000"/>
+            </a:solidFill>
+            <a:prstDash val="solid"/>
+            <a:round/>
+            <a:headEnd type="none" w="med" len="med"/>
+            <a:tailEnd type="triangle" w="med" len="med"/>
+          </a:ln>
+        </p:spPr>
+      </p:cxnSp>
     </p:spTree>
     <p:extLst>
       <p:ext uri="{BB962C8B-B14F-4D97-AF65-F5344CB8AC3E}">
-        <p14:creationId xmlns:p14="http://schemas.microsoft.com/office/powerpoint/2010/main" val="1940963158"/>
+        <p14:creationId xmlns:p14="http://schemas.microsoft.com/office/powerpoint/2010/main" val="710217128"/>
       </p:ext>
     </p:extLst>
   </p:cSld>
@@ -17583,7 +18050,136 @@
 </p:sld>
 </file>
 
-<file path=ppt/slides/slide19.xml><?xml version="1.0" encoding="utf-8"?>
+<file path=ppt/slides/slide2.xml><?xml version="1.0" encoding="utf-8"?>
+<p:sld xmlns:a="http://schemas.openxmlformats.org/drawingml/2006/main" xmlns:r="http://schemas.openxmlformats.org/officeDocument/2006/relationships" xmlns:p="http://schemas.openxmlformats.org/presentationml/2006/main">
+  <p:cSld>
+    <p:spTree>
+      <p:nvGrpSpPr>
+        <p:cNvPr id="1" name=""/>
+        <p:cNvGrpSpPr/>
+        <p:nvPr/>
+      </p:nvGrpSpPr>
+      <p:grpSpPr>
+        <a:xfrm>
+          <a:off x="0" y="0"/>
+          <a:ext cx="0" cy="0"/>
+          <a:chOff x="0" y="0"/>
+          <a:chExt cx="0" cy="0"/>
+        </a:xfrm>
+      </p:grpSpPr>
+      <p:sp>
+        <p:nvSpPr>
+          <p:cNvPr id="2" name="Title 1">
+            <a:extLst>
+              <a:ext uri="{FF2B5EF4-FFF2-40B4-BE49-F238E27FC236}">
+                <a16:creationId xmlns:a16="http://schemas.microsoft.com/office/drawing/2014/main" id="{94CF2A94-A63F-6149-AA28-2E35B60E3D3E}"/>
+              </a:ext>
+            </a:extLst>
+          </p:cNvPr>
+          <p:cNvSpPr>
+            <a:spLocks noGrp="1"/>
+          </p:cNvSpPr>
+          <p:nvPr>
+            <p:ph type="title"/>
+          </p:nvPr>
+        </p:nvSpPr>
+        <p:spPr/>
+        <p:txBody>
+          <a:bodyPr/>
+          <a:lstStyle/>
+          <a:p>
+            <a:endParaRPr lang="en-US"/>
+          </a:p>
+        </p:txBody>
+      </p:sp>
+      <p:graphicFrame>
+        <p:nvGraphicFramePr>
+          <p:cNvPr id="3" name="Diagram 2">
+            <a:extLst>
+              <a:ext uri="{FF2B5EF4-FFF2-40B4-BE49-F238E27FC236}">
+                <a16:creationId xmlns:a16="http://schemas.microsoft.com/office/drawing/2014/main" id="{8E902576-68A9-6E48-B0FE-5B1889953DC8}"/>
+              </a:ext>
+            </a:extLst>
+          </p:cNvPr>
+          <p:cNvGraphicFramePr/>
+          <p:nvPr/>
+        </p:nvGraphicFramePr>
+        <p:xfrm>
+          <a:off x="180467" y="0"/>
+          <a:ext cx="11776400" cy="6858000"/>
+        </p:xfrm>
+        <a:graphic>
+          <a:graphicData uri="http://schemas.openxmlformats.org/drawingml/2006/diagram">
+            <dgm:relIds xmlns:dgm="http://schemas.openxmlformats.org/drawingml/2006/diagram" xmlns:r="http://schemas.openxmlformats.org/officeDocument/2006/relationships" r:dm="rId3" r:lo="rId4" r:qs="rId5" r:cs="rId6"/>
+          </a:graphicData>
+        </a:graphic>
+      </p:graphicFrame>
+      <p:sp>
+        <p:nvSpPr>
+          <p:cNvPr id="4" name="Rectangle 3">
+            <a:extLst>
+              <a:ext uri="{FF2B5EF4-FFF2-40B4-BE49-F238E27FC236}">
+                <a16:creationId xmlns:a16="http://schemas.microsoft.com/office/drawing/2014/main" id="{E2C99BF2-C81A-5246-89D3-E49BCDCAD699}"/>
+              </a:ext>
+            </a:extLst>
+          </p:cNvPr>
+          <p:cNvSpPr/>
+          <p:nvPr/>
+        </p:nvSpPr>
+        <p:spPr>
+          <a:xfrm>
+            <a:off x="9553197" y="115748"/>
+            <a:ext cx="2534195" cy="4208008"/>
+          </a:xfrm>
+          <a:prstGeom prst="rect">
+            <a:avLst/>
+          </a:prstGeom>
+          <a:noFill/>
+          <a:ln w="76200">
+            <a:solidFill>
+              <a:srgbClr val="C00000"/>
+            </a:solidFill>
+          </a:ln>
+        </p:spPr>
+        <p:style>
+          <a:lnRef idx="2">
+            <a:schemeClr val="accent1">
+              <a:shade val="50000"/>
+            </a:schemeClr>
+          </a:lnRef>
+          <a:fillRef idx="1">
+            <a:schemeClr val="accent1"/>
+          </a:fillRef>
+          <a:effectRef idx="0">
+            <a:schemeClr val="accent1"/>
+          </a:effectRef>
+          <a:fontRef idx="minor">
+            <a:schemeClr val="lt1"/>
+          </a:fontRef>
+        </p:style>
+        <p:txBody>
+          <a:bodyPr rtlCol="0" anchor="ctr"/>
+          <a:lstStyle/>
+          <a:p>
+            <a:pPr algn="ctr"/>
+            <a:endParaRPr lang="en-US"/>
+          </a:p>
+        </p:txBody>
+      </p:sp>
+    </p:spTree>
+    <p:extLst>
+      <p:ext uri="{BB962C8B-B14F-4D97-AF65-F5344CB8AC3E}">
+        <p14:creationId xmlns:p14="http://schemas.microsoft.com/office/powerpoint/2010/main" val="3141728949"/>
+      </p:ext>
+    </p:extLst>
+  </p:cSld>
+  <p:clrMapOvr>
+    <a:masterClrMapping/>
+  </p:clrMapOvr>
+</p:sld>
+</file>
+
+<file path=ppt/slides/slide20.xml><?xml version="1.0" encoding="utf-8"?>
 <p:sld xmlns:a="http://schemas.openxmlformats.org/drawingml/2006/main" xmlns:r="http://schemas.openxmlformats.org/officeDocument/2006/relationships" xmlns:p="http://schemas.openxmlformats.org/presentationml/2006/main">
   <p:cSld>
     <p:spTree>
@@ -17623,7 +18219,7 @@
           <a:p>
             <a:r>
               <a:rPr lang="en-US" dirty="0"/>
-              <a:t>Features in triage: Collate</a:t>
+              <a:t>Features in triage: Categorical features</a:t>
             </a:r>
           </a:p>
         </p:txBody>
@@ -17640,18 +18236,17 @@
           <p:cNvPicPr preferRelativeResize="0"/>
           <p:nvPr/>
         </p:nvPicPr>
-        <p:blipFill>
+        <p:blipFill rotWithShape="1">
           <a:blip r:embed="rId2">
             <a:alphaModFix/>
           </a:blip>
-          <a:stretch>
-            <a:fillRect/>
-          </a:stretch>
+          <a:srcRect b="12282"/>
+          <a:stretch/>
         </p:blipFill>
         <p:spPr>
           <a:xfrm>
             <a:off x="160638" y="1469856"/>
-            <a:ext cx="4868561" cy="5007339"/>
+            <a:ext cx="4868561" cy="4392325"/>
           </a:xfrm>
           <a:prstGeom prst="rect">
             <a:avLst/>
@@ -17802,8 +18397,8 @@
         </p:nvSpPr>
         <p:spPr>
           <a:xfrm>
-            <a:off x="5262595" y="3751331"/>
-            <a:ext cx="3016432" cy="694500"/>
+            <a:off x="5262594" y="3751331"/>
+            <a:ext cx="5735257" cy="694500"/>
           </a:xfrm>
           <a:prstGeom prst="rect">
             <a:avLst/>
@@ -17835,7 +18430,40 @@
                 <a:cs typeface="Calibri"/>
                 <a:sym typeface="Calibri"/>
               </a:rPr>
-              <a:t>Specify categorical values by hand or query</a:t>
+              <a:t>Specify categorical values as a list or through a query (such as </a:t>
+            </a:r>
+            <a:r>
+              <a:rPr lang="en" sz="2000" dirty="0">
+                <a:solidFill>
+                  <a:srgbClr val="FF0000"/>
+                </a:solidFill>
+                <a:latin typeface="Calibri"/>
+                <a:ea typeface="Calibri"/>
+                <a:cs typeface="Calibri"/>
+                <a:sym typeface="Calibri"/>
+              </a:rPr>
+              <a:t>select distinct value from </a:t>
+            </a:r>
+            <a:r>
+              <a:rPr lang="en" sz="2000" dirty="0" err="1">
+                <a:solidFill>
+                  <a:srgbClr val="FF0000"/>
+                </a:solidFill>
+                <a:latin typeface="Calibri"/>
+                <a:ea typeface="Calibri"/>
+                <a:cs typeface="Calibri"/>
+                <a:sym typeface="Calibri"/>
+              </a:rPr>
+              <a:t>tablename</a:t>
+            </a:r>
+            <a:r>
+              <a:rPr lang="en" sz="2000" b="1" dirty="0">
+                <a:latin typeface="Calibri"/>
+                <a:ea typeface="Calibri"/>
+                <a:cs typeface="Calibri"/>
+                <a:sym typeface="Calibri"/>
+              </a:rPr>
+              <a:t>)</a:t>
             </a:r>
             <a:endParaRPr sz="2000" b="1" dirty="0">
               <a:latin typeface="Calibri"/>
@@ -17849,7 +18477,7 @@
     </p:spTree>
     <p:extLst>
       <p:ext uri="{BB962C8B-B14F-4D97-AF65-F5344CB8AC3E}">
-        <p14:creationId xmlns:p14="http://schemas.microsoft.com/office/powerpoint/2010/main" val="3980843704"/>
+        <p14:creationId xmlns:p14="http://schemas.microsoft.com/office/powerpoint/2010/main" val="2799543076"/>
       </p:ext>
     </p:extLst>
   </p:cSld>
@@ -17859,7 +18487,7 @@
 </p:sld>
 </file>
 
-<file path=ppt/slides/slide2.xml><?xml version="1.0" encoding="utf-8"?>
+<file path=ppt/slides/slide21.xml><?xml version="1.0" encoding="utf-8"?>
 <p:sld xmlns:a="http://schemas.openxmlformats.org/drawingml/2006/main" xmlns:r="http://schemas.openxmlformats.org/officeDocument/2006/relationships" xmlns:p="http://schemas.openxmlformats.org/presentationml/2006/main">
   <p:cSld>
     <p:spTree>
@@ -17881,7 +18509,7 @@
           <p:cNvPr id="2" name="Title 1">
             <a:extLst>
               <a:ext uri="{FF2B5EF4-FFF2-40B4-BE49-F238E27FC236}">
-                <a16:creationId xmlns:a16="http://schemas.microsoft.com/office/drawing/2014/main" id="{94CF2A94-A63F-6149-AA28-2E35B60E3D3E}"/>
+                <a16:creationId xmlns:a16="http://schemas.microsoft.com/office/drawing/2014/main" id="{98347210-B4BE-4047-93B4-3D7AA966D0F1}"/>
               </a:ext>
             </a:extLst>
           </p:cNvPr>
@@ -17897,88 +18525,161 @@
           <a:bodyPr/>
           <a:lstStyle/>
           <a:p>
-            <a:endParaRPr lang="en-US"/>
+            <a:r>
+              <a:rPr lang="en-US" dirty="0"/>
+              <a:t>Features in triage: Naming Conventions</a:t>
+            </a:r>
           </a:p>
         </p:txBody>
       </p:sp>
-      <p:graphicFrame>
-        <p:nvGraphicFramePr>
-          <p:cNvPr id="3" name="Diagram 2">
+      <p:sp>
+        <p:nvSpPr>
+          <p:cNvPr id="3" name="Text Placeholder 2">
             <a:extLst>
               <a:ext uri="{FF2B5EF4-FFF2-40B4-BE49-F238E27FC236}">
-                <a16:creationId xmlns:a16="http://schemas.microsoft.com/office/drawing/2014/main" id="{8E902576-68A9-6E48-B0FE-5B1889953DC8}"/>
+                <a16:creationId xmlns:a16="http://schemas.microsoft.com/office/drawing/2014/main" id="{8B9D9112-B2A1-D142-B67C-41AA10739FF6}"/>
               </a:ext>
             </a:extLst>
           </p:cNvPr>
-          <p:cNvGraphicFramePr/>
-          <p:nvPr/>
-        </p:nvGraphicFramePr>
-        <p:xfrm>
-          <a:off x="180467" y="0"/>
-          <a:ext cx="11776400" cy="6858000"/>
-        </p:xfrm>
-        <a:graphic>
-          <a:graphicData uri="http://schemas.openxmlformats.org/drawingml/2006/diagram">
-            <dgm:relIds xmlns:dgm="http://schemas.openxmlformats.org/drawingml/2006/diagram" xmlns:r="http://schemas.openxmlformats.org/officeDocument/2006/relationships" r:dm="rId3" r:lo="rId4" r:qs="rId5" r:cs="rId6"/>
-          </a:graphicData>
-        </a:graphic>
-      </p:graphicFrame>
-      <p:sp>
-        <p:nvSpPr>
-          <p:cNvPr id="4" name="Rectangle 3">
-            <a:extLst>
-              <a:ext uri="{FF2B5EF4-FFF2-40B4-BE49-F238E27FC236}">
-                <a16:creationId xmlns:a16="http://schemas.microsoft.com/office/drawing/2014/main" id="{E2C99BF2-C81A-5246-89D3-E49BCDCAD699}"/>
-              </a:ext>
-            </a:extLst>
-          </p:cNvPr>
-          <p:cNvSpPr/>
-          <p:nvPr/>
+          <p:cNvSpPr>
+            <a:spLocks noGrp="1"/>
+          </p:cNvSpPr>
+          <p:nvPr>
+            <p:ph type="body" idx="1"/>
+          </p:nvPr>
         </p:nvSpPr>
-        <p:spPr>
-          <a:xfrm>
-            <a:off x="9553197" y="115748"/>
-            <a:ext cx="2534195" cy="4208008"/>
-          </a:xfrm>
-          <a:prstGeom prst="rect">
-            <a:avLst/>
-          </a:prstGeom>
-          <a:noFill/>
-          <a:ln w="76200">
-            <a:solidFill>
-              <a:srgbClr val="C00000"/>
-            </a:solidFill>
-          </a:ln>
-        </p:spPr>
-        <p:style>
-          <a:lnRef idx="2">
-            <a:schemeClr val="accent1">
-              <a:shade val="50000"/>
-            </a:schemeClr>
-          </a:lnRef>
-          <a:fillRef idx="1">
-            <a:schemeClr val="accent1"/>
-          </a:fillRef>
-          <a:effectRef idx="0">
-            <a:schemeClr val="accent1"/>
-          </a:effectRef>
-          <a:fontRef idx="minor">
-            <a:schemeClr val="lt1"/>
-          </a:fontRef>
-        </p:style>
+        <p:spPr/>
         <p:txBody>
-          <a:bodyPr rtlCol="0" anchor="ctr"/>
+          <a:bodyPr/>
           <a:lstStyle/>
           <a:p>
-            <a:pPr algn="ctr"/>
-            <a:endParaRPr lang="en-US"/>
+            <a:pPr marL="76200" indent="0">
+              <a:buNone/>
+            </a:pPr>
+            <a:r>
+              <a:rPr lang="en-US" dirty="0"/>
+              <a:t>For aggregates:</a:t>
+            </a:r>
+          </a:p>
+          <a:p>
+            <a:pPr marL="76200" indent="0">
+              <a:buNone/>
+            </a:pPr>
+            <a:r>
+              <a:rPr lang="en-US" b="0" i="0" dirty="0">
+                <a:solidFill>
+                  <a:srgbClr val="8A0002"/>
+                </a:solidFill>
+                <a:effectLst/>
+                <a:latin typeface="Menlo" panose="020B0609030804020204" pitchFamily="49" charset="0"/>
+              </a:rPr>
+              <a:t>{prefix}_</a:t>
+            </a:r>
+            <a:r>
+              <a:rPr lang="en-US" b="0" i="0" dirty="0" err="1">
+                <a:solidFill>
+                  <a:srgbClr val="8A0002"/>
+                </a:solidFill>
+                <a:effectLst/>
+                <a:latin typeface="Menlo" panose="020B0609030804020204" pitchFamily="49" charset="0"/>
+              </a:rPr>
+              <a:t>entity_id</a:t>
+            </a:r>
+            <a:r>
+              <a:rPr lang="en-US" b="0" i="0" dirty="0">
+                <a:solidFill>
+                  <a:srgbClr val="8A0002"/>
+                </a:solidFill>
+                <a:effectLst/>
+                <a:latin typeface="Menlo" panose="020B0609030804020204" pitchFamily="49" charset="0"/>
+              </a:rPr>
+              <a:t>_{interval}_{quantity}_{metric}</a:t>
+            </a:r>
+          </a:p>
+          <a:p>
+            <a:pPr marL="76200" indent="0">
+              <a:buNone/>
+            </a:pPr>
+            <a:endParaRPr lang="en-US" dirty="0">
+              <a:solidFill>
+                <a:srgbClr val="8A0002"/>
+              </a:solidFill>
+              <a:latin typeface="Menlo" panose="020B0609030804020204" pitchFamily="49" charset="0"/>
+            </a:endParaRPr>
+          </a:p>
+          <a:p>
+            <a:pPr marL="76200" indent="0">
+              <a:buNone/>
+            </a:pPr>
+            <a:endParaRPr lang="en-US" dirty="0">
+              <a:solidFill>
+                <a:srgbClr val="8A0002"/>
+              </a:solidFill>
+              <a:latin typeface="Menlo" panose="020B0609030804020204" pitchFamily="49" charset="0"/>
+            </a:endParaRPr>
+          </a:p>
+          <a:p>
+            <a:pPr marL="76200" indent="0">
+              <a:buNone/>
+            </a:pPr>
+            <a:r>
+              <a:rPr lang="en-US" dirty="0"/>
+              <a:t>For </a:t>
+            </a:r>
+            <a:r>
+              <a:rPr lang="en-US" dirty="0" err="1"/>
+              <a:t>categoricals</a:t>
+            </a:r>
+            <a:r>
+              <a:rPr lang="en-US" dirty="0"/>
+              <a:t>:</a:t>
+            </a:r>
+          </a:p>
+          <a:p>
+            <a:pPr marL="76200" indent="0">
+              <a:buNone/>
+            </a:pPr>
+            <a:r>
+              <a:rPr lang="en-US" b="0" i="0" dirty="0">
+                <a:solidFill>
+                  <a:srgbClr val="8A0002"/>
+                </a:solidFill>
+                <a:effectLst/>
+                <a:latin typeface="Menlo" panose="020B0609030804020204" pitchFamily="49" charset="0"/>
+              </a:rPr>
+              <a:t>{prefix}_</a:t>
+            </a:r>
+            <a:r>
+              <a:rPr lang="en-US" b="0" i="0" dirty="0" err="1">
+                <a:solidFill>
+                  <a:srgbClr val="8A0002"/>
+                </a:solidFill>
+                <a:effectLst/>
+                <a:latin typeface="Menlo" panose="020B0609030804020204" pitchFamily="49" charset="0"/>
+              </a:rPr>
+              <a:t>entity_id</a:t>
+            </a:r>
+            <a:r>
+              <a:rPr lang="en-US" b="0" i="0" dirty="0">
+                <a:solidFill>
+                  <a:srgbClr val="8A0002"/>
+                </a:solidFill>
+                <a:effectLst/>
+                <a:latin typeface="Menlo" panose="020B0609030804020204" pitchFamily="49" charset="0"/>
+              </a:rPr>
+              <a:t>_{interval}_{quantity}_{value}_{metric}</a:t>
+            </a:r>
+            <a:br>
+              <a:rPr lang="en-US" dirty="0"/>
+            </a:br>
+            <a:endParaRPr lang="en-US" dirty="0"/>
           </a:p>
         </p:txBody>
       </p:sp>
     </p:spTree>
     <p:extLst>
       <p:ext uri="{BB962C8B-B14F-4D97-AF65-F5344CB8AC3E}">
-        <p14:creationId xmlns:p14="http://schemas.microsoft.com/office/powerpoint/2010/main" val="3141728949"/>
+        <p14:creationId xmlns:p14="http://schemas.microsoft.com/office/powerpoint/2010/main" val="3832182284"/>
       </p:ext>
     </p:extLst>
   </p:cSld>
@@ -17988,7 +18689,1400 @@
 </p:sld>
 </file>
 
-<file path=ppt/slides/slide20.xml><?xml version="1.0" encoding="utf-8"?>
+<file path=ppt/slides/slide22.xml><?xml version="1.0" encoding="utf-8"?>
+<p:sld xmlns:a="http://schemas.openxmlformats.org/drawingml/2006/main" xmlns:r="http://schemas.openxmlformats.org/officeDocument/2006/relationships" xmlns:p="http://schemas.openxmlformats.org/presentationml/2006/main">
+  <p:cSld>
+    <p:spTree>
+      <p:nvGrpSpPr>
+        <p:cNvPr id="1" name=""/>
+        <p:cNvGrpSpPr/>
+        <p:nvPr/>
+      </p:nvGrpSpPr>
+      <p:grpSpPr>
+        <a:xfrm>
+          <a:off x="0" y="0"/>
+          <a:ext cx="0" cy="0"/>
+          <a:chOff x="0" y="0"/>
+          <a:chExt cx="0" cy="0"/>
+        </a:xfrm>
+      </p:grpSpPr>
+      <p:sp>
+        <p:nvSpPr>
+          <p:cNvPr id="2" name="Title 1">
+            <a:extLst>
+              <a:ext uri="{FF2B5EF4-FFF2-40B4-BE49-F238E27FC236}">
+                <a16:creationId xmlns:a16="http://schemas.microsoft.com/office/drawing/2014/main" id="{98347210-B4BE-4047-93B4-3D7AA966D0F1}"/>
+              </a:ext>
+            </a:extLst>
+          </p:cNvPr>
+          <p:cNvSpPr>
+            <a:spLocks noGrp="1"/>
+          </p:cNvSpPr>
+          <p:nvPr>
+            <p:ph type="title"/>
+          </p:nvPr>
+        </p:nvSpPr>
+        <p:spPr/>
+        <p:txBody>
+          <a:bodyPr/>
+          <a:lstStyle/>
+          <a:p>
+            <a:r>
+              <a:rPr lang="en-US" dirty="0"/>
+              <a:t>Features in triage: Naming Conventions</a:t>
+            </a:r>
+          </a:p>
+        </p:txBody>
+      </p:sp>
+      <p:sp>
+        <p:nvSpPr>
+          <p:cNvPr id="3" name="Text Placeholder 2">
+            <a:extLst>
+              <a:ext uri="{FF2B5EF4-FFF2-40B4-BE49-F238E27FC236}">
+                <a16:creationId xmlns:a16="http://schemas.microsoft.com/office/drawing/2014/main" id="{8B9D9112-B2A1-D142-B67C-41AA10739FF6}"/>
+              </a:ext>
+            </a:extLst>
+          </p:cNvPr>
+          <p:cNvSpPr>
+            <a:spLocks noGrp="1"/>
+          </p:cNvSpPr>
+          <p:nvPr>
+            <p:ph type="body" idx="1"/>
+          </p:nvPr>
+        </p:nvSpPr>
+        <p:spPr/>
+        <p:txBody>
+          <a:bodyPr/>
+          <a:lstStyle/>
+          <a:p>
+            <a:pPr marL="76200" indent="0">
+              <a:buNone/>
+            </a:pPr>
+            <a:r>
+              <a:rPr lang="en-US" dirty="0"/>
+              <a:t>For aggregates:</a:t>
+            </a:r>
+          </a:p>
+          <a:p>
+            <a:pPr marL="76200" indent="0">
+              <a:buNone/>
+            </a:pPr>
+            <a:r>
+              <a:rPr lang="en-US" b="0" i="0" dirty="0">
+                <a:solidFill>
+                  <a:srgbClr val="8A0002"/>
+                </a:solidFill>
+                <a:effectLst/>
+                <a:latin typeface="Menlo" panose="020B0609030804020204" pitchFamily="49" charset="0"/>
+              </a:rPr>
+              <a:t>{prefix}_</a:t>
+            </a:r>
+            <a:r>
+              <a:rPr lang="en-US" b="0" i="0" dirty="0" err="1">
+                <a:solidFill>
+                  <a:srgbClr val="8A0002"/>
+                </a:solidFill>
+                <a:effectLst/>
+                <a:latin typeface="Menlo" panose="020B0609030804020204" pitchFamily="49" charset="0"/>
+              </a:rPr>
+              <a:t>entity_id</a:t>
+            </a:r>
+            <a:r>
+              <a:rPr lang="en-US" b="0" i="0" dirty="0">
+                <a:solidFill>
+                  <a:srgbClr val="8A0002"/>
+                </a:solidFill>
+                <a:effectLst/>
+                <a:latin typeface="Menlo" panose="020B0609030804020204" pitchFamily="49" charset="0"/>
+              </a:rPr>
+              <a:t>_{interval}_{quantity}_{metric}</a:t>
+            </a:r>
+          </a:p>
+          <a:p>
+            <a:pPr marL="76200" indent="0">
+              <a:buNone/>
+            </a:pPr>
+            <a:endParaRPr lang="en-US" dirty="0">
+              <a:solidFill>
+                <a:srgbClr val="8A0002"/>
+              </a:solidFill>
+              <a:latin typeface="Menlo" panose="020B0609030804020204" pitchFamily="49" charset="0"/>
+            </a:endParaRPr>
+          </a:p>
+          <a:p>
+            <a:pPr marL="76200" indent="0">
+              <a:buNone/>
+            </a:pPr>
+            <a:endParaRPr lang="en-US" dirty="0">
+              <a:solidFill>
+                <a:srgbClr val="8A0002"/>
+              </a:solidFill>
+              <a:latin typeface="Menlo" panose="020B0609030804020204" pitchFamily="49" charset="0"/>
+            </a:endParaRPr>
+          </a:p>
+          <a:p>
+            <a:pPr marL="76200" indent="0">
+              <a:buNone/>
+            </a:pPr>
+            <a:r>
+              <a:rPr lang="en-US" dirty="0"/>
+              <a:t>For </a:t>
+            </a:r>
+            <a:r>
+              <a:rPr lang="en-US" dirty="0" err="1"/>
+              <a:t>categoricals</a:t>
+            </a:r>
+            <a:r>
+              <a:rPr lang="en-US" dirty="0"/>
+              <a:t>:</a:t>
+            </a:r>
+          </a:p>
+          <a:p>
+            <a:pPr marL="76200" indent="0">
+              <a:buNone/>
+            </a:pPr>
+            <a:r>
+              <a:rPr lang="en-US" b="0" i="0" dirty="0">
+                <a:solidFill>
+                  <a:srgbClr val="8A0002"/>
+                </a:solidFill>
+                <a:effectLst/>
+                <a:latin typeface="Menlo" panose="020B0609030804020204" pitchFamily="49" charset="0"/>
+              </a:rPr>
+              <a:t>{prefix}_</a:t>
+            </a:r>
+            <a:r>
+              <a:rPr lang="en-US" b="0" i="0" dirty="0" err="1">
+                <a:solidFill>
+                  <a:srgbClr val="8A0002"/>
+                </a:solidFill>
+                <a:effectLst/>
+                <a:latin typeface="Menlo" panose="020B0609030804020204" pitchFamily="49" charset="0"/>
+              </a:rPr>
+              <a:t>entity_id</a:t>
+            </a:r>
+            <a:r>
+              <a:rPr lang="en-US" b="0" i="0" dirty="0">
+                <a:solidFill>
+                  <a:srgbClr val="8A0002"/>
+                </a:solidFill>
+                <a:effectLst/>
+                <a:latin typeface="Menlo" panose="020B0609030804020204" pitchFamily="49" charset="0"/>
+              </a:rPr>
+              <a:t>_{interval}_{quantity}_{value}_{metric}</a:t>
+            </a:r>
+            <a:br>
+              <a:rPr lang="en-US" dirty="0"/>
+            </a:br>
+            <a:endParaRPr lang="en-US" dirty="0"/>
+          </a:p>
+        </p:txBody>
+      </p:sp>
+      <p:sp>
+        <p:nvSpPr>
+          <p:cNvPr id="4" name="Google Shape;376;p32">
+            <a:extLst>
+              <a:ext uri="{FF2B5EF4-FFF2-40B4-BE49-F238E27FC236}">
+                <a16:creationId xmlns:a16="http://schemas.microsoft.com/office/drawing/2014/main" id="{0861BD14-5019-3446-BB19-489B97803546}"/>
+              </a:ext>
+            </a:extLst>
+          </p:cNvPr>
+          <p:cNvSpPr txBox="1"/>
+          <p:nvPr/>
+        </p:nvSpPr>
+        <p:spPr>
+          <a:xfrm>
+            <a:off x="5251837" y="5131783"/>
+            <a:ext cx="3182158" cy="1129168"/>
+          </a:xfrm>
+          <a:prstGeom prst="rect">
+            <a:avLst/>
+          </a:prstGeom>
+          <a:noFill/>
+          <a:ln>
+            <a:noFill/>
+          </a:ln>
+        </p:spPr>
+        <p:txBody>
+          <a:bodyPr spcFirstLastPara="1" wrap="square" lIns="91425" tIns="91425" rIns="91425" bIns="91425" anchor="t" anchorCtr="0">
+            <a:noAutofit/>
+          </a:bodyPr>
+          <a:lstStyle/>
+          <a:p>
+            <a:pPr marL="0" lvl="0" indent="0" algn="l" rtl="0">
+              <a:spcBef>
+                <a:spcPts val="0"/>
+              </a:spcBef>
+              <a:spcAft>
+                <a:spcPts val="0"/>
+              </a:spcAft>
+              <a:buNone/>
+            </a:pPr>
+            <a:r>
+              <a:rPr lang="en" sz="2000" b="1" dirty="0">
+                <a:solidFill>
+                  <a:srgbClr val="FF0000"/>
+                </a:solidFill>
+                <a:latin typeface="Calibri"/>
+                <a:ea typeface="Calibri"/>
+                <a:cs typeface="Calibri"/>
+                <a:sym typeface="Calibri"/>
+              </a:rPr>
+              <a:t>Important note:</a:t>
+            </a:r>
+          </a:p>
+          <a:p>
+            <a:pPr marL="0" lvl="0" indent="0" algn="l" rtl="0">
+              <a:spcBef>
+                <a:spcPts val="0"/>
+              </a:spcBef>
+              <a:spcAft>
+                <a:spcPts val="0"/>
+              </a:spcAft>
+              <a:buNone/>
+            </a:pPr>
+            <a:r>
+              <a:rPr lang="en" sz="2000" b="1" dirty="0">
+                <a:solidFill>
+                  <a:srgbClr val="FF0000"/>
+                </a:solidFill>
+                <a:latin typeface="Calibri"/>
+                <a:ea typeface="Calibri"/>
+                <a:cs typeface="Calibri"/>
+                <a:sym typeface="Calibri"/>
+              </a:rPr>
+              <a:t>Even </a:t>
+            </a:r>
+            <a:r>
+              <a:rPr lang="en" sz="2000" b="1" dirty="0" err="1">
+                <a:solidFill>
+                  <a:srgbClr val="FF0000"/>
+                </a:solidFill>
+                <a:latin typeface="Calibri"/>
+                <a:ea typeface="Calibri"/>
+                <a:cs typeface="Calibri"/>
+                <a:sym typeface="Calibri"/>
+              </a:rPr>
+              <a:t>categoricals</a:t>
+            </a:r>
+            <a:r>
+              <a:rPr lang="en" sz="2000" b="1" dirty="0">
+                <a:solidFill>
+                  <a:srgbClr val="FF0000"/>
+                </a:solidFill>
+                <a:latin typeface="Calibri"/>
+                <a:ea typeface="Calibri"/>
+                <a:cs typeface="Calibri"/>
+                <a:sym typeface="Calibri"/>
+              </a:rPr>
+              <a:t> need to be aggregated over time!</a:t>
+            </a:r>
+            <a:endParaRPr sz="2000" b="1" dirty="0">
+              <a:solidFill>
+                <a:srgbClr val="FF0000"/>
+              </a:solidFill>
+              <a:latin typeface="Calibri"/>
+              <a:ea typeface="Calibri"/>
+              <a:cs typeface="Calibri"/>
+              <a:sym typeface="Calibri"/>
+            </a:endParaRPr>
+          </a:p>
+        </p:txBody>
+      </p:sp>
+      <p:cxnSp>
+        <p:nvCxnSpPr>
+          <p:cNvPr id="5" name="Google Shape;377;p32">
+            <a:extLst>
+              <a:ext uri="{FF2B5EF4-FFF2-40B4-BE49-F238E27FC236}">
+                <a16:creationId xmlns:a16="http://schemas.microsoft.com/office/drawing/2014/main" id="{22750E78-1A72-D24F-9AE1-0FC392DACB40}"/>
+              </a:ext>
+            </a:extLst>
+          </p:cNvPr>
+          <p:cNvCxnSpPr>
+            <a:cxnSpLocks/>
+          </p:cNvCxnSpPr>
+          <p:nvPr/>
+        </p:nvCxnSpPr>
+        <p:spPr>
+          <a:xfrm flipH="1" flipV="1">
+            <a:off x="4765638" y="4152452"/>
+            <a:ext cx="523774" cy="1333631"/>
+          </a:xfrm>
+          <a:prstGeom prst="straightConnector1">
+            <a:avLst/>
+          </a:prstGeom>
+          <a:noFill/>
+          <a:ln w="38100" cap="flat" cmpd="sng">
+            <a:solidFill>
+              <a:srgbClr val="FF0000"/>
+            </a:solidFill>
+            <a:prstDash val="solid"/>
+            <a:round/>
+            <a:headEnd type="none" w="med" len="med"/>
+            <a:tailEnd type="triangle" w="med" len="med"/>
+          </a:ln>
+        </p:spPr>
+      </p:cxnSp>
+    </p:spTree>
+    <p:extLst>
+      <p:ext uri="{BB962C8B-B14F-4D97-AF65-F5344CB8AC3E}">
+        <p14:creationId xmlns:p14="http://schemas.microsoft.com/office/powerpoint/2010/main" val="964881950"/>
+      </p:ext>
+    </p:extLst>
+  </p:cSld>
+  <p:clrMapOvr>
+    <a:masterClrMapping/>
+  </p:clrMapOvr>
+</p:sld>
+</file>
+
+<file path=ppt/slides/slide23.xml><?xml version="1.0" encoding="utf-8"?>
+<p:sld xmlns:a="http://schemas.openxmlformats.org/drawingml/2006/main" xmlns:r="http://schemas.openxmlformats.org/officeDocument/2006/relationships" xmlns:p="http://schemas.openxmlformats.org/presentationml/2006/main">
+  <p:cSld>
+    <p:spTree>
+      <p:nvGrpSpPr>
+        <p:cNvPr id="1" name=""/>
+        <p:cNvGrpSpPr/>
+        <p:nvPr/>
+      </p:nvGrpSpPr>
+      <p:grpSpPr>
+        <a:xfrm>
+          <a:off x="0" y="0"/>
+          <a:ext cx="0" cy="0"/>
+          <a:chOff x="0" y="0"/>
+          <a:chExt cx="0" cy="0"/>
+        </a:xfrm>
+      </p:grpSpPr>
+      <p:sp>
+        <p:nvSpPr>
+          <p:cNvPr id="2" name="Title 1">
+            <a:extLst>
+              <a:ext uri="{FF2B5EF4-FFF2-40B4-BE49-F238E27FC236}">
+                <a16:creationId xmlns:a16="http://schemas.microsoft.com/office/drawing/2014/main" id="{0CF948B8-BA69-C99B-BAC9-CBEABDE7C145}"/>
+              </a:ext>
+            </a:extLst>
+          </p:cNvPr>
+          <p:cNvSpPr>
+            <a:spLocks noGrp="1"/>
+          </p:cNvSpPr>
+          <p:nvPr>
+            <p:ph type="title"/>
+          </p:nvPr>
+        </p:nvSpPr>
+        <p:spPr/>
+        <p:txBody>
+          <a:bodyPr/>
+          <a:lstStyle/>
+          <a:p>
+            <a:r>
+              <a:rPr lang="en-US" dirty="0"/>
+              <a:t>Features in triage: </a:t>
+            </a:r>
+            <a:r>
+              <a:rPr lang="en-US" dirty="0" err="1"/>
+              <a:t>Aggregaton</a:t>
+            </a:r>
+            <a:r>
+              <a:rPr lang="en-US" dirty="0"/>
+              <a:t> and Imputation</a:t>
+            </a:r>
+          </a:p>
+        </p:txBody>
+      </p:sp>
+      <p:sp>
+        <p:nvSpPr>
+          <p:cNvPr id="3" name="Text Placeholder 2">
+            <a:extLst>
+              <a:ext uri="{FF2B5EF4-FFF2-40B4-BE49-F238E27FC236}">
+                <a16:creationId xmlns:a16="http://schemas.microsoft.com/office/drawing/2014/main" id="{47ABAA06-231A-D9A3-D456-E52DF90553AA}"/>
+              </a:ext>
+            </a:extLst>
+          </p:cNvPr>
+          <p:cNvSpPr>
+            <a:spLocks noGrp="1"/>
+          </p:cNvSpPr>
+          <p:nvPr>
+            <p:ph type="body" idx="1"/>
+          </p:nvPr>
+        </p:nvSpPr>
+        <p:spPr>
+          <a:xfrm>
+            <a:off x="415600" y="1709433"/>
+            <a:ext cx="11360700" cy="4555200"/>
+          </a:xfrm>
+        </p:spPr>
+        <p:txBody>
+          <a:bodyPr/>
+          <a:lstStyle/>
+          <a:p>
+            <a:r>
+              <a:rPr lang="en-US" dirty="0"/>
+              <a:t>Aggregation functions available: 'min', 'max', 'sum', 'avg', '</a:t>
+            </a:r>
+            <a:r>
+              <a:rPr lang="en-US" dirty="0" err="1"/>
+              <a:t>stddev</a:t>
+            </a:r>
+            <a:r>
+              <a:rPr lang="en-US" dirty="0"/>
+              <a:t>' </a:t>
+            </a:r>
+          </a:p>
+          <a:p>
+            <a:endParaRPr lang="en-US" dirty="0"/>
+          </a:p>
+          <a:p>
+            <a:r>
+              <a:rPr lang="en-US" dirty="0"/>
+              <a:t>Imputation options: need to be defined at least for each feature group. For </a:t>
+            </a:r>
+            <a:r>
+              <a:rPr lang="en-US" dirty="0" err="1"/>
+              <a:t>eacjh</a:t>
+            </a:r>
+            <a:r>
+              <a:rPr lang="en-US" dirty="0"/>
+              <a:t> feature group, there can be default imputation methods defined  for aggregate and categorical features, or at any level below that (for each  aggregation function or for each feature generated)</a:t>
+            </a:r>
+          </a:p>
+          <a:p>
+            <a:pPr marL="914400" lvl="3">
+              <a:lnSpc>
+                <a:spcPct val="100000"/>
+              </a:lnSpc>
+              <a:spcBef>
+                <a:spcPts val="0"/>
+              </a:spcBef>
+            </a:pPr>
+            <a:r>
+              <a:rPr lang="en-US" dirty="0"/>
+              <a:t>Mean</a:t>
+            </a:r>
+          </a:p>
+          <a:p>
+            <a:pPr marL="914400" lvl="3">
+              <a:lnSpc>
+                <a:spcPct val="100000"/>
+              </a:lnSpc>
+              <a:spcBef>
+                <a:spcPts val="0"/>
+              </a:spcBef>
+            </a:pPr>
+            <a:r>
+              <a:rPr lang="en-US" dirty="0" err="1"/>
+              <a:t>Zero_noflag</a:t>
+            </a:r>
+            <a:endParaRPr lang="en-US" dirty="0"/>
+          </a:p>
+          <a:p>
+            <a:pPr marL="914400" lvl="3">
+              <a:lnSpc>
+                <a:spcPct val="100000"/>
+              </a:lnSpc>
+              <a:spcBef>
+                <a:spcPts val="0"/>
+              </a:spcBef>
+            </a:pPr>
+            <a:r>
+              <a:rPr lang="en-US" dirty="0"/>
+              <a:t>Constant value</a:t>
+            </a:r>
+          </a:p>
+          <a:p>
+            <a:pPr marL="914400" lvl="3">
+              <a:lnSpc>
+                <a:spcPct val="100000"/>
+              </a:lnSpc>
+              <a:spcBef>
+                <a:spcPts val="0"/>
+              </a:spcBef>
+            </a:pPr>
+            <a:r>
+              <a:rPr lang="en-US" dirty="0"/>
+              <a:t>Zero</a:t>
+            </a:r>
+          </a:p>
+          <a:p>
+            <a:pPr marL="914400" lvl="3">
+              <a:lnSpc>
+                <a:spcPct val="100000"/>
+              </a:lnSpc>
+              <a:spcBef>
+                <a:spcPts val="0"/>
+              </a:spcBef>
+            </a:pPr>
+            <a:r>
+              <a:rPr lang="en-US" dirty="0" err="1"/>
+              <a:t>null_category</a:t>
+            </a:r>
+            <a:endParaRPr lang="en-US" dirty="0"/>
+          </a:p>
+          <a:p>
+            <a:pPr marL="914400" lvl="3">
+              <a:lnSpc>
+                <a:spcPct val="100000"/>
+              </a:lnSpc>
+              <a:spcBef>
+                <a:spcPts val="0"/>
+              </a:spcBef>
+            </a:pPr>
+            <a:r>
+              <a:rPr lang="en-US" dirty="0" err="1"/>
+              <a:t>binary_mode</a:t>
+            </a:r>
+            <a:endParaRPr lang="en-US" dirty="0"/>
+          </a:p>
+          <a:p>
+            <a:pPr marL="914400" lvl="3">
+              <a:lnSpc>
+                <a:spcPct val="100000"/>
+              </a:lnSpc>
+              <a:spcBef>
+                <a:spcPts val="0"/>
+              </a:spcBef>
+            </a:pPr>
+            <a:r>
+              <a:rPr lang="en-US" dirty="0"/>
+              <a:t>error</a:t>
+            </a:r>
+          </a:p>
+          <a:p>
+            <a:pPr lvl="1"/>
+            <a:endParaRPr lang="en-US" dirty="0"/>
+          </a:p>
+          <a:p>
+            <a:pPr lvl="1"/>
+            <a:endParaRPr lang="en-US" dirty="0"/>
+          </a:p>
+          <a:p>
+            <a:endParaRPr lang="en-US" dirty="0"/>
+          </a:p>
+        </p:txBody>
+      </p:sp>
+    </p:spTree>
+    <p:extLst>
+      <p:ext uri="{BB962C8B-B14F-4D97-AF65-F5344CB8AC3E}">
+        <p14:creationId xmlns:p14="http://schemas.microsoft.com/office/powerpoint/2010/main" val="1038667788"/>
+      </p:ext>
+    </p:extLst>
+  </p:cSld>
+  <p:clrMapOvr>
+    <a:masterClrMapping/>
+  </p:clrMapOvr>
+</p:sld>
+</file>
+
+<file path=ppt/slides/slide24.xml><?xml version="1.0" encoding="utf-8"?>
+<p:sld xmlns:a="http://schemas.openxmlformats.org/drawingml/2006/main" xmlns:r="http://schemas.openxmlformats.org/officeDocument/2006/relationships" xmlns:p="http://schemas.openxmlformats.org/presentationml/2006/main">
+  <p:cSld>
+    <p:spTree>
+      <p:nvGrpSpPr>
+        <p:cNvPr id="1" name=""/>
+        <p:cNvGrpSpPr/>
+        <p:nvPr/>
+      </p:nvGrpSpPr>
+      <p:grpSpPr>
+        <a:xfrm>
+          <a:off x="0" y="0"/>
+          <a:ext cx="0" cy="0"/>
+          <a:chOff x="0" y="0"/>
+          <a:chExt cx="0" cy="0"/>
+        </a:xfrm>
+      </p:grpSpPr>
+      <p:sp>
+        <p:nvSpPr>
+          <p:cNvPr id="2" name="Title 1">
+            <a:extLst>
+              <a:ext uri="{FF2B5EF4-FFF2-40B4-BE49-F238E27FC236}">
+                <a16:creationId xmlns:a16="http://schemas.microsoft.com/office/drawing/2014/main" id="{E246A269-7D7C-5599-B408-3DF1E8ECA189}"/>
+              </a:ext>
+            </a:extLst>
+          </p:cNvPr>
+          <p:cNvSpPr>
+            <a:spLocks noGrp="1"/>
+          </p:cNvSpPr>
+          <p:nvPr>
+            <p:ph type="title"/>
+          </p:nvPr>
+        </p:nvSpPr>
+        <p:spPr/>
+        <p:txBody>
+          <a:bodyPr/>
+          <a:lstStyle/>
+          <a:p>
+            <a:r>
+              <a:rPr lang="en-US" dirty="0"/>
+              <a:t>Common Features</a:t>
+            </a:r>
+          </a:p>
+        </p:txBody>
+      </p:sp>
+      <p:sp>
+        <p:nvSpPr>
+          <p:cNvPr id="3" name="Text Placeholder 2">
+            <a:extLst>
+              <a:ext uri="{FF2B5EF4-FFF2-40B4-BE49-F238E27FC236}">
+                <a16:creationId xmlns:a16="http://schemas.microsoft.com/office/drawing/2014/main" id="{3F433D8B-4762-7029-EE8E-F61418B4C6C2}"/>
+              </a:ext>
+            </a:extLst>
+          </p:cNvPr>
+          <p:cNvSpPr>
+            <a:spLocks noGrp="1"/>
+          </p:cNvSpPr>
+          <p:nvPr>
+            <p:ph type="body" idx="1"/>
+          </p:nvPr>
+        </p:nvSpPr>
+        <p:spPr/>
+        <p:txBody>
+          <a:bodyPr/>
+          <a:lstStyle/>
+          <a:p>
+            <a:r>
+              <a:rPr lang="en-US" dirty="0"/>
+              <a:t>Categorical features</a:t>
+            </a:r>
+          </a:p>
+          <a:p>
+            <a:pPr lvl="1"/>
+            <a:r>
+              <a:rPr lang="en-US" dirty="0"/>
+              <a:t>Dummy for all values</a:t>
+            </a:r>
+          </a:p>
+          <a:p>
+            <a:pPr lvl="1"/>
+            <a:r>
+              <a:rPr lang="en-US" dirty="0"/>
+              <a:t>Dummy for selected values</a:t>
+            </a:r>
+          </a:p>
+          <a:p>
+            <a:r>
+              <a:rPr lang="en-US" dirty="0"/>
+              <a:t>Continuous features – aggregates over the past X time</a:t>
+            </a:r>
+          </a:p>
+          <a:p>
+            <a:r>
+              <a:rPr lang="en-US" dirty="0"/>
+              <a:t>Special types of features</a:t>
+            </a:r>
+          </a:p>
+          <a:p>
+            <a:pPr lvl="1"/>
+            <a:r>
+              <a:rPr lang="en-US" dirty="0"/>
+              <a:t>Age Feature</a:t>
+            </a:r>
+          </a:p>
+          <a:p>
+            <a:pPr lvl="1"/>
+            <a:r>
+              <a:rPr lang="en-US" dirty="0"/>
+              <a:t>Days since last event (by type) – min</a:t>
+            </a:r>
+          </a:p>
+          <a:p>
+            <a:pPr lvl="1"/>
+            <a:r>
+              <a:rPr lang="en-US" dirty="0"/>
+              <a:t>Days since first event (by type) – max</a:t>
+            </a:r>
+          </a:p>
+          <a:p>
+            <a:pPr lvl="1"/>
+            <a:r>
+              <a:rPr lang="en-US" dirty="0"/>
+              <a:t>Days between events (by type) – min, max, avg, </a:t>
+            </a:r>
+            <a:r>
+              <a:rPr lang="en-US" dirty="0" err="1"/>
+              <a:t>stddev</a:t>
+            </a:r>
+            <a:r>
+              <a:rPr lang="en-US" dirty="0"/>
+              <a:t> </a:t>
+            </a:r>
+            <a:r>
+              <a:rPr lang="en-US" sz="1200" dirty="0"/>
+              <a:t>(</a:t>
+            </a:r>
+            <a:r>
+              <a:rPr lang="en-US" sz="1200" dirty="0">
+                <a:solidFill>
+                  <a:srgbClr val="8A0002"/>
+                </a:solidFill>
+                <a:hlinkClick r:id="rId2">
+                  <a:extLst>
+                    <a:ext uri="{A12FA001-AC4F-418D-AE19-62706E023703}">
+                      <ahyp:hlinkClr xmlns:ahyp="http://schemas.microsoft.com/office/drawing/2018/hyperlinkcolor" val="tx"/>
+                    </a:ext>
+                  </a:extLst>
+                </a:hlinkClick>
+              </a:rPr>
+              <a:t>Days between inspection cases in San Jose</a:t>
+            </a:r>
+            <a:r>
+              <a:rPr lang="en-US" sz="1200" dirty="0">
+                <a:solidFill>
+                  <a:srgbClr val="8A0002"/>
+                </a:solidFill>
+              </a:rPr>
+              <a:t>)</a:t>
+            </a:r>
+          </a:p>
+          <a:p>
+            <a:endParaRPr lang="en-US" dirty="0"/>
+          </a:p>
+        </p:txBody>
+      </p:sp>
+    </p:spTree>
+    <p:extLst>
+      <p:ext uri="{BB962C8B-B14F-4D97-AF65-F5344CB8AC3E}">
+        <p14:creationId xmlns:p14="http://schemas.microsoft.com/office/powerpoint/2010/main" val="4227430202"/>
+      </p:ext>
+    </p:extLst>
+  </p:cSld>
+  <p:clrMapOvr>
+    <a:masterClrMapping/>
+  </p:clrMapOvr>
+</p:sld>
+</file>
+
+<file path=ppt/slides/slide25.xml><?xml version="1.0" encoding="utf-8"?>
+<p:sld xmlns:a="http://schemas.openxmlformats.org/drawingml/2006/main" xmlns:r="http://schemas.openxmlformats.org/officeDocument/2006/relationships" xmlns:p="http://schemas.openxmlformats.org/presentationml/2006/main">
+  <p:cSld>
+    <p:spTree>
+      <p:nvGrpSpPr>
+        <p:cNvPr id="1" name=""/>
+        <p:cNvGrpSpPr/>
+        <p:nvPr/>
+      </p:nvGrpSpPr>
+      <p:grpSpPr>
+        <a:xfrm>
+          <a:off x="0" y="0"/>
+          <a:ext cx="0" cy="0"/>
+          <a:chOff x="0" y="0"/>
+          <a:chExt cx="0" cy="0"/>
+        </a:xfrm>
+      </p:grpSpPr>
+      <p:sp>
+        <p:nvSpPr>
+          <p:cNvPr id="2" name="Title 1">
+            <a:extLst>
+              <a:ext uri="{FF2B5EF4-FFF2-40B4-BE49-F238E27FC236}">
+                <a16:creationId xmlns:a16="http://schemas.microsoft.com/office/drawing/2014/main" id="{98347210-B4BE-4047-93B4-3D7AA966D0F1}"/>
+              </a:ext>
+            </a:extLst>
+          </p:cNvPr>
+          <p:cNvSpPr>
+            <a:spLocks noGrp="1"/>
+          </p:cNvSpPr>
+          <p:nvPr>
+            <p:ph type="title"/>
+          </p:nvPr>
+        </p:nvSpPr>
+        <p:spPr/>
+        <p:txBody>
+          <a:bodyPr/>
+          <a:lstStyle/>
+          <a:p>
+            <a:r>
+              <a:rPr lang="en-US" dirty="0"/>
+              <a:t>Features in triage: Some Examples</a:t>
+            </a:r>
+          </a:p>
+        </p:txBody>
+      </p:sp>
+      <p:sp>
+        <p:nvSpPr>
+          <p:cNvPr id="3" name="Text Placeholder 2">
+            <a:extLst>
+              <a:ext uri="{FF2B5EF4-FFF2-40B4-BE49-F238E27FC236}">
+                <a16:creationId xmlns:a16="http://schemas.microsoft.com/office/drawing/2014/main" id="{8B9D9112-B2A1-D142-B67C-41AA10739FF6}"/>
+              </a:ext>
+            </a:extLst>
+          </p:cNvPr>
+          <p:cNvSpPr>
+            <a:spLocks noGrp="1"/>
+          </p:cNvSpPr>
+          <p:nvPr>
+            <p:ph type="body" idx="1"/>
+          </p:nvPr>
+        </p:nvSpPr>
+        <p:spPr/>
+        <p:txBody>
+          <a:bodyPr/>
+          <a:lstStyle/>
+          <a:p>
+            <a:r>
+              <a:rPr lang="en-US" dirty="0">
+                <a:solidFill>
+                  <a:srgbClr val="8A0002"/>
+                </a:solidFill>
+                <a:hlinkClick r:id="rId2">
+                  <a:extLst>
+                    <a:ext uri="{A12FA001-AC4F-418D-AE19-62706E023703}">
+                      <ahyp:hlinkClr xmlns:ahyp="http://schemas.microsoft.com/office/drawing/2018/hyperlinkcolor" val="tx"/>
+                    </a:ext>
+                  </a:extLst>
+                </a:hlinkClick>
+              </a:rPr>
+              <a:t>Days between inspection cases in San Jose</a:t>
+            </a:r>
+            <a:br>
+              <a:rPr lang="en-US" dirty="0">
+                <a:solidFill>
+                  <a:srgbClr val="8A0002"/>
+                </a:solidFill>
+              </a:rPr>
+            </a:br>
+            <a:endParaRPr lang="en-US" dirty="0">
+              <a:solidFill>
+                <a:srgbClr val="8A0002"/>
+              </a:solidFill>
+            </a:endParaRPr>
+          </a:p>
+          <a:p>
+            <a:r>
+              <a:rPr lang="en-US" dirty="0">
+                <a:solidFill>
+                  <a:srgbClr val="8A0002"/>
+                </a:solidFill>
+                <a:hlinkClick r:id="rId3">
+                  <a:extLst>
+                    <a:ext uri="{A12FA001-AC4F-418D-AE19-62706E023703}">
+                      <ahyp:hlinkClr xmlns:ahyp="http://schemas.microsoft.com/office/drawing/2018/hyperlinkcolor" val="tx"/>
+                    </a:ext>
+                  </a:extLst>
+                </a:hlinkClick>
+              </a:rPr>
+              <a:t>Vaccine History and Categoricals from CSF</a:t>
+            </a:r>
+            <a:br>
+              <a:rPr lang="en-US" dirty="0">
+                <a:solidFill>
+                  <a:srgbClr val="8A0002"/>
+                </a:solidFill>
+              </a:rPr>
+            </a:br>
+            <a:endParaRPr lang="en-US" dirty="0">
+              <a:solidFill>
+                <a:srgbClr val="8A0002"/>
+              </a:solidFill>
+            </a:endParaRPr>
+          </a:p>
+          <a:p>
+            <a:r>
+              <a:rPr lang="en-US" dirty="0">
+                <a:solidFill>
+                  <a:srgbClr val="8A0002"/>
+                </a:solidFill>
+                <a:hlinkClick r:id="rId4">
+                  <a:extLst>
+                    <a:ext uri="{A12FA001-AC4F-418D-AE19-62706E023703}">
+                      <ahyp:hlinkClr xmlns:ahyp="http://schemas.microsoft.com/office/drawing/2018/hyperlinkcolor" val="tx"/>
+                    </a:ext>
+                  </a:extLst>
+                </a:hlinkClick>
+              </a:rPr>
+              <a:t>Days since last event in LA (using collate date)</a:t>
+            </a:r>
+            <a:endParaRPr lang="en-US" dirty="0">
+              <a:solidFill>
+                <a:srgbClr val="8A0002"/>
+              </a:solidFill>
+            </a:endParaRPr>
+          </a:p>
+        </p:txBody>
+      </p:sp>
+    </p:spTree>
+    <p:extLst>
+      <p:ext uri="{BB962C8B-B14F-4D97-AF65-F5344CB8AC3E}">
+        <p14:creationId xmlns:p14="http://schemas.microsoft.com/office/powerpoint/2010/main" val="3341156279"/>
+      </p:ext>
+    </p:extLst>
+  </p:cSld>
+  <p:clrMapOvr>
+    <a:masterClrMapping/>
+  </p:clrMapOvr>
+</p:sld>
+</file>
+
+<file path=ppt/slides/slide26.xml><?xml version="1.0" encoding="utf-8"?>
+<p:sld xmlns:a="http://schemas.openxmlformats.org/drawingml/2006/main" xmlns:r="http://schemas.openxmlformats.org/officeDocument/2006/relationships" xmlns:p="http://schemas.openxmlformats.org/presentationml/2006/main">
+  <p:cSld>
+    <p:spTree>
+      <p:nvGrpSpPr>
+        <p:cNvPr id="1" name=""/>
+        <p:cNvGrpSpPr/>
+        <p:nvPr/>
+      </p:nvGrpSpPr>
+      <p:grpSpPr>
+        <a:xfrm>
+          <a:off x="0" y="0"/>
+          <a:ext cx="0" cy="0"/>
+          <a:chOff x="0" y="0"/>
+          <a:chExt cx="0" cy="0"/>
+        </a:xfrm>
+      </p:grpSpPr>
+      <p:sp>
+        <p:nvSpPr>
+          <p:cNvPr id="2" name="Title 1">
+            <a:extLst>
+              <a:ext uri="{FF2B5EF4-FFF2-40B4-BE49-F238E27FC236}">
+                <a16:creationId xmlns:a16="http://schemas.microsoft.com/office/drawing/2014/main" id="{98347210-B4BE-4047-93B4-3D7AA966D0F1}"/>
+              </a:ext>
+            </a:extLst>
+          </p:cNvPr>
+          <p:cNvSpPr>
+            <a:spLocks noGrp="1"/>
+          </p:cNvSpPr>
+          <p:nvPr>
+            <p:ph type="title"/>
+          </p:nvPr>
+        </p:nvSpPr>
+        <p:spPr/>
+        <p:txBody>
+          <a:bodyPr/>
+          <a:lstStyle/>
+          <a:p>
+            <a:r>
+              <a:rPr lang="en-US" dirty="0"/>
+              <a:t>Features in triage: Some Considerations</a:t>
+            </a:r>
+          </a:p>
+        </p:txBody>
+      </p:sp>
+      <p:sp>
+        <p:nvSpPr>
+          <p:cNvPr id="3" name="Text Placeholder 2">
+            <a:extLst>
+              <a:ext uri="{FF2B5EF4-FFF2-40B4-BE49-F238E27FC236}">
+                <a16:creationId xmlns:a16="http://schemas.microsoft.com/office/drawing/2014/main" id="{8B9D9112-B2A1-D142-B67C-41AA10739FF6}"/>
+              </a:ext>
+            </a:extLst>
+          </p:cNvPr>
+          <p:cNvSpPr>
+            <a:spLocks noGrp="1"/>
+          </p:cNvSpPr>
+          <p:nvPr>
+            <p:ph type="body" idx="1"/>
+          </p:nvPr>
+        </p:nvSpPr>
+        <p:spPr>
+          <a:xfrm>
+            <a:off x="415600" y="1536632"/>
+            <a:ext cx="11360700" cy="4971743"/>
+          </a:xfrm>
+        </p:spPr>
+        <p:txBody>
+          <a:bodyPr/>
+          <a:lstStyle/>
+          <a:p>
+            <a:r>
+              <a:rPr lang="en-US" dirty="0"/>
+              <a:t>No built-in way to do “most recent value” (need to pre-compute)</a:t>
+            </a:r>
+            <a:br>
+              <a:rPr lang="en-US" dirty="0"/>
+            </a:br>
+            <a:endParaRPr lang="en-US" dirty="0"/>
+          </a:p>
+          <a:p>
+            <a:r>
+              <a:rPr lang="en-US" dirty="0"/>
+              <a:t>Single/identical values still considered aggregates (can just take “max”)</a:t>
+            </a:r>
+            <a:br>
+              <a:rPr lang="en-US" dirty="0"/>
+            </a:br>
+            <a:endParaRPr lang="en-US" dirty="0"/>
+          </a:p>
+          <a:p>
+            <a:r>
+              <a:rPr lang="en-US" dirty="0" err="1"/>
+              <a:t>Categoricals</a:t>
+            </a:r>
+            <a:r>
+              <a:rPr lang="en-US" dirty="0"/>
+              <a:t> get aggregated, too (one-hot encoded first)</a:t>
+            </a:r>
+            <a:br>
+              <a:rPr lang="en-US" dirty="0"/>
+            </a:br>
+            <a:endParaRPr lang="en-US" dirty="0"/>
+          </a:p>
+          <a:p>
+            <a:r>
+              <a:rPr lang="en-US" dirty="0"/>
+              <a:t>Postgres column length limits / truncation</a:t>
+            </a:r>
+            <a:br>
+              <a:rPr lang="en-US" dirty="0"/>
+            </a:br>
+            <a:endParaRPr lang="en-US" dirty="0"/>
+          </a:p>
+          <a:p>
+            <a:r>
+              <a:rPr lang="en-US" dirty="0"/>
+              <a:t>Need to specify imputation strategy for all features (can do at aggregate-level)</a:t>
+            </a:r>
+            <a:br>
+              <a:rPr lang="en-US" dirty="0"/>
+            </a:br>
+            <a:endParaRPr lang="en-US" dirty="0"/>
+          </a:p>
+          <a:p>
+            <a:r>
+              <a:rPr lang="en-US" dirty="0"/>
+              <a:t>May want to pre-compute especially computationally expensive features</a:t>
+            </a:r>
+          </a:p>
+        </p:txBody>
+      </p:sp>
+    </p:spTree>
+    <p:extLst>
+      <p:ext uri="{BB962C8B-B14F-4D97-AF65-F5344CB8AC3E}">
+        <p14:creationId xmlns:p14="http://schemas.microsoft.com/office/powerpoint/2010/main" val="1869063645"/>
+      </p:ext>
+    </p:extLst>
+  </p:cSld>
+  <p:clrMapOvr>
+    <a:masterClrMapping/>
+  </p:clrMapOvr>
+  <p:timing>
+    <p:tnLst>
+      <p:par>
+        <p:cTn id="1" dur="indefinite" restart="never" nodeType="tmRoot">
+          <p:childTnLst>
+            <p:seq concurrent="1" nextAc="seek">
+              <p:cTn id="2" dur="indefinite" nodeType="mainSeq">
+                <p:childTnLst>
+                  <p:par>
+                    <p:cTn id="3" fill="hold">
+                      <p:stCondLst>
+                        <p:cond delay="indefinite"/>
+                      </p:stCondLst>
+                      <p:childTnLst>
+                        <p:par>
+                          <p:cTn id="4" fill="hold">
+                            <p:stCondLst>
+                              <p:cond delay="0"/>
+                            </p:stCondLst>
+                            <p:childTnLst>
+                              <p:par>
+                                <p:cTn id="5" presetID="1" presetClass="entr" presetSubtype="0" fill="hold" grpId="0" nodeType="clickEffect">
+                                  <p:stCondLst>
+                                    <p:cond delay="0"/>
+                                  </p:stCondLst>
+                                  <p:childTnLst>
+                                    <p:set>
+                                      <p:cBhvr>
+                                        <p:cTn id="6" dur="1" fill="hold">
+                                          <p:stCondLst>
+                                            <p:cond delay="0"/>
+                                          </p:stCondLst>
+                                        </p:cTn>
+                                        <p:tgtEl>
+                                          <p:spTgt spid="3">
+                                            <p:txEl>
+                                              <p:pRg st="0" end="0"/>
+                                            </p:txEl>
+                                          </p:spTgt>
+                                        </p:tgtEl>
+                                        <p:attrNameLst>
+                                          <p:attrName>style.visibility</p:attrName>
+                                        </p:attrNameLst>
+                                      </p:cBhvr>
+                                      <p:to>
+                                        <p:strVal val="visible"/>
+                                      </p:to>
+                                    </p:set>
+                                  </p:childTnLst>
+                                </p:cTn>
+                              </p:par>
+                            </p:childTnLst>
+                          </p:cTn>
+                        </p:par>
+                      </p:childTnLst>
+                    </p:cTn>
+                  </p:par>
+                  <p:par>
+                    <p:cTn id="7" fill="hold">
+                      <p:stCondLst>
+                        <p:cond delay="indefinite"/>
+                      </p:stCondLst>
+                      <p:childTnLst>
+                        <p:par>
+                          <p:cTn id="8" fill="hold">
+                            <p:stCondLst>
+                              <p:cond delay="0"/>
+                            </p:stCondLst>
+                            <p:childTnLst>
+                              <p:par>
+                                <p:cTn id="9" presetID="1" presetClass="entr" presetSubtype="0" fill="hold" grpId="0" nodeType="clickEffect">
+                                  <p:stCondLst>
+                                    <p:cond delay="0"/>
+                                  </p:stCondLst>
+                                  <p:childTnLst>
+                                    <p:set>
+                                      <p:cBhvr>
+                                        <p:cTn id="10" dur="1" fill="hold">
+                                          <p:stCondLst>
+                                            <p:cond delay="0"/>
+                                          </p:stCondLst>
+                                        </p:cTn>
+                                        <p:tgtEl>
+                                          <p:spTgt spid="3">
+                                            <p:txEl>
+                                              <p:pRg st="1" end="1"/>
+                                            </p:txEl>
+                                          </p:spTgt>
+                                        </p:tgtEl>
+                                        <p:attrNameLst>
+                                          <p:attrName>style.visibility</p:attrName>
+                                        </p:attrNameLst>
+                                      </p:cBhvr>
+                                      <p:to>
+                                        <p:strVal val="visible"/>
+                                      </p:to>
+                                    </p:set>
+                                  </p:childTnLst>
+                                </p:cTn>
+                              </p:par>
+                            </p:childTnLst>
+                          </p:cTn>
+                        </p:par>
+                      </p:childTnLst>
+                    </p:cTn>
+                  </p:par>
+                  <p:par>
+                    <p:cTn id="11" fill="hold">
+                      <p:stCondLst>
+                        <p:cond delay="indefinite"/>
+                      </p:stCondLst>
+                      <p:childTnLst>
+                        <p:par>
+                          <p:cTn id="12" fill="hold">
+                            <p:stCondLst>
+                              <p:cond delay="0"/>
+                            </p:stCondLst>
+                            <p:childTnLst>
+                              <p:par>
+                                <p:cTn id="13" presetID="1" presetClass="entr" presetSubtype="0" fill="hold" grpId="0" nodeType="clickEffect">
+                                  <p:stCondLst>
+                                    <p:cond delay="0"/>
+                                  </p:stCondLst>
+                                  <p:childTnLst>
+                                    <p:set>
+                                      <p:cBhvr>
+                                        <p:cTn id="14" dur="1" fill="hold">
+                                          <p:stCondLst>
+                                            <p:cond delay="0"/>
+                                          </p:stCondLst>
+                                        </p:cTn>
+                                        <p:tgtEl>
+                                          <p:spTgt spid="3">
+                                            <p:txEl>
+                                              <p:pRg st="2" end="2"/>
+                                            </p:txEl>
+                                          </p:spTgt>
+                                        </p:tgtEl>
+                                        <p:attrNameLst>
+                                          <p:attrName>style.visibility</p:attrName>
+                                        </p:attrNameLst>
+                                      </p:cBhvr>
+                                      <p:to>
+                                        <p:strVal val="visible"/>
+                                      </p:to>
+                                    </p:set>
+                                  </p:childTnLst>
+                                </p:cTn>
+                              </p:par>
+                            </p:childTnLst>
+                          </p:cTn>
+                        </p:par>
+                      </p:childTnLst>
+                    </p:cTn>
+                  </p:par>
+                  <p:par>
+                    <p:cTn id="15" fill="hold">
+                      <p:stCondLst>
+                        <p:cond delay="indefinite"/>
+                      </p:stCondLst>
+                      <p:childTnLst>
+                        <p:par>
+                          <p:cTn id="16" fill="hold">
+                            <p:stCondLst>
+                              <p:cond delay="0"/>
+                            </p:stCondLst>
+                            <p:childTnLst>
+                              <p:par>
+                                <p:cTn id="17" presetID="1" presetClass="entr" presetSubtype="0" fill="hold" grpId="0" nodeType="clickEffect">
+                                  <p:stCondLst>
+                                    <p:cond delay="0"/>
+                                  </p:stCondLst>
+                                  <p:childTnLst>
+                                    <p:set>
+                                      <p:cBhvr>
+                                        <p:cTn id="18" dur="1" fill="hold">
+                                          <p:stCondLst>
+                                            <p:cond delay="0"/>
+                                          </p:stCondLst>
+                                        </p:cTn>
+                                        <p:tgtEl>
+                                          <p:spTgt spid="3">
+                                            <p:txEl>
+                                              <p:pRg st="3" end="3"/>
+                                            </p:txEl>
+                                          </p:spTgt>
+                                        </p:tgtEl>
+                                        <p:attrNameLst>
+                                          <p:attrName>style.visibility</p:attrName>
+                                        </p:attrNameLst>
+                                      </p:cBhvr>
+                                      <p:to>
+                                        <p:strVal val="visible"/>
+                                      </p:to>
+                                    </p:set>
+                                  </p:childTnLst>
+                                </p:cTn>
+                              </p:par>
+                            </p:childTnLst>
+                          </p:cTn>
+                        </p:par>
+                      </p:childTnLst>
+                    </p:cTn>
+                  </p:par>
+                  <p:par>
+                    <p:cTn id="19" fill="hold">
+                      <p:stCondLst>
+                        <p:cond delay="indefinite"/>
+                      </p:stCondLst>
+                      <p:childTnLst>
+                        <p:par>
+                          <p:cTn id="20" fill="hold">
+                            <p:stCondLst>
+                              <p:cond delay="0"/>
+                            </p:stCondLst>
+                            <p:childTnLst>
+                              <p:par>
+                                <p:cTn id="21" presetID="1" presetClass="entr" presetSubtype="0" fill="hold" grpId="0" nodeType="clickEffect">
+                                  <p:stCondLst>
+                                    <p:cond delay="0"/>
+                                  </p:stCondLst>
+                                  <p:childTnLst>
+                                    <p:set>
+                                      <p:cBhvr>
+                                        <p:cTn id="22" dur="1" fill="hold">
+                                          <p:stCondLst>
+                                            <p:cond delay="0"/>
+                                          </p:stCondLst>
+                                        </p:cTn>
+                                        <p:tgtEl>
+                                          <p:spTgt spid="3">
+                                            <p:txEl>
+                                              <p:pRg st="4" end="4"/>
+                                            </p:txEl>
+                                          </p:spTgt>
+                                        </p:tgtEl>
+                                        <p:attrNameLst>
+                                          <p:attrName>style.visibility</p:attrName>
+                                        </p:attrNameLst>
+                                      </p:cBhvr>
+                                      <p:to>
+                                        <p:strVal val="visible"/>
+                                      </p:to>
+                                    </p:set>
+                                  </p:childTnLst>
+                                </p:cTn>
+                              </p:par>
+                            </p:childTnLst>
+                          </p:cTn>
+                        </p:par>
+                      </p:childTnLst>
+                    </p:cTn>
+                  </p:par>
+                  <p:par>
+                    <p:cTn id="23" fill="hold">
+                      <p:stCondLst>
+                        <p:cond delay="indefinite"/>
+                      </p:stCondLst>
+                      <p:childTnLst>
+                        <p:par>
+                          <p:cTn id="24" fill="hold">
+                            <p:stCondLst>
+                              <p:cond delay="0"/>
+                            </p:stCondLst>
+                            <p:childTnLst>
+                              <p:par>
+                                <p:cTn id="25" presetID="1" presetClass="entr" presetSubtype="0" fill="hold" grpId="0" nodeType="clickEffect">
+                                  <p:stCondLst>
+                                    <p:cond delay="0"/>
+                                  </p:stCondLst>
+                                  <p:childTnLst>
+                                    <p:set>
+                                      <p:cBhvr>
+                                        <p:cTn id="26" dur="1" fill="hold">
+                                          <p:stCondLst>
+                                            <p:cond delay="0"/>
+                                          </p:stCondLst>
+                                        </p:cTn>
+                                        <p:tgtEl>
+                                          <p:spTgt spid="3">
+                                            <p:txEl>
+                                              <p:pRg st="5" end="5"/>
+                                            </p:txEl>
+                                          </p:spTgt>
+                                        </p:tgtEl>
+                                        <p:attrNameLst>
+                                          <p:attrName>style.visibility</p:attrName>
+                                        </p:attrNameLst>
+                                      </p:cBhvr>
+                                      <p:to>
+                                        <p:strVal val="visible"/>
+                                      </p:to>
+                                    </p:set>
+                                  </p:childTnLst>
+                                </p:cTn>
+                              </p:par>
+                            </p:childTnLst>
+                          </p:cTn>
+                        </p:par>
+                      </p:childTnLst>
+                    </p:cTn>
+                  </p:par>
+                </p:childTnLst>
+              </p:cTn>
+              <p:prevCondLst>
+                <p:cond evt="onPrev" delay="0">
+                  <p:tgtEl>
+                    <p:sldTgt/>
+                  </p:tgtEl>
+                </p:cond>
+              </p:prevCondLst>
+              <p:nextCondLst>
+                <p:cond evt="onNext" delay="0">
+                  <p:tgtEl>
+                    <p:sldTgt/>
+                  </p:tgtEl>
+                </p:cond>
+              </p:nextCondLst>
+            </p:seq>
+          </p:childTnLst>
+        </p:cTn>
+      </p:par>
+    </p:tnLst>
+    <p:bldLst>
+      <p:bldP spid="3" grpId="0" build="p"/>
+    </p:bldLst>
+  </p:timing>
+</p:sld>
+</file>
+
+<file path=ppt/slides/slide27.xml><?xml version="1.0" encoding="utf-8"?>
 <p:sld xmlns:a="http://schemas.openxmlformats.org/drawingml/2006/main" xmlns:r="http://schemas.openxmlformats.org/officeDocument/2006/relationships" xmlns:p="http://schemas.openxmlformats.org/presentationml/2006/main">
   <p:cSld>
     <p:spTree>
@@ -18120,7 +20214,7 @@
 </p:sld>
 </file>
 
-<file path=ppt/slides/slide21.xml><?xml version="1.0" encoding="utf-8"?>
+<file path=ppt/slides/slide28.xml><?xml version="1.0" encoding="utf-8"?>
 <p:sld xmlns:a="http://schemas.openxmlformats.org/drawingml/2006/main" xmlns:r="http://schemas.openxmlformats.org/officeDocument/2006/relationships" xmlns:p="http://schemas.openxmlformats.org/presentationml/2006/main">
   <p:cSld>
     <p:spTree>
@@ -18217,7 +20311,7 @@
 </p:sld>
 </file>
 
-<file path=ppt/slides/slide22.xml><?xml version="1.0" encoding="utf-8"?>
+<file path=ppt/slides/slide29.xml><?xml version="1.0" encoding="utf-8"?>
 <p:sld xmlns:a="http://schemas.openxmlformats.org/drawingml/2006/main" xmlns:r="http://schemas.openxmlformats.org/officeDocument/2006/relationships" xmlns:p="http://schemas.openxmlformats.org/presentationml/2006/main">
   <p:cSld>
     <p:spTree>
@@ -18509,7 +20603,205 @@
 </p:sld>
 </file>
 
-<file path=ppt/slides/slide23.xml><?xml version="1.0" encoding="utf-8"?>
+<file path=ppt/slides/slide3.xml><?xml version="1.0" encoding="utf-8"?>
+<p:sld xmlns:a="http://schemas.openxmlformats.org/drawingml/2006/main" xmlns:r="http://schemas.openxmlformats.org/officeDocument/2006/relationships" xmlns:p="http://schemas.openxmlformats.org/presentationml/2006/main">
+  <p:cSld>
+    <p:spTree>
+      <p:nvGrpSpPr>
+        <p:cNvPr id="1" name=""/>
+        <p:cNvGrpSpPr/>
+        <p:nvPr/>
+      </p:nvGrpSpPr>
+      <p:grpSpPr>
+        <a:xfrm>
+          <a:off x="0" y="0"/>
+          <a:ext cx="0" cy="0"/>
+          <a:chOff x="0" y="0"/>
+          <a:chExt cx="0" cy="0"/>
+        </a:xfrm>
+      </p:grpSpPr>
+      <p:sp>
+        <p:nvSpPr>
+          <p:cNvPr id="3" name="Title 2">
+            <a:extLst>
+              <a:ext uri="{FF2B5EF4-FFF2-40B4-BE49-F238E27FC236}">
+                <a16:creationId xmlns:a16="http://schemas.microsoft.com/office/drawing/2014/main" id="{9323871C-7CA8-1448-8FFC-1AE6E1838941}"/>
+              </a:ext>
+            </a:extLst>
+          </p:cNvPr>
+          <p:cNvSpPr>
+            <a:spLocks noGrp="1"/>
+          </p:cNvSpPr>
+          <p:nvPr>
+            <p:ph type="title"/>
+          </p:nvPr>
+        </p:nvSpPr>
+        <p:spPr/>
+        <p:txBody>
+          <a:bodyPr/>
+          <a:lstStyle/>
+          <a:p>
+            <a:r>
+              <a:rPr lang="en-US" dirty="0"/>
+              <a:t>Reminders</a:t>
+            </a:r>
+          </a:p>
+        </p:txBody>
+      </p:sp>
+      <p:sp>
+        <p:nvSpPr>
+          <p:cNvPr id="5" name="Text Placeholder 4">
+            <a:extLst>
+              <a:ext uri="{FF2B5EF4-FFF2-40B4-BE49-F238E27FC236}">
+                <a16:creationId xmlns:a16="http://schemas.microsoft.com/office/drawing/2014/main" id="{F4E0A5F0-1D89-954D-91FB-596CD9E690F2}"/>
+              </a:ext>
+            </a:extLst>
+          </p:cNvPr>
+          <p:cNvSpPr>
+            <a:spLocks noGrp="1"/>
+          </p:cNvSpPr>
+          <p:nvPr>
+            <p:ph type="body" idx="1"/>
+          </p:nvPr>
+        </p:nvSpPr>
+        <p:spPr/>
+        <p:txBody>
+          <a:bodyPr/>
+          <a:lstStyle/>
+          <a:p>
+            <a:pPr marL="76200" indent="0">
+              <a:buNone/>
+            </a:pPr>
+            <a:r>
+              <a:rPr lang="en-US" b="1" dirty="0">
+                <a:solidFill>
+                  <a:schemeClr val="tx1">
+                    <a:lumMod val="75000"/>
+                    <a:lumOff val="25000"/>
+                  </a:schemeClr>
+                </a:solidFill>
+              </a:rPr>
+              <a:t>This week:</a:t>
+            </a:r>
+          </a:p>
+          <a:p>
+            <a:r>
+              <a:rPr lang="en-US" dirty="0">
+                <a:solidFill>
+                  <a:schemeClr val="tx1">
+                    <a:lumMod val="75000"/>
+                    <a:lumOff val="25000"/>
+                  </a:schemeClr>
+                </a:solidFill>
+              </a:rPr>
+              <a:t>Tomorrow: Wednesday Group Check-Ins</a:t>
+            </a:r>
+          </a:p>
+          <a:p>
+            <a:r>
+              <a:rPr lang="en-US" dirty="0">
+                <a:solidFill>
+                  <a:schemeClr val="tx1">
+                    <a:lumMod val="75000"/>
+                    <a:lumOff val="25000"/>
+                  </a:schemeClr>
+                </a:solidFill>
+              </a:rPr>
+              <a:t>Thursday: Triage Q&amp;A + time for group work</a:t>
+            </a:r>
+            <a:endParaRPr lang="en-US" b="1" dirty="0">
+              <a:solidFill>
+                <a:schemeClr val="tx1">
+                  <a:lumMod val="75000"/>
+                  <a:lumOff val="25000"/>
+                </a:schemeClr>
+              </a:solidFill>
+            </a:endParaRPr>
+          </a:p>
+          <a:p>
+            <a:pPr marL="76200" indent="0">
+              <a:buNone/>
+            </a:pPr>
+            <a:endParaRPr lang="en-US" b="1" dirty="0">
+              <a:solidFill>
+                <a:schemeClr val="tx1">
+                  <a:lumMod val="75000"/>
+                  <a:lumOff val="25000"/>
+                </a:schemeClr>
+              </a:solidFill>
+            </a:endParaRPr>
+          </a:p>
+          <a:p>
+            <a:pPr marL="76200" indent="0">
+              <a:buNone/>
+            </a:pPr>
+            <a:r>
+              <a:rPr lang="en-US" b="1" dirty="0">
+                <a:solidFill>
+                  <a:schemeClr val="tx1">
+                    <a:lumMod val="75000"/>
+                    <a:lumOff val="25000"/>
+                  </a:schemeClr>
+                </a:solidFill>
+              </a:rPr>
+              <a:t>Coming up after fall break:</a:t>
+            </a:r>
+          </a:p>
+          <a:p>
+            <a:r>
+              <a:rPr lang="en-US" dirty="0">
+                <a:solidFill>
+                  <a:schemeClr val="tx1">
+                    <a:lumMod val="75000"/>
+                    <a:lumOff val="25000"/>
+                  </a:schemeClr>
+                </a:solidFill>
+              </a:rPr>
+              <a:t>Monday: Project Update 3</a:t>
+            </a:r>
+          </a:p>
+          <a:p>
+            <a:r>
+              <a:rPr lang="en-US" dirty="0">
+                <a:solidFill>
+                  <a:schemeClr val="tx1">
+                    <a:lumMod val="75000"/>
+                    <a:lumOff val="25000"/>
+                  </a:schemeClr>
+                </a:solidFill>
+              </a:rPr>
+              <a:t>Tuesday: Weekly Feedback Form</a:t>
+            </a:r>
+          </a:p>
+          <a:p>
+            <a:r>
+              <a:rPr lang="en-US" dirty="0">
+                <a:solidFill>
+                  <a:schemeClr val="tx1">
+                    <a:lumMod val="75000"/>
+                    <a:lumOff val="25000"/>
+                  </a:schemeClr>
+                </a:solidFill>
+              </a:rPr>
+              <a:t>Tuesday: Building Features in Triage</a:t>
+            </a:r>
+          </a:p>
+        </p:txBody>
+      </p:sp>
+    </p:spTree>
+    <p:extLst>
+      <p:ext uri="{BB962C8B-B14F-4D97-AF65-F5344CB8AC3E}">
+        <p14:creationId xmlns:p14="http://schemas.microsoft.com/office/powerpoint/2010/main" val="186046226"/>
+      </p:ext>
+    </p:extLst>
+  </p:cSld>
+  <p:clrMapOvr>
+    <a:masterClrMapping/>
+  </p:clrMapOvr>
+</p:sld>
+</file>
+
+<file path=ppt/slides/slide30.xml><?xml version="1.0" encoding="utf-8"?>
 <p:sld xmlns:a="http://schemas.openxmlformats.org/drawingml/2006/main" xmlns:r="http://schemas.openxmlformats.org/officeDocument/2006/relationships" xmlns:p="http://schemas.openxmlformats.org/presentationml/2006/main">
   <p:cSld>
     <p:spTree>
@@ -18645,7 +20937,7 @@
 </p:sld>
 </file>
 
-<file path=ppt/slides/slide24.xml><?xml version="1.0" encoding="utf-8"?>
+<file path=ppt/slides/slide31.xml><?xml version="1.0" encoding="utf-8"?>
 <p:sld xmlns:a="http://schemas.openxmlformats.org/drawingml/2006/main" xmlns:r="http://schemas.openxmlformats.org/officeDocument/2006/relationships" xmlns:p="http://schemas.openxmlformats.org/presentationml/2006/main">
   <p:cSld>
     <p:spTree>
@@ -18825,7 +21117,7 @@
 </p:sld>
 </file>
 
-<file path=ppt/slides/slide25.xml><?xml version="1.0" encoding="utf-8"?>
+<file path=ppt/slides/slide32.xml><?xml version="1.0" encoding="utf-8"?>
 <p:sld xmlns:a="http://schemas.openxmlformats.org/drawingml/2006/main" xmlns:r="http://schemas.openxmlformats.org/officeDocument/2006/relationships" xmlns:p="http://schemas.openxmlformats.org/presentationml/2006/main">
   <p:cSld>
     <p:spTree>
@@ -18978,7 +21270,7 @@
 </p:sld>
 </file>
 
-<file path=ppt/slides/slide26.xml><?xml version="1.0" encoding="utf-8"?>
+<file path=ppt/slides/slide33.xml><?xml version="1.0" encoding="utf-8"?>
 <p:sld xmlns:a="http://schemas.openxmlformats.org/drawingml/2006/main" xmlns:r="http://schemas.openxmlformats.org/officeDocument/2006/relationships" xmlns:p="http://schemas.openxmlformats.org/presentationml/2006/main">
   <p:cSld>
     <p:spTree>
@@ -19078,7 +21370,7 @@
 </p:sld>
 </file>
 
-<file path=ppt/slides/slide27.xml><?xml version="1.0" encoding="utf-8"?>
+<file path=ppt/slides/slide34.xml><?xml version="1.0" encoding="utf-8"?>
 <p:sld xmlns:a="http://schemas.openxmlformats.org/drawingml/2006/main" xmlns:r="http://schemas.openxmlformats.org/officeDocument/2006/relationships" xmlns:p="http://schemas.openxmlformats.org/presentationml/2006/main">
   <p:cSld>
     <p:spTree>
@@ -19179,7 +21471,7 @@
 </p:sld>
 </file>
 
-<file path=ppt/slides/slide28.xml><?xml version="1.0" encoding="utf-8"?>
+<file path=ppt/slides/slide35.xml><?xml version="1.0" encoding="utf-8"?>
 <p:sld xmlns:a="http://schemas.openxmlformats.org/drawingml/2006/main" xmlns:r="http://schemas.openxmlformats.org/officeDocument/2006/relationships" xmlns:p="http://schemas.openxmlformats.org/presentationml/2006/main">
   <p:cSld>
     <p:spTree>
@@ -19292,7 +21584,7 @@
 </p:sld>
 </file>
 
-<file path=ppt/slides/slide29.xml><?xml version="1.0" encoding="utf-8"?>
+<file path=ppt/slides/slide36.xml><?xml version="1.0" encoding="utf-8"?>
 <p:sld xmlns:a="http://schemas.openxmlformats.org/drawingml/2006/main" xmlns:r="http://schemas.openxmlformats.org/officeDocument/2006/relationships" xmlns:p="http://schemas.openxmlformats.org/presentationml/2006/main">
   <p:cSld>
     <p:spTree>
@@ -19432,205 +21724,7 @@
 </p:sld>
 </file>
 
-<file path=ppt/slides/slide3.xml><?xml version="1.0" encoding="utf-8"?>
-<p:sld xmlns:a="http://schemas.openxmlformats.org/drawingml/2006/main" xmlns:r="http://schemas.openxmlformats.org/officeDocument/2006/relationships" xmlns:p="http://schemas.openxmlformats.org/presentationml/2006/main">
-  <p:cSld>
-    <p:spTree>
-      <p:nvGrpSpPr>
-        <p:cNvPr id="1" name=""/>
-        <p:cNvGrpSpPr/>
-        <p:nvPr/>
-      </p:nvGrpSpPr>
-      <p:grpSpPr>
-        <a:xfrm>
-          <a:off x="0" y="0"/>
-          <a:ext cx="0" cy="0"/>
-          <a:chOff x="0" y="0"/>
-          <a:chExt cx="0" cy="0"/>
-        </a:xfrm>
-      </p:grpSpPr>
-      <p:sp>
-        <p:nvSpPr>
-          <p:cNvPr id="3" name="Title 2">
-            <a:extLst>
-              <a:ext uri="{FF2B5EF4-FFF2-40B4-BE49-F238E27FC236}">
-                <a16:creationId xmlns:a16="http://schemas.microsoft.com/office/drawing/2014/main" id="{9323871C-7CA8-1448-8FFC-1AE6E1838941}"/>
-              </a:ext>
-            </a:extLst>
-          </p:cNvPr>
-          <p:cNvSpPr>
-            <a:spLocks noGrp="1"/>
-          </p:cNvSpPr>
-          <p:nvPr>
-            <p:ph type="title"/>
-          </p:nvPr>
-        </p:nvSpPr>
-        <p:spPr/>
-        <p:txBody>
-          <a:bodyPr/>
-          <a:lstStyle/>
-          <a:p>
-            <a:r>
-              <a:rPr lang="en-US" dirty="0"/>
-              <a:t>Reminders</a:t>
-            </a:r>
-          </a:p>
-        </p:txBody>
-      </p:sp>
-      <p:sp>
-        <p:nvSpPr>
-          <p:cNvPr id="5" name="Text Placeholder 4">
-            <a:extLst>
-              <a:ext uri="{FF2B5EF4-FFF2-40B4-BE49-F238E27FC236}">
-                <a16:creationId xmlns:a16="http://schemas.microsoft.com/office/drawing/2014/main" id="{F4E0A5F0-1D89-954D-91FB-596CD9E690F2}"/>
-              </a:ext>
-            </a:extLst>
-          </p:cNvPr>
-          <p:cNvSpPr>
-            <a:spLocks noGrp="1"/>
-          </p:cNvSpPr>
-          <p:nvPr>
-            <p:ph type="body" idx="1"/>
-          </p:nvPr>
-        </p:nvSpPr>
-        <p:spPr/>
-        <p:txBody>
-          <a:bodyPr/>
-          <a:lstStyle/>
-          <a:p>
-            <a:pPr marL="76200" indent="0">
-              <a:buNone/>
-            </a:pPr>
-            <a:r>
-              <a:rPr lang="en-US" b="1" dirty="0">
-                <a:solidFill>
-                  <a:schemeClr val="tx1">
-                    <a:lumMod val="75000"/>
-                    <a:lumOff val="25000"/>
-                  </a:schemeClr>
-                </a:solidFill>
-              </a:rPr>
-              <a:t>This week:</a:t>
-            </a:r>
-          </a:p>
-          <a:p>
-            <a:r>
-              <a:rPr lang="en-US" dirty="0">
-                <a:solidFill>
-                  <a:schemeClr val="tx1">
-                    <a:lumMod val="75000"/>
-                    <a:lumOff val="25000"/>
-                  </a:schemeClr>
-                </a:solidFill>
-              </a:rPr>
-              <a:t>Tomorrow: Wednesday Group Check-Ins</a:t>
-            </a:r>
-          </a:p>
-          <a:p>
-            <a:r>
-              <a:rPr lang="en-US" dirty="0">
-                <a:solidFill>
-                  <a:schemeClr val="tx1">
-                    <a:lumMod val="75000"/>
-                    <a:lumOff val="25000"/>
-                  </a:schemeClr>
-                </a:solidFill>
-              </a:rPr>
-              <a:t>Thursday: Triage Q&amp;A + time for group work</a:t>
-            </a:r>
-            <a:endParaRPr lang="en-US" b="1" dirty="0">
-              <a:solidFill>
-                <a:schemeClr val="tx1">
-                  <a:lumMod val="75000"/>
-                  <a:lumOff val="25000"/>
-                </a:schemeClr>
-              </a:solidFill>
-            </a:endParaRPr>
-          </a:p>
-          <a:p>
-            <a:pPr marL="76200" indent="0">
-              <a:buNone/>
-            </a:pPr>
-            <a:endParaRPr lang="en-US" b="1" dirty="0">
-              <a:solidFill>
-                <a:schemeClr val="tx1">
-                  <a:lumMod val="75000"/>
-                  <a:lumOff val="25000"/>
-                </a:schemeClr>
-              </a:solidFill>
-            </a:endParaRPr>
-          </a:p>
-          <a:p>
-            <a:pPr marL="76200" indent="0">
-              <a:buNone/>
-            </a:pPr>
-            <a:r>
-              <a:rPr lang="en-US" b="1" dirty="0">
-                <a:solidFill>
-                  <a:schemeClr val="tx1">
-                    <a:lumMod val="75000"/>
-                    <a:lumOff val="25000"/>
-                  </a:schemeClr>
-                </a:solidFill>
-              </a:rPr>
-              <a:t>Coming up after fall break:</a:t>
-            </a:r>
-          </a:p>
-          <a:p>
-            <a:r>
-              <a:rPr lang="en-US" dirty="0">
-                <a:solidFill>
-                  <a:schemeClr val="tx1">
-                    <a:lumMod val="75000"/>
-                    <a:lumOff val="25000"/>
-                  </a:schemeClr>
-                </a:solidFill>
-              </a:rPr>
-              <a:t>Monday: Project Update 3</a:t>
-            </a:r>
-          </a:p>
-          <a:p>
-            <a:r>
-              <a:rPr lang="en-US" dirty="0">
-                <a:solidFill>
-                  <a:schemeClr val="tx1">
-                    <a:lumMod val="75000"/>
-                    <a:lumOff val="25000"/>
-                  </a:schemeClr>
-                </a:solidFill>
-              </a:rPr>
-              <a:t>Tuesday: Weekly Feedback Form</a:t>
-            </a:r>
-          </a:p>
-          <a:p>
-            <a:r>
-              <a:rPr lang="en-US" dirty="0">
-                <a:solidFill>
-                  <a:schemeClr val="tx1">
-                    <a:lumMod val="75000"/>
-                    <a:lumOff val="25000"/>
-                  </a:schemeClr>
-                </a:solidFill>
-              </a:rPr>
-              <a:t>Tuesday: Building Features in Triage</a:t>
-            </a:r>
-          </a:p>
-        </p:txBody>
-      </p:sp>
-    </p:spTree>
-    <p:extLst>
-      <p:ext uri="{BB962C8B-B14F-4D97-AF65-F5344CB8AC3E}">
-        <p14:creationId xmlns:p14="http://schemas.microsoft.com/office/powerpoint/2010/main" val="186046226"/>
-      </p:ext>
-    </p:extLst>
-  </p:cSld>
-  <p:clrMapOvr>
-    <a:masterClrMapping/>
-  </p:clrMapOvr>
-</p:sld>
-</file>
-
-<file path=ppt/slides/slide30.xml><?xml version="1.0" encoding="utf-8"?>
+<file path=ppt/slides/slide37.xml><?xml version="1.0" encoding="utf-8"?>
 <p:sld xmlns:a="http://schemas.openxmlformats.org/drawingml/2006/main" xmlns:r="http://schemas.openxmlformats.org/officeDocument/2006/relationships" xmlns:p="http://schemas.openxmlformats.org/presentationml/2006/main">
   <p:cSld>
     <p:spTree>
@@ -19812,7 +21906,7 @@
 </p:sld>
 </file>
 
-<file path=ppt/slides/slide31.xml><?xml version="1.0" encoding="utf-8"?>
+<file path=ppt/slides/slide38.xml><?xml version="1.0" encoding="utf-8"?>
 <p:sld xmlns:a="http://schemas.openxmlformats.org/drawingml/2006/main" xmlns:r="http://schemas.openxmlformats.org/officeDocument/2006/relationships" xmlns:p="http://schemas.openxmlformats.org/presentationml/2006/main">
   <p:cSld>
     <p:spTree>
@@ -19992,7 +22086,7 @@
 </p:sld>
 </file>
 
-<file path=ppt/slides/slide32.xml><?xml version="1.0" encoding="utf-8"?>
+<file path=ppt/slides/slide39.xml><?xml version="1.0" encoding="utf-8"?>
 <p:sld xmlns:a="http://schemas.openxmlformats.org/drawingml/2006/main" xmlns:r="http://schemas.openxmlformats.org/officeDocument/2006/relationships" xmlns:p="http://schemas.openxmlformats.org/presentationml/2006/main">
   <p:cSld>
     <p:spTree>
@@ -20174,7 +22268,131 @@
 </p:sld>
 </file>
 
-<file path=ppt/slides/slide33.xml><?xml version="1.0" encoding="utf-8"?>
+<file path=ppt/slides/slide4.xml><?xml version="1.0" encoding="utf-8"?>
+<p:sld xmlns:a="http://schemas.openxmlformats.org/drawingml/2006/main" xmlns:r="http://schemas.openxmlformats.org/officeDocument/2006/relationships" xmlns:p="http://schemas.openxmlformats.org/presentationml/2006/main">
+  <p:cSld>
+    <p:spTree>
+      <p:nvGrpSpPr>
+        <p:cNvPr id="1" name=""/>
+        <p:cNvGrpSpPr/>
+        <p:nvPr/>
+      </p:nvGrpSpPr>
+      <p:grpSpPr>
+        <a:xfrm>
+          <a:off x="0" y="0"/>
+          <a:ext cx="0" cy="0"/>
+          <a:chOff x="0" y="0"/>
+          <a:chExt cx="0" cy="0"/>
+        </a:xfrm>
+      </p:grpSpPr>
+      <p:sp>
+        <p:nvSpPr>
+          <p:cNvPr id="2" name="Title 1">
+            <a:extLst>
+              <a:ext uri="{FF2B5EF4-FFF2-40B4-BE49-F238E27FC236}">
+                <a16:creationId xmlns:a16="http://schemas.microsoft.com/office/drawing/2014/main" id="{A073B702-ED77-884E-88F7-92D73313F38D}"/>
+              </a:ext>
+            </a:extLst>
+          </p:cNvPr>
+          <p:cNvSpPr>
+            <a:spLocks noGrp="1"/>
+          </p:cNvSpPr>
+          <p:nvPr>
+            <p:ph type="title"/>
+          </p:nvPr>
+        </p:nvSpPr>
+        <p:spPr/>
+        <p:txBody>
+          <a:bodyPr/>
+          <a:lstStyle/>
+          <a:p>
+            <a:r>
+              <a:rPr lang="en-US" dirty="0"/>
+              <a:t>Plan for the week</a:t>
+            </a:r>
+          </a:p>
+        </p:txBody>
+      </p:sp>
+      <p:sp>
+        <p:nvSpPr>
+          <p:cNvPr id="3" name="Text Placeholder 2">
+            <a:extLst>
+              <a:ext uri="{FF2B5EF4-FFF2-40B4-BE49-F238E27FC236}">
+                <a16:creationId xmlns:a16="http://schemas.microsoft.com/office/drawing/2014/main" id="{7861BAD4-F7FB-1D48-9D37-2273592A75CE}"/>
+              </a:ext>
+            </a:extLst>
+          </p:cNvPr>
+          <p:cNvSpPr>
+            <a:spLocks noGrp="1"/>
+          </p:cNvSpPr>
+          <p:nvPr>
+            <p:ph type="body" idx="1"/>
+          </p:nvPr>
+        </p:nvSpPr>
+        <p:spPr/>
+        <p:txBody>
+          <a:bodyPr/>
+          <a:lstStyle/>
+          <a:p>
+            <a:r>
+              <a:rPr lang="en-US" dirty="0"/>
+              <a:t>What you should be discussing this week within your team</a:t>
+            </a:r>
+          </a:p>
+          <a:p>
+            <a:pPr lvl="1"/>
+            <a:r>
+              <a:rPr lang="en-US" dirty="0"/>
+              <a:t>Validation strategy &amp; temporal parameters</a:t>
+            </a:r>
+          </a:p>
+          <a:p>
+            <a:pPr lvl="1"/>
+            <a:r>
+              <a:rPr lang="en-US" dirty="0"/>
+              <a:t>Initial brainstorming features you’d like to build</a:t>
+            </a:r>
+          </a:p>
+          <a:p>
+            <a:pPr lvl="1"/>
+            <a:endParaRPr lang="en-US" dirty="0"/>
+          </a:p>
+          <a:p>
+            <a:r>
+              <a:rPr lang="en-US" dirty="0"/>
+              <a:t>What you should be building this week</a:t>
+            </a:r>
+          </a:p>
+          <a:p>
+            <a:pPr lvl="1"/>
+            <a:r>
+              <a:rPr lang="en-US" dirty="0"/>
+              <a:t>Temporal Validation Parameters</a:t>
+            </a:r>
+          </a:p>
+          <a:p>
+            <a:pPr lvl="1"/>
+            <a:r>
+              <a:rPr lang="en-US" dirty="0"/>
+              <a:t>Updated Cohort &amp; Label Queries</a:t>
+            </a:r>
+          </a:p>
+        </p:txBody>
+      </p:sp>
+    </p:spTree>
+    <p:extLst>
+      <p:ext uri="{BB962C8B-B14F-4D97-AF65-F5344CB8AC3E}">
+        <p14:creationId xmlns:p14="http://schemas.microsoft.com/office/powerpoint/2010/main" val="517800727"/>
+      </p:ext>
+    </p:extLst>
+  </p:cSld>
+  <p:clrMapOvr>
+    <a:masterClrMapping/>
+  </p:clrMapOvr>
+</p:sld>
+</file>
+
+<file path=ppt/slides/slide40.xml><?xml version="1.0" encoding="utf-8"?>
 <p:sld xmlns:a="http://schemas.openxmlformats.org/drawingml/2006/main" xmlns:r="http://schemas.openxmlformats.org/officeDocument/2006/relationships" xmlns:p="http://schemas.openxmlformats.org/presentationml/2006/main">
   <p:cSld>
     <p:spTree>
@@ -20356,7 +22574,7 @@
 </p:sld>
 </file>
 
-<file path=ppt/slides/slide34.xml><?xml version="1.0" encoding="utf-8"?>
+<file path=ppt/slides/slide41.xml><?xml version="1.0" encoding="utf-8"?>
 <p:sld xmlns:a="http://schemas.openxmlformats.org/drawingml/2006/main" xmlns:r="http://schemas.openxmlformats.org/officeDocument/2006/relationships" xmlns:p="http://schemas.openxmlformats.org/presentationml/2006/main">
   <p:cSld>
     <p:spTree>
@@ -20538,7 +22756,7 @@
 </p:sld>
 </file>
 
-<file path=ppt/slides/slide35.xml><?xml version="1.0" encoding="utf-8"?>
+<file path=ppt/slides/slide42.xml><?xml version="1.0" encoding="utf-8"?>
 <p:sld xmlns:a="http://schemas.openxmlformats.org/drawingml/2006/main" xmlns:r="http://schemas.openxmlformats.org/officeDocument/2006/relationships" xmlns:p="http://schemas.openxmlformats.org/presentationml/2006/main">
   <p:cSld>
     <p:spTree>
@@ -20651,7 +22869,7 @@
 </p:sld>
 </file>
 
-<file path=ppt/slides/slide36.xml><?xml version="1.0" encoding="utf-8"?>
+<file path=ppt/slides/slide43.xml><?xml version="1.0" encoding="utf-8"?>
 <p:sld xmlns:a="http://schemas.openxmlformats.org/drawingml/2006/main" xmlns:r="http://schemas.openxmlformats.org/officeDocument/2006/relationships" xmlns:p="http://schemas.openxmlformats.org/presentationml/2006/main">
   <p:cSld>
     <p:spTree>
@@ -20734,7 +22952,7 @@
 </p:sld>
 </file>
 
-<file path=ppt/slides/slide37.xml><?xml version="1.0" encoding="utf-8"?>
+<file path=ppt/slides/slide44.xml><?xml version="1.0" encoding="utf-8"?>
 <p:sld xmlns:a="http://schemas.openxmlformats.org/drawingml/2006/main" xmlns:r="http://schemas.openxmlformats.org/officeDocument/2006/relationships" xmlns:p="http://schemas.openxmlformats.org/presentationml/2006/main">
   <p:cSld>
     <p:spTree>
@@ -20847,130 +23065,6 @@
     <p:extLst>
       <p:ext uri="{BB962C8B-B14F-4D97-AF65-F5344CB8AC3E}">
         <p14:creationId xmlns:p14="http://schemas.microsoft.com/office/powerpoint/2010/main" val="867991865"/>
-      </p:ext>
-    </p:extLst>
-  </p:cSld>
-  <p:clrMapOvr>
-    <a:masterClrMapping/>
-  </p:clrMapOvr>
-</p:sld>
-</file>
-
-<file path=ppt/slides/slide4.xml><?xml version="1.0" encoding="utf-8"?>
-<p:sld xmlns:a="http://schemas.openxmlformats.org/drawingml/2006/main" xmlns:r="http://schemas.openxmlformats.org/officeDocument/2006/relationships" xmlns:p="http://schemas.openxmlformats.org/presentationml/2006/main">
-  <p:cSld>
-    <p:spTree>
-      <p:nvGrpSpPr>
-        <p:cNvPr id="1" name=""/>
-        <p:cNvGrpSpPr/>
-        <p:nvPr/>
-      </p:nvGrpSpPr>
-      <p:grpSpPr>
-        <a:xfrm>
-          <a:off x="0" y="0"/>
-          <a:ext cx="0" cy="0"/>
-          <a:chOff x="0" y="0"/>
-          <a:chExt cx="0" cy="0"/>
-        </a:xfrm>
-      </p:grpSpPr>
-      <p:sp>
-        <p:nvSpPr>
-          <p:cNvPr id="2" name="Title 1">
-            <a:extLst>
-              <a:ext uri="{FF2B5EF4-FFF2-40B4-BE49-F238E27FC236}">
-                <a16:creationId xmlns:a16="http://schemas.microsoft.com/office/drawing/2014/main" id="{A073B702-ED77-884E-88F7-92D73313F38D}"/>
-              </a:ext>
-            </a:extLst>
-          </p:cNvPr>
-          <p:cNvSpPr>
-            <a:spLocks noGrp="1"/>
-          </p:cNvSpPr>
-          <p:nvPr>
-            <p:ph type="title"/>
-          </p:nvPr>
-        </p:nvSpPr>
-        <p:spPr/>
-        <p:txBody>
-          <a:bodyPr/>
-          <a:lstStyle/>
-          <a:p>
-            <a:r>
-              <a:rPr lang="en-US" dirty="0"/>
-              <a:t>Plan for the week</a:t>
-            </a:r>
-          </a:p>
-        </p:txBody>
-      </p:sp>
-      <p:sp>
-        <p:nvSpPr>
-          <p:cNvPr id="3" name="Text Placeholder 2">
-            <a:extLst>
-              <a:ext uri="{FF2B5EF4-FFF2-40B4-BE49-F238E27FC236}">
-                <a16:creationId xmlns:a16="http://schemas.microsoft.com/office/drawing/2014/main" id="{7861BAD4-F7FB-1D48-9D37-2273592A75CE}"/>
-              </a:ext>
-            </a:extLst>
-          </p:cNvPr>
-          <p:cNvSpPr>
-            <a:spLocks noGrp="1"/>
-          </p:cNvSpPr>
-          <p:nvPr>
-            <p:ph type="body" idx="1"/>
-          </p:nvPr>
-        </p:nvSpPr>
-        <p:spPr/>
-        <p:txBody>
-          <a:bodyPr/>
-          <a:lstStyle/>
-          <a:p>
-            <a:r>
-              <a:rPr lang="en-US" dirty="0"/>
-              <a:t>What you should be discussing this week within your team</a:t>
-            </a:r>
-          </a:p>
-          <a:p>
-            <a:pPr lvl="1"/>
-            <a:r>
-              <a:rPr lang="en-US" dirty="0"/>
-              <a:t>Validation strategy &amp; temporal parameters</a:t>
-            </a:r>
-          </a:p>
-          <a:p>
-            <a:pPr lvl="1"/>
-            <a:r>
-              <a:rPr lang="en-US" dirty="0"/>
-              <a:t>Initial brainstorming features you’d like to build</a:t>
-            </a:r>
-          </a:p>
-          <a:p>
-            <a:pPr lvl="1"/>
-            <a:endParaRPr lang="en-US" dirty="0"/>
-          </a:p>
-          <a:p>
-            <a:r>
-              <a:rPr lang="en-US" dirty="0"/>
-              <a:t>What you should be building this week</a:t>
-            </a:r>
-          </a:p>
-          <a:p>
-            <a:pPr lvl="1"/>
-            <a:r>
-              <a:rPr lang="en-US" dirty="0"/>
-              <a:t>Temporal Validation Parameters</a:t>
-            </a:r>
-          </a:p>
-          <a:p>
-            <a:pPr lvl="1"/>
-            <a:r>
-              <a:rPr lang="en-US" dirty="0"/>
-              <a:t>Updated Cohort &amp; Label Queries</a:t>
-            </a:r>
-          </a:p>
-        </p:txBody>
-      </p:sp>
-    </p:spTree>
-    <p:extLst>
-      <p:ext uri="{BB962C8B-B14F-4D97-AF65-F5344CB8AC3E}">
-        <p14:creationId xmlns:p14="http://schemas.microsoft.com/office/powerpoint/2010/main" val="517800727"/>
       </p:ext>
     </p:extLst>
   </p:cSld>
